--- a/docs/evaluator_harness_project_presentation.pptx
+++ b/docs/evaluator_harness_project_presentation.pptx
@@ -2,24 +2,118 @@
 <file path=ppt/presentation.xml><?xml version="1.0" encoding="utf-8"?>
 <p:presentation xmlns:a="http://schemas.openxmlformats.org/drawingml/2006/main" xmlns:r="http://schemas.openxmlformats.org/officeDocument/2006/relationships" xmlns:p="http://schemas.openxmlformats.org/presentationml/2006/main">
   <p:sldMasterIdLst>
-    <p:sldMasterId id="2147483648" r:id="rIdMaster"/>
+    <p:sldMasterId id="2147483648" r:id="rId1"/>
   </p:sldMasterIdLst>
   <p:sldIdLst>
-    <p:sldId id="257" r:id="rId1"/>
-    <p:sldId id="258" r:id="rId2"/>
-    <p:sldId id="259" r:id="rId3"/>
-    <p:sldId id="260" r:id="rId4"/>
-    <p:sldId id="261" r:id="rId5"/>
-    <p:sldId id="262" r:id="rId6"/>
-    <p:sldId id="263" r:id="rId7"/>
-    <p:sldId id="264" r:id="rId8"/>
-    <p:sldId id="265" r:id="rId9"/>
-    <p:sldId id="266" r:id="rId10"/>
-    <p:sldId id="267" r:id="rId11"/>
-    <p:sldId id="268" r:id="rId12"/>
+    <p:sldId id="257" r:id="rId2"/>
+    <p:sldId id="260" r:id="rId3"/>
+    <p:sldId id="258" r:id="rId4"/>
+    <p:sldId id="259" r:id="rId5"/>
+    <p:sldId id="261" r:id="rId6"/>
+    <p:sldId id="262" r:id="rId7"/>
+    <p:sldId id="263" r:id="rId8"/>
+    <p:sldId id="264" r:id="rId9"/>
+    <p:sldId id="265" r:id="rId10"/>
+    <p:sldId id="266" r:id="rId11"/>
+    <p:sldId id="267" r:id="rId12"/>
   </p:sldIdLst>
-  <p:sldSz cx="12192000" cy="6858000" type="wide"/>
+  <p:sldSz cx="12192000" cy="6858000"/>
   <p:notesSz cx="6858000" cy="9144000"/>
+  <p:defaultTextStyle>
+    <a:defPPr>
+      <a:defRPr lang="en-US"/>
+    </a:defPPr>
+    <a:lvl1pPr marL="0" algn="l" defTabSz="914400" rtl="0" eaLnBrk="1" latinLnBrk="0" hangingPunct="1">
+      <a:defRPr sz="1800" kern="1200">
+        <a:solidFill>
+          <a:schemeClr val="tx1"/>
+        </a:solidFill>
+        <a:latin typeface="+mn-lt"/>
+        <a:ea typeface="+mn-ea"/>
+        <a:cs typeface="+mn-cs"/>
+      </a:defRPr>
+    </a:lvl1pPr>
+    <a:lvl2pPr marL="457200" algn="l" defTabSz="914400" rtl="0" eaLnBrk="1" latinLnBrk="0" hangingPunct="1">
+      <a:defRPr sz="1800" kern="1200">
+        <a:solidFill>
+          <a:schemeClr val="tx1"/>
+        </a:solidFill>
+        <a:latin typeface="+mn-lt"/>
+        <a:ea typeface="+mn-ea"/>
+        <a:cs typeface="+mn-cs"/>
+      </a:defRPr>
+    </a:lvl2pPr>
+    <a:lvl3pPr marL="914400" algn="l" defTabSz="914400" rtl="0" eaLnBrk="1" latinLnBrk="0" hangingPunct="1">
+      <a:defRPr sz="1800" kern="1200">
+        <a:solidFill>
+          <a:schemeClr val="tx1"/>
+        </a:solidFill>
+        <a:latin typeface="+mn-lt"/>
+        <a:ea typeface="+mn-ea"/>
+        <a:cs typeface="+mn-cs"/>
+      </a:defRPr>
+    </a:lvl3pPr>
+    <a:lvl4pPr marL="1371600" algn="l" defTabSz="914400" rtl="0" eaLnBrk="1" latinLnBrk="0" hangingPunct="1">
+      <a:defRPr sz="1800" kern="1200">
+        <a:solidFill>
+          <a:schemeClr val="tx1"/>
+        </a:solidFill>
+        <a:latin typeface="+mn-lt"/>
+        <a:ea typeface="+mn-ea"/>
+        <a:cs typeface="+mn-cs"/>
+      </a:defRPr>
+    </a:lvl4pPr>
+    <a:lvl5pPr marL="1828800" algn="l" defTabSz="914400" rtl="0" eaLnBrk="1" latinLnBrk="0" hangingPunct="1">
+      <a:defRPr sz="1800" kern="1200">
+        <a:solidFill>
+          <a:schemeClr val="tx1"/>
+        </a:solidFill>
+        <a:latin typeface="+mn-lt"/>
+        <a:ea typeface="+mn-ea"/>
+        <a:cs typeface="+mn-cs"/>
+      </a:defRPr>
+    </a:lvl5pPr>
+    <a:lvl6pPr marL="2286000" algn="l" defTabSz="914400" rtl="0" eaLnBrk="1" latinLnBrk="0" hangingPunct="1">
+      <a:defRPr sz="1800" kern="1200">
+        <a:solidFill>
+          <a:schemeClr val="tx1"/>
+        </a:solidFill>
+        <a:latin typeface="+mn-lt"/>
+        <a:ea typeface="+mn-ea"/>
+        <a:cs typeface="+mn-cs"/>
+      </a:defRPr>
+    </a:lvl6pPr>
+    <a:lvl7pPr marL="2743200" algn="l" defTabSz="914400" rtl="0" eaLnBrk="1" latinLnBrk="0" hangingPunct="1">
+      <a:defRPr sz="1800" kern="1200">
+        <a:solidFill>
+          <a:schemeClr val="tx1"/>
+        </a:solidFill>
+        <a:latin typeface="+mn-lt"/>
+        <a:ea typeface="+mn-ea"/>
+        <a:cs typeface="+mn-cs"/>
+      </a:defRPr>
+    </a:lvl7pPr>
+    <a:lvl8pPr marL="3200400" algn="l" defTabSz="914400" rtl="0" eaLnBrk="1" latinLnBrk="0" hangingPunct="1">
+      <a:defRPr sz="1800" kern="1200">
+        <a:solidFill>
+          <a:schemeClr val="tx1"/>
+        </a:solidFill>
+        <a:latin typeface="+mn-lt"/>
+        <a:ea typeface="+mn-ea"/>
+        <a:cs typeface="+mn-cs"/>
+      </a:defRPr>
+    </a:lvl8pPr>
+    <a:lvl9pPr marL="3657600" algn="l" defTabSz="914400" rtl="0" eaLnBrk="1" latinLnBrk="0" hangingPunct="1">
+      <a:defRPr sz="1800" kern="1200">
+        <a:solidFill>
+          <a:schemeClr val="tx1"/>
+        </a:solidFill>
+        <a:latin typeface="+mn-lt"/>
+        <a:ea typeface="+mn-ea"/>
+        <a:cs typeface="+mn-cs"/>
+      </a:defRPr>
+    </a:lvl9pPr>
+  </p:defaultTextStyle>
 </p:presentation>
 </file>
 
@@ -56,6 +150,7 @@
         <a:solidFill>
           <a:srgbClr val="FFFFFF"/>
         </a:solidFill>
+        <a:effectLst/>
       </p:bgPr>
     </p:bg>
     <p:spTree>
@@ -125,12 +220,13 @@
           </a:ln>
         </p:spPr>
         <p:txBody>
-          <a:bodyPr anchor="mid" wrap="square">
+          <a:bodyPr wrap="square" anchor="t">
             <a:spAutoFit/>
           </a:bodyPr>
           <a:lstStyle/>
           <a:p>
             <a:pPr algn="ctr"/>
+            <a:endParaRPr/>
           </a:p>
         </p:txBody>
       </p:sp>
@@ -156,12 +252,13 @@
           </a:ln>
         </p:spPr>
         <p:txBody>
-          <a:bodyPr anchor="mid" wrap="square">
+          <a:bodyPr wrap="square" anchor="t">
             <a:spAutoFit/>
           </a:bodyPr>
           <a:lstStyle/>
           <a:p>
             <a:pPr algn="ctr"/>
+            <a:endParaRPr/>
           </a:p>
         </p:txBody>
       </p:sp>
@@ -185,7 +282,7 @@
           </a:ln>
         </p:spPr>
         <p:txBody>
-          <a:bodyPr anchor="top" wrap="square">
+          <a:bodyPr wrap="square" anchor="t">
             <a:spAutoFit/>
           </a:bodyPr>
           <a:lstStyle/>
@@ -193,7 +290,6 @@
             <a:pPr algn="l"/>
             <a:r>
               <a:rPr lang="en-US" sz="3800" dirty="0">
-                <a:b/>
                 <a:solidFill>
                   <a:srgbClr val="111827"/>
                 </a:solidFill>
@@ -224,7 +320,7 @@
           </a:ln>
         </p:spPr>
         <p:txBody>
-          <a:bodyPr anchor="top" wrap="square">
+          <a:bodyPr wrap="square" anchor="t">
             <a:spAutoFit/>
           </a:bodyPr>
           <a:lstStyle/>
@@ -266,7 +362,7 @@
           </a:ln>
         </p:spPr>
         <p:txBody>
-          <a:bodyPr anchor="mid" wrap="square">
+          <a:bodyPr wrap="square" anchor="t">
             <a:spAutoFit/>
           </a:bodyPr>
           <a:lstStyle/>
@@ -274,7 +370,6 @@
             <a:pPr algn="ctr"/>
             <a:r>
               <a:rPr lang="en-US" sz="2000" dirty="0">
-                <a:b/>
                 <a:solidFill>
                   <a:srgbClr val="1E3A8A"/>
                 </a:solidFill>
@@ -309,7 +404,7 @@
           </a:ln>
         </p:spPr>
         <p:txBody>
-          <a:bodyPr anchor="mid" wrap="square">
+          <a:bodyPr wrap="square" anchor="t">
             <a:spAutoFit/>
           </a:bodyPr>
           <a:lstStyle/>
@@ -317,7 +412,6 @@
             <a:pPr algn="ctr"/>
             <a:r>
               <a:rPr lang="en-US" sz="2000" dirty="0">
-                <a:b/>
                 <a:solidFill>
                   <a:srgbClr val="134E4A"/>
                 </a:solidFill>
@@ -352,7 +446,7 @@
           </a:ln>
         </p:spPr>
         <p:txBody>
-          <a:bodyPr anchor="mid" wrap="square">
+          <a:bodyPr wrap="square" anchor="t">
             <a:spAutoFit/>
           </a:bodyPr>
           <a:lstStyle/>
@@ -360,7 +454,6 @@
             <a:pPr algn="ctr"/>
             <a:r>
               <a:rPr lang="en-US" sz="2000" dirty="0">
-                <a:b/>
                 <a:solidFill>
                   <a:srgbClr val="14532D"/>
                 </a:solidFill>
@@ -435,7 +528,7 @@
           </a:ln>
         </p:spPr>
         <p:txBody>
-          <a:bodyPr anchor="top" wrap="square">
+          <a:bodyPr wrap="square" anchor="t">
             <a:spAutoFit/>
           </a:bodyPr>
           <a:lstStyle/>
@@ -498,7 +591,7 @@
           </a:ln>
         </p:spPr>
         <p:txBody>
-          <a:bodyPr anchor="top" wrap="square">
+          <a:bodyPr wrap="square" anchor="t">
             <a:spAutoFit/>
           </a:bodyPr>
           <a:lstStyle/>
@@ -506,7 +599,6 @@
             <a:pPr algn="l"/>
             <a:r>
               <a:rPr lang="en-US" sz="3000" dirty="0">
-                <a:b/>
                 <a:solidFill>
                   <a:srgbClr val="111827"/>
                 </a:solidFill>
@@ -537,7 +629,7 @@
           </a:ln>
         </p:spPr>
         <p:txBody>
-          <a:bodyPr anchor="top" wrap="square">
+          <a:bodyPr wrap="square" anchor="t">
             <a:spAutoFit/>
           </a:bodyPr>
           <a:lstStyle/>
@@ -576,6 +668,13 @@
             <a:noFill/>
           </a:ln>
         </p:spPr>
+        <p:txBody>
+          <a:bodyPr/>
+          <a:lstStyle/>
+          <a:p>
+            <a:endParaRPr lang="en-US"/>
+          </a:p>
+        </p:txBody>
       </p:sp>
       <p:sp>
         <p:nvSpPr>
@@ -601,12 +700,13 @@
           </a:ln>
         </p:spPr>
         <p:txBody>
-          <a:bodyPr anchor="mid" wrap="square">
+          <a:bodyPr wrap="square" anchor="t">
             <a:spAutoFit/>
           </a:bodyPr>
           <a:lstStyle/>
           <a:p>
             <a:pPr algn="ctr"/>
+            <a:endParaRPr/>
           </a:p>
         </p:txBody>
       </p:sp>
@@ -630,7 +730,7 @@
           </a:ln>
         </p:spPr>
         <p:txBody>
-          <a:bodyPr anchor="top" wrap="square">
+          <a:bodyPr wrap="square" anchor="t">
             <a:spAutoFit/>
           </a:bodyPr>
           <a:lstStyle/>
@@ -638,7 +738,6 @@
             <a:pPr algn="ctr"/>
             <a:r>
               <a:rPr lang="en-US" sz="2000" dirty="0">
-                <a:b/>
                 <a:solidFill>
                   <a:srgbClr val="1E3A8A"/>
                 </a:solidFill>
@@ -669,7 +768,7 @@
           </a:ln>
         </p:spPr>
         <p:txBody>
-          <a:bodyPr anchor="top" wrap="square">
+          <a:bodyPr wrap="square" anchor="t">
             <a:spAutoFit/>
           </a:bodyPr>
           <a:lstStyle/>
@@ -757,12 +856,13 @@
           </a:ln>
         </p:spPr>
         <p:txBody>
-          <a:bodyPr anchor="mid" wrap="square">
+          <a:bodyPr wrap="square" anchor="t">
             <a:spAutoFit/>
           </a:bodyPr>
           <a:lstStyle/>
           <a:p>
             <a:pPr algn="ctr"/>
+            <a:endParaRPr/>
           </a:p>
         </p:txBody>
       </p:sp>
@@ -786,7 +886,7 @@
           </a:ln>
         </p:spPr>
         <p:txBody>
-          <a:bodyPr anchor="top" wrap="square">
+          <a:bodyPr wrap="square" anchor="t">
             <a:spAutoFit/>
           </a:bodyPr>
           <a:lstStyle/>
@@ -794,7 +894,6 @@
             <a:pPr algn="ctr"/>
             <a:r>
               <a:rPr lang="en-US" sz="2000" dirty="0">
-                <a:b/>
                 <a:solidFill>
                   <a:srgbClr val="111827"/>
                 </a:solidFill>
@@ -825,7 +924,7 @@
           </a:ln>
         </p:spPr>
         <p:txBody>
-          <a:bodyPr anchor="top" wrap="square">
+          <a:bodyPr wrap="square" anchor="t">
             <a:spAutoFit/>
           </a:bodyPr>
           <a:lstStyle/>
@@ -925,12 +1024,13 @@
           </a:ln>
         </p:spPr>
         <p:txBody>
-          <a:bodyPr anchor="mid" wrap="square">
+          <a:bodyPr wrap="square" anchor="t">
             <a:spAutoFit/>
           </a:bodyPr>
           <a:lstStyle/>
           <a:p>
             <a:pPr algn="ctr"/>
+            <a:endParaRPr/>
           </a:p>
         </p:txBody>
       </p:sp>
@@ -954,7 +1054,7 @@
           </a:ln>
         </p:spPr>
         <p:txBody>
-          <a:bodyPr anchor="top" wrap="square">
+          <a:bodyPr wrap="square" anchor="t">
             <a:spAutoFit/>
           </a:bodyPr>
           <a:lstStyle/>
@@ -962,7 +1062,6 @@
             <a:pPr algn="ctr"/>
             <a:r>
               <a:rPr lang="en-US" sz="2000" dirty="0">
-                <a:b/>
                 <a:solidFill>
                   <a:srgbClr val="134E4A"/>
                 </a:solidFill>
@@ -993,7 +1092,7 @@
           </a:ln>
         </p:spPr>
         <p:txBody>
-          <a:bodyPr anchor="top" wrap="square">
+          <a:bodyPr wrap="square" anchor="t">
             <a:spAutoFit/>
           </a:bodyPr>
           <a:lstStyle/>
@@ -1105,12 +1204,13 @@
           </a:ln>
         </p:spPr>
         <p:txBody>
-          <a:bodyPr anchor="mid" wrap="square">
+          <a:bodyPr wrap="square" anchor="t">
             <a:spAutoFit/>
           </a:bodyPr>
           <a:lstStyle/>
           <a:p>
             <a:pPr algn="ctr"/>
+            <a:endParaRPr/>
           </a:p>
         </p:txBody>
       </p:sp>
@@ -1134,7 +1234,7 @@
           </a:ln>
         </p:spPr>
         <p:txBody>
-          <a:bodyPr anchor="top" wrap="square">
+          <a:bodyPr wrap="square" anchor="t">
             <a:spAutoFit/>
           </a:bodyPr>
           <a:lstStyle/>
@@ -1142,7 +1242,6 @@
             <a:pPr algn="ctr"/>
             <a:r>
               <a:rPr lang="en-US" sz="2000" dirty="0">
-                <a:b/>
                 <a:solidFill>
                   <a:srgbClr val="78350F"/>
                 </a:solidFill>
@@ -1173,7 +1272,7 @@
           </a:ln>
         </p:spPr>
         <p:txBody>
-          <a:bodyPr anchor="top" wrap="square">
+          <a:bodyPr wrap="square" anchor="t">
             <a:spAutoFit/>
           </a:bodyPr>
           <a:lstStyle/>
@@ -1247,7 +1346,7 @@
           </a:ln>
         </p:spPr>
         <p:txBody>
-          <a:bodyPr anchor="top" wrap="square">
+          <a:bodyPr wrap="square" anchor="t">
             <a:spAutoFit/>
           </a:bodyPr>
           <a:lstStyle/>
@@ -1310,7 +1409,7 @@
           </a:ln>
         </p:spPr>
         <p:txBody>
-          <a:bodyPr anchor="top" wrap="square">
+          <a:bodyPr wrap="square" anchor="t">
             <a:spAutoFit/>
           </a:bodyPr>
           <a:lstStyle/>
@@ -1318,7 +1417,6 @@
             <a:pPr algn="l"/>
             <a:r>
               <a:rPr lang="en-US" sz="3000" dirty="0">
-                <a:b/>
                 <a:solidFill>
                   <a:srgbClr val="111827"/>
                 </a:solidFill>
@@ -1349,7 +1447,7 @@
           </a:ln>
         </p:spPr>
         <p:txBody>
-          <a:bodyPr anchor="top" wrap="square">
+          <a:bodyPr wrap="square" anchor="t">
             <a:spAutoFit/>
           </a:bodyPr>
           <a:lstStyle/>
@@ -1388,6 +1486,13 @@
             <a:noFill/>
           </a:ln>
         </p:spPr>
+        <p:txBody>
+          <a:bodyPr/>
+          <a:lstStyle/>
+          <a:p>
+            <a:endParaRPr lang="en-US"/>
+          </a:p>
+        </p:txBody>
       </p:sp>
       <p:sp>
         <p:nvSpPr>
@@ -1413,12 +1518,13 @@
           </a:ln>
         </p:spPr>
         <p:txBody>
-          <a:bodyPr anchor="mid" wrap="square">
+          <a:bodyPr wrap="square" anchor="t">
             <a:spAutoFit/>
           </a:bodyPr>
           <a:lstStyle/>
           <a:p>
             <a:pPr algn="ctr"/>
+            <a:endParaRPr/>
           </a:p>
         </p:txBody>
       </p:sp>
@@ -1444,12 +1550,13 @@
           </a:ln>
         </p:spPr>
         <p:txBody>
-          <a:bodyPr anchor="mid" wrap="square">
+          <a:bodyPr wrap="square" anchor="t">
             <a:spAutoFit/>
           </a:bodyPr>
           <a:lstStyle/>
           <a:p>
             <a:pPr algn="ctr"/>
+            <a:endParaRPr/>
           </a:p>
         </p:txBody>
       </p:sp>
@@ -1473,7 +1580,7 @@
           </a:ln>
         </p:spPr>
         <p:txBody>
-          <a:bodyPr anchor="top" wrap="square">
+          <a:bodyPr wrap="square" anchor="t">
             <a:spAutoFit/>
           </a:bodyPr>
           <a:lstStyle/>
@@ -1481,7 +1588,6 @@
             <a:pPr algn="l"/>
             <a:r>
               <a:rPr lang="en-US" sz="2100" dirty="0">
-                <a:b/>
                 <a:solidFill>
                   <a:srgbClr val="111827"/>
                 </a:solidFill>
@@ -1512,7 +1618,7 @@
           </a:ln>
         </p:spPr>
         <p:txBody>
-          <a:bodyPr anchor="top" wrap="square">
+          <a:bodyPr wrap="square" anchor="t">
             <a:spAutoFit/>
           </a:bodyPr>
           <a:lstStyle/>
@@ -1554,12 +1660,13 @@
           </a:ln>
         </p:spPr>
         <p:txBody>
-          <a:bodyPr anchor="mid" wrap="square">
+          <a:bodyPr wrap="square" anchor="t">
             <a:spAutoFit/>
           </a:bodyPr>
           <a:lstStyle/>
           <a:p>
             <a:pPr algn="ctr"/>
+            <a:endParaRPr/>
           </a:p>
         </p:txBody>
       </p:sp>
@@ -1585,12 +1692,13 @@
           </a:ln>
         </p:spPr>
         <p:txBody>
-          <a:bodyPr anchor="mid" wrap="square">
+          <a:bodyPr wrap="square" anchor="t">
             <a:spAutoFit/>
           </a:bodyPr>
           <a:lstStyle/>
           <a:p>
             <a:pPr algn="ctr"/>
+            <a:endParaRPr/>
           </a:p>
         </p:txBody>
       </p:sp>
@@ -1614,7 +1722,7 @@
           </a:ln>
         </p:spPr>
         <p:txBody>
-          <a:bodyPr anchor="top" wrap="square">
+          <a:bodyPr wrap="square" anchor="t">
             <a:spAutoFit/>
           </a:bodyPr>
           <a:lstStyle/>
@@ -1622,7 +1730,6 @@
             <a:pPr algn="l"/>
             <a:r>
               <a:rPr lang="en-US" sz="2100" dirty="0">
-                <a:b/>
                 <a:solidFill>
                   <a:srgbClr val="111827"/>
                 </a:solidFill>
@@ -1653,7 +1760,7 @@
           </a:ln>
         </p:spPr>
         <p:txBody>
-          <a:bodyPr anchor="top" wrap="square">
+          <a:bodyPr wrap="square" anchor="t">
             <a:spAutoFit/>
           </a:bodyPr>
           <a:lstStyle/>
@@ -1695,12 +1802,13 @@
           </a:ln>
         </p:spPr>
         <p:txBody>
-          <a:bodyPr anchor="mid" wrap="square">
+          <a:bodyPr wrap="square" anchor="t">
             <a:spAutoFit/>
           </a:bodyPr>
           <a:lstStyle/>
           <a:p>
             <a:pPr algn="ctr"/>
+            <a:endParaRPr/>
           </a:p>
         </p:txBody>
       </p:sp>
@@ -1726,12 +1834,13 @@
           </a:ln>
         </p:spPr>
         <p:txBody>
-          <a:bodyPr anchor="mid" wrap="square">
+          <a:bodyPr wrap="square" anchor="t">
             <a:spAutoFit/>
           </a:bodyPr>
           <a:lstStyle/>
           <a:p>
             <a:pPr algn="ctr"/>
+            <a:endParaRPr/>
           </a:p>
         </p:txBody>
       </p:sp>
@@ -1744,18 +1853,18 @@
         <p:spPr>
           <a:xfrm>
             <a:off x="1234440" y="4434840"/>
-            <a:ext cx="2560320" cy="292608"/>
-          </a:xfrm>
-          <a:prstGeom prst="rect">
-            <a:avLst/>
-          </a:prstGeom>
-          <a:noFill/>
-          <a:ln>
-            <a:noFill/>
-          </a:ln>
-        </p:spPr>
-        <p:txBody>
-          <a:bodyPr anchor="top" wrap="square">
+            <a:ext cx="2560320" cy="415498"/>
+          </a:xfrm>
+          <a:prstGeom prst="rect">
+            <a:avLst/>
+          </a:prstGeom>
+          <a:noFill/>
+          <a:ln>
+            <a:noFill/>
+          </a:ln>
+        </p:spPr>
+        <p:txBody>
+          <a:bodyPr wrap="square" anchor="t">
             <a:spAutoFit/>
           </a:bodyPr>
           <a:lstStyle/>
@@ -1763,13 +1872,12 @@
             <a:pPr algn="l"/>
             <a:r>
               <a:rPr lang="en-US" sz="2100" dirty="0">
-                <a:b/>
                 <a:solidFill>
                   <a:srgbClr val="111827"/>
                 </a:solidFill>
                 <a:latin typeface="Aptos"/>
               </a:rPr>
-              <a:t>3. Scores</a:t>
+              <a:t>3. Experiments</a:t>
             </a:r>
           </a:p>
         </p:txBody>
@@ -1783,18 +1891,18 @@
         <p:spPr>
           <a:xfrm>
             <a:off x="3840480" y="4434840"/>
-            <a:ext cx="6766560" cy="475488"/>
-          </a:xfrm>
-          <a:prstGeom prst="rect">
-            <a:avLst/>
-          </a:prstGeom>
-          <a:noFill/>
-          <a:ln>
-            <a:noFill/>
-          </a:ln>
-        </p:spPr>
-        <p:txBody>
-          <a:bodyPr anchor="top" wrap="square">
+            <a:ext cx="6766560" cy="646331"/>
+          </a:xfrm>
+          <a:prstGeom prst="rect">
+            <a:avLst/>
+          </a:prstGeom>
+          <a:noFill/>
+          <a:ln>
+            <a:noFill/>
+          </a:ln>
+        </p:spPr>
+        <p:txBody>
+          <a:bodyPr wrap="square" anchor="t">
             <a:spAutoFit/>
           </a:bodyPr>
           <a:lstStyle/>
@@ -1807,7 +1915,7 @@
                 </a:solidFill>
                 <a:latin typeface="Aptos"/>
               </a:rPr>
-              <a:t>Compare score source EVAL vs ANNOTATION and inspect trace context.</a:t>
+              <a:t>Review the experiments / runs, linking traces and scores with dataset rows</a:t>
             </a:r>
           </a:p>
         </p:txBody>
@@ -1832,7 +1940,7 @@
           </a:ln>
         </p:spPr>
         <p:txBody>
-          <a:bodyPr anchor="top" wrap="square">
+          <a:bodyPr wrap="square" anchor="t">
             <a:spAutoFit/>
           </a:bodyPr>
           <a:lstStyle/>
@@ -1870,7 +1978,7 @@
           </a:ln>
         </p:spPr>
         <p:txBody>
-          <a:bodyPr anchor="top" wrap="square">
+          <a:bodyPr wrap="square" anchor="t">
             <a:spAutoFit/>
           </a:bodyPr>
           <a:lstStyle/>
@@ -1884,247 +1992,6 @@
                 <a:latin typeface="Aptos"/>
               </a:rPr>
               <a:t>Evaluator Harness | Langfuse-first offline evaluation workflow</a:t>
-            </a:r>
-          </a:p>
-        </p:txBody>
-      </p:sp>
-    </p:spTree>
-  </p:cSld>
-  <p:clrMapOvr>
-    <a:masterClrMapping/>
-  </p:clrMapOvr>
-</p:sld>
-</file>
-
-<file path=ppt/slides/slide12.xml><?xml version="1.0" encoding="utf-8"?>
-<p:sld xmlns:a="http://schemas.openxmlformats.org/drawingml/2006/main" xmlns:r="http://schemas.openxmlformats.org/officeDocument/2006/relationships" xmlns:p="http://schemas.openxmlformats.org/presentationml/2006/main">
-  <p:cSld>
-    <p:spTree>
-      <p:nvGrpSpPr>
-        <p:cNvPr id="1" name=""/>
-        <p:cNvGrpSpPr/>
-        <p:nvPr/>
-      </p:nvGrpSpPr>
-      <p:grpSpPr>
-        <a:xfrm>
-          <a:off x="0" y="0"/>
-          <a:ext cx="12192000" cy="6858000"/>
-          <a:chOff x="0" y="0"/>
-          <a:chExt cx="12192000" cy="6858000"/>
-        </a:xfrm>
-      </p:grpSpPr>
-      <p:sp>
-        <p:nvSpPr>
-          <p:cNvPr id="2" name="TextBox 2"/>
-          <p:cNvSpPr txBox="1"/>
-          <p:nvPr/>
-        </p:nvSpPr>
-        <p:spPr>
-          <a:xfrm>
-            <a:off x="502920" y="320040"/>
-            <a:ext cx="9966960" cy="502920"/>
-          </a:xfrm>
-          <a:prstGeom prst="rect">
-            <a:avLst/>
-          </a:prstGeom>
-          <a:noFill/>
-          <a:ln>
-            <a:noFill/>
-          </a:ln>
-        </p:spPr>
-        <p:txBody>
-          <a:bodyPr anchor="top" wrap="square">
-            <a:spAutoFit/>
-          </a:bodyPr>
-          <a:lstStyle/>
-          <a:p>
-            <a:pPr algn="l"/>
-            <a:r>
-              <a:rPr lang="en-US" sz="3000" dirty="0">
-                <a:b/>
-                <a:solidFill>
-                  <a:srgbClr val="111827"/>
-                </a:solidFill>
-                <a:latin typeface="Aptos"/>
-              </a:rPr>
-              <a:t>Reference Material</a:t>
-            </a:r>
-          </a:p>
-        </p:txBody>
-      </p:sp>
-      <p:sp>
-        <p:nvSpPr>
-          <p:cNvPr id="3" name="TextBox 3"/>
-          <p:cNvSpPr txBox="1"/>
-          <p:nvPr/>
-        </p:nvSpPr>
-        <p:spPr>
-          <a:xfrm>
-            <a:off x="530352" y="868680"/>
-            <a:ext cx="9509760" cy="320040"/>
-          </a:xfrm>
-          <a:prstGeom prst="rect">
-            <a:avLst/>
-          </a:prstGeom>
-          <a:noFill/>
-          <a:ln>
-            <a:noFill/>
-          </a:ln>
-        </p:spPr>
-        <p:txBody>
-          <a:bodyPr anchor="top" wrap="square">
-            <a:spAutoFit/>
-          </a:bodyPr>
-          <a:lstStyle/>
-          <a:p>
-            <a:pPr algn="l"/>
-            <a:r>
-              <a:rPr lang="en-US" sz="1700" dirty="0">
-                <a:solidFill>
-                  <a:srgbClr val="475569"/>
-                </a:solidFill>
-                <a:latin typeface="Aptos"/>
-              </a:rPr>
-              <a:t>Project and Langfuse sources used for this presentation</a:t>
-            </a:r>
-          </a:p>
-        </p:txBody>
-      </p:sp>
-      <p:sp>
-        <p:nvSpPr>
-          <p:cNvPr id="4" name="Title Rule"/>
-          <p:cNvSpPr/>
-          <p:nvPr/>
-        </p:nvSpPr>
-        <p:spPr>
-          <a:xfrm>
-            <a:off x="502920" y="1143000"/>
-            <a:ext cx="9509760" cy="27432"/>
-          </a:xfrm>
-          <a:prstGeom prst="rect">
-            <a:avLst/>
-          </a:prstGeom>
-          <a:solidFill>
-            <a:srgbClr val="2563EB"/>
-          </a:solidFill>
-          <a:ln>
-            <a:noFill/>
-          </a:ln>
-        </p:spPr>
-      </p:sp>
-      <p:sp>
-        <p:nvSpPr>
-          <p:cNvPr id="5" name="TextBox 5"/>
-          <p:cNvSpPr txBox="1"/>
-          <p:nvPr/>
-        </p:nvSpPr>
-        <p:spPr>
-          <a:xfrm>
-            <a:off x="822960" y="1417320"/>
-            <a:ext cx="10332720" cy="4389120"/>
-          </a:xfrm>
-          <a:prstGeom prst="rect">
-            <a:avLst/>
-          </a:prstGeom>
-          <a:noFill/>
-          <a:ln>
-            <a:noFill/>
-          </a:ln>
-        </p:spPr>
-        <p:txBody>
-          <a:bodyPr anchor="top" wrap="square">
-            <a:spAutoFit/>
-          </a:bodyPr>
-          <a:lstStyle/>
-          <a:p>
-            <a:pPr algn="l"/>
-            <a:r>
-              <a:rPr lang="en-US" sz="1800" dirty="0">
-                <a:solidFill>
-                  <a:srgbClr val="334155"/>
-                </a:solidFill>
-                <a:latin typeface="Aptos"/>
-              </a:rPr>
-              <a:t>- README.md: harness overview, quickstart, prompt sync, judge setup, review queue, score guidance</a:t>
-            </a:r>
-          </a:p>
-          <a:p>
-            <a:pPr algn="l"/>
-            <a:r>
-              <a:rPr lang="en-US" sz="1800" dirty="0">
-                <a:solidFill>
-                  <a:srgbClr val="334155"/>
-                </a:solidFill>
-                <a:latin typeface="Aptos"/>
-              </a:rPr>
-              <a:t>- specs/012-sync-langfuse-prompts/plan.md: prompt publishing workflow and constraints</a:t>
-            </a:r>
-          </a:p>
-          <a:p>
-            <a:pPr algn="l"/>
-            <a:r>
-              <a:rPr lang="en-US" sz="1800" dirty="0">
-                <a:solidFill>
-                  <a:srgbClr val="334155"/>
-                </a:solidFill>
-                <a:latin typeface="Aptos"/>
-              </a:rPr>
-              <a:t>- Langfuse docs: https://langfuse.com/docs/scores and /docs/evaluation/evaluation-methods/annotation-queues</a:t>
-            </a:r>
-          </a:p>
-          <a:p>
-            <a:pPr algn="l"/>
-            <a:r>
-              <a:rPr lang="en-US" sz="1800" dirty="0">
-                <a:solidFill>
-                  <a:srgbClr val="334155"/>
-                </a:solidFill>
-                <a:latin typeface="Aptos"/>
-              </a:rPr>
-              <a:t>- Langfuse Cloud/Self-hosted: https://langfuse.com/docs/deployment/cloud; GitHub: https://github.com/langfuse/langfuse</a:t>
-            </a:r>
-          </a:p>
-        </p:txBody>
-      </p:sp>
-      <p:sp>
-        <p:nvSpPr>
-          <p:cNvPr id="6" name="Shape 6"/>
-          <p:cNvSpPr/>
-          <p:nvPr/>
-        </p:nvSpPr>
-        <p:spPr>
-          <a:xfrm>
-            <a:off x="822960" y="5532120"/>
-            <a:ext cx="10058400" cy="640080"/>
-          </a:xfrm>
-          <a:prstGeom prst="roundRect">
-            <a:avLst/>
-          </a:prstGeom>
-          <a:solidFill>
-            <a:srgbClr val="EFF6FF"/>
-          </a:solidFill>
-          <a:ln w="18000">
-            <a:solidFill>
-              <a:srgbClr val="BFDBFE"/>
-            </a:solidFill>
-          </a:ln>
-        </p:spPr>
-        <p:txBody>
-          <a:bodyPr anchor="mid" wrap="square">
-            <a:spAutoFit/>
-          </a:bodyPr>
-          <a:lstStyle/>
-          <a:p>
-            <a:pPr algn="ctr"/>
-            <a:r>
-              <a:rPr lang="en-US" sz="1800" dirty="0">
-                <a:b/>
-                <a:solidFill>
-                  <a:srgbClr val="1E3A8A"/>
-                </a:solidFill>
-                <a:latin typeface="Aptos"/>
-              </a:rPr>
-              <a:t>All slide text is 16pt or larger.</a:t>
             </a:r>
           </a:p>
         </p:txBody>
@@ -2163,32 +2030,40 @@
         <p:spPr>
           <a:xfrm>
             <a:off x="502920" y="320040"/>
-            <a:ext cx="9966960" cy="502920"/>
-          </a:xfrm>
-          <a:prstGeom prst="rect">
-            <a:avLst/>
-          </a:prstGeom>
-          <a:noFill/>
-          <a:ln>
-            <a:noFill/>
-          </a:ln>
-        </p:spPr>
-        <p:txBody>
-          <a:bodyPr anchor="top" wrap="square">
-            <a:spAutoFit/>
-          </a:bodyPr>
-          <a:lstStyle/>
-          <a:p>
-            <a:pPr algn="l"/>
+            <a:ext cx="9966960" cy="553998"/>
+          </a:xfrm>
+          <a:prstGeom prst="rect">
+            <a:avLst/>
+          </a:prstGeom>
+          <a:noFill/>
+          <a:ln>
+            <a:noFill/>
+          </a:ln>
+        </p:spPr>
+        <p:txBody>
+          <a:bodyPr wrap="square" anchor="t">
+            <a:spAutoFit/>
+          </a:bodyPr>
+          <a:lstStyle/>
+          <a:p>
+            <a:pPr algn="l"/>
+            <a:r>
+              <a:rPr lang="en-US" sz="3000" dirty="0" err="1">
+                <a:solidFill>
+                  <a:srgbClr val="111827"/>
+                </a:solidFill>
+                <a:latin typeface="Aptos"/>
+              </a:rPr>
+              <a:t>Langfuse</a:t>
+            </a:r>
             <a:r>
               <a:rPr lang="en-US" sz="3000" dirty="0">
-                <a:b/>
                 <a:solidFill>
                   <a:srgbClr val="111827"/>
                 </a:solidFill>
                 <a:latin typeface="Aptos"/>
               </a:rPr>
-              <a:t>Harness Objectives</a:t>
+              <a:t> </a:t>
             </a:r>
           </a:p>
         </p:txBody>
@@ -2213,7 +2088,7 @@
           </a:ln>
         </p:spPr>
         <p:txBody>
-          <a:bodyPr anchor="top" wrap="square">
+          <a:bodyPr wrap="square" anchor="t">
             <a:spAutoFit/>
           </a:bodyPr>
           <a:lstStyle/>
@@ -2226,7 +2101,7 @@
                 </a:solidFill>
                 <a:latin typeface="Aptos"/>
               </a:rPr>
-              <a:t>What the app is for</a:t>
+              <a:t>The shared system of record for LLM observability and evaluation</a:t>
             </a:r>
           </a:p>
         </p:txBody>
@@ -2252,6 +2127,13 @@
             <a:noFill/>
           </a:ln>
         </p:spPr>
+        <p:txBody>
+          <a:bodyPr/>
+          <a:lstStyle/>
+          <a:p>
+            <a:endParaRPr lang="en-US"/>
+          </a:p>
+        </p:txBody>
       </p:sp>
       <p:sp>
         <p:nvSpPr>
@@ -2261,275 +2143,249 @@
         </p:nvSpPr>
         <p:spPr>
           <a:xfrm>
-            <a:off x="685800" y="1508760"/>
-            <a:ext cx="5257800" cy="4343400"/>
+            <a:off x="777240" y="1508760"/>
+            <a:ext cx="5074920" cy="1417320"/>
           </a:xfrm>
           <a:prstGeom prst="roundRect">
             <a:avLst/>
           </a:prstGeom>
           <a:solidFill>
-            <a:srgbClr val="FFFFFF"/>
+            <a:srgbClr val="DBEAFE"/>
           </a:solidFill>
           <a:ln w="18000">
             <a:solidFill>
-              <a:srgbClr val="CBD5E1"/>
+              <a:srgbClr val="FFFFFF"/>
             </a:solidFill>
           </a:ln>
         </p:spPr>
         <p:txBody>
-          <a:bodyPr anchor="mid" wrap="square">
+          <a:bodyPr wrap="square" anchor="t">
             <a:spAutoFit/>
           </a:bodyPr>
           <a:lstStyle/>
           <a:p>
             <a:pPr algn="ctr"/>
-          </a:p>
-        </p:txBody>
-      </p:sp>
-      <p:sp>
-        <p:nvSpPr>
-          <p:cNvPr id="6" name="Shape 6"/>
+            <a:endParaRPr/>
+          </a:p>
+        </p:txBody>
+      </p:sp>
+      <p:sp>
+        <p:nvSpPr>
+          <p:cNvPr id="6" name="TextBox 6"/>
+          <p:cNvSpPr txBox="1"/>
+          <p:nvPr/>
+        </p:nvSpPr>
+        <p:spPr>
+          <a:xfrm>
+            <a:off x="1051560" y="1709928"/>
+            <a:ext cx="4572000" cy="292608"/>
+          </a:xfrm>
+          <a:prstGeom prst="rect">
+            <a:avLst/>
+          </a:prstGeom>
+          <a:noFill/>
+          <a:ln>
+            <a:noFill/>
+          </a:ln>
+        </p:spPr>
+        <p:txBody>
+          <a:bodyPr wrap="square" anchor="t">
+            <a:spAutoFit/>
+          </a:bodyPr>
+          <a:lstStyle/>
+          <a:p>
+            <a:pPr algn="l"/>
+            <a:r>
+              <a:rPr lang="en-US" sz="2100" dirty="0">
+                <a:solidFill>
+                  <a:srgbClr val="1E3A8A"/>
+                </a:solidFill>
+                <a:latin typeface="Aptos"/>
+              </a:rPr>
+              <a:t>Open Source</a:t>
+            </a:r>
+          </a:p>
+        </p:txBody>
+      </p:sp>
+      <p:sp>
+        <p:nvSpPr>
+          <p:cNvPr id="7" name="TextBox 7"/>
+          <p:cNvSpPr txBox="1"/>
+          <p:nvPr/>
+        </p:nvSpPr>
+        <p:spPr>
+          <a:xfrm>
+            <a:off x="1051560" y="2061727"/>
+            <a:ext cx="4572000" cy="713232"/>
+          </a:xfrm>
+          <a:prstGeom prst="rect">
+            <a:avLst/>
+          </a:prstGeom>
+          <a:noFill/>
+          <a:ln>
+            <a:noFill/>
+          </a:ln>
+        </p:spPr>
+        <p:txBody>
+          <a:bodyPr wrap="square" anchor="t">
+            <a:spAutoFit/>
+          </a:bodyPr>
+          <a:lstStyle/>
+          <a:p>
+            <a:pPr algn="l"/>
+            <a:r>
+              <a:rPr lang="en-US" sz="1700" dirty="0">
+                <a:solidFill>
+                  <a:srgbClr val="334155"/>
+                </a:solidFill>
+                <a:latin typeface="Aptos"/>
+              </a:rPr>
+              <a:t>Core platform is open source, so teams can inspect, extend, and self-host when needed.</a:t>
+            </a:r>
+          </a:p>
+        </p:txBody>
+      </p:sp>
+      <p:sp>
+        <p:nvSpPr>
+          <p:cNvPr id="8" name="Shape 8"/>
           <p:cNvSpPr/>
           <p:nvPr/>
         </p:nvSpPr>
         <p:spPr>
           <a:xfrm>
-            <a:off x="685800" y="1508760"/>
-            <a:ext cx="73152" cy="4343400"/>
-          </a:xfrm>
-          <a:prstGeom prst="rect">
+            <a:off x="6400800" y="1508760"/>
+            <a:ext cx="5074920" cy="1417320"/>
+          </a:xfrm>
+          <a:prstGeom prst="roundRect">
             <a:avLst/>
           </a:prstGeom>
           <a:solidFill>
-            <a:srgbClr val="2563EB"/>
-          </a:solidFill>
-          <a:ln>
-            <a:noFill/>
-          </a:ln>
-        </p:spPr>
-        <p:txBody>
-          <a:bodyPr anchor="mid" wrap="square">
-            <a:spAutoFit/>
-          </a:bodyPr>
-          <a:lstStyle/>
-          <a:p>
-            <a:pPr algn="ctr"/>
-          </a:p>
-        </p:txBody>
-      </p:sp>
-      <p:sp>
-        <p:nvSpPr>
-          <p:cNvPr id="7" name="TextBox 7"/>
-          <p:cNvSpPr txBox="1"/>
-          <p:nvPr/>
-        </p:nvSpPr>
-        <p:spPr>
-          <a:xfrm>
-            <a:off x="941832" y="1691639"/>
-            <a:ext cx="4846320" cy="320040"/>
-          </a:xfrm>
-          <a:prstGeom prst="rect">
-            <a:avLst/>
-          </a:prstGeom>
-          <a:noFill/>
-          <a:ln>
-            <a:noFill/>
-          </a:ln>
-        </p:spPr>
-        <p:txBody>
-          <a:bodyPr anchor="top" wrap="square">
-            <a:spAutoFit/>
-          </a:bodyPr>
-          <a:lstStyle/>
-          <a:p>
-            <a:pPr algn="l"/>
-            <a:r>
-              <a:rPr lang="en-US" sz="2000" dirty="0">
-                <a:b/>
-                <a:solidFill>
-                  <a:srgbClr val="111827"/>
-                </a:solidFill>
-                <a:latin typeface="Aptos"/>
-              </a:rPr>
-              <a:t>Primary purpose</a:t>
-            </a:r>
-          </a:p>
-        </p:txBody>
-      </p:sp>
-      <p:sp>
-        <p:nvSpPr>
-          <p:cNvPr id="8" name="TextBox 8"/>
-          <p:cNvSpPr txBox="1"/>
-          <p:nvPr/>
-        </p:nvSpPr>
-        <p:spPr>
-          <a:xfrm>
-            <a:off x="978408" y="2103120"/>
-            <a:ext cx="4754880" cy="3611880"/>
-          </a:xfrm>
-          <a:prstGeom prst="rect">
-            <a:avLst/>
-          </a:prstGeom>
-          <a:noFill/>
-          <a:ln>
-            <a:noFill/>
-          </a:ln>
-        </p:spPr>
-        <p:txBody>
-          <a:bodyPr anchor="top" wrap="square">
-            <a:spAutoFit/>
-          </a:bodyPr>
-          <a:lstStyle/>
-          <a:p>
-            <a:pPr algn="l"/>
-            <a:r>
-              <a:rPr lang="en-US" sz="1700" dirty="0">
-                <a:solidFill>
-                  <a:srgbClr val="334155"/>
-                </a:solidFill>
-                <a:latin typeface="Aptos"/>
-              </a:rPr>
-              <a:t>- Run project datasets against baseline and candidate LLM configurations</a:t>
-            </a:r>
-          </a:p>
-          <a:p>
-            <a:pPr algn="l"/>
-            <a:r>
-              <a:rPr lang="en-US" sz="1700" dirty="0">
-                <a:solidFill>
-                  <a:srgbClr val="334155"/>
-                </a:solidFill>
-                <a:latin typeface="Aptos"/>
-              </a:rPr>
-              <a:t>- Compare variants across model, task prompt, and generation parameters</a:t>
-            </a:r>
-          </a:p>
-          <a:p>
-            <a:pPr algn="l"/>
-            <a:r>
-              <a:rPr lang="en-US" sz="1700" dirty="0">
-                <a:solidFill>
-                  <a:srgbClr val="334155"/>
-                </a:solidFill>
-                <a:latin typeface="Aptos"/>
-              </a:rPr>
-              <a:t>- Record reproducibility metadata so runs can be inspected later</a:t>
-            </a:r>
-          </a:p>
-          <a:p>
-            <a:pPr algn="l"/>
-            <a:r>
-              <a:rPr lang="en-US" sz="1700" dirty="0">
-                <a:solidFill>
-                  <a:srgbClr val="334155"/>
-                </a:solidFill>
-                <a:latin typeface="Aptos"/>
-              </a:rPr>
-              <a:t>- Keep local project files as the source of truth for validation and execution</a:t>
-            </a:r>
-          </a:p>
-        </p:txBody>
-      </p:sp>
-      <p:sp>
-        <p:nvSpPr>
-          <p:cNvPr id="9" name="Shape 9"/>
-          <p:cNvSpPr/>
-          <p:nvPr/>
-        </p:nvSpPr>
-        <p:spPr>
-          <a:xfrm>
-            <a:off x="6263640" y="1508760"/>
-            <a:ext cx="4892040" cy="4343400"/>
-          </a:xfrm>
-          <a:prstGeom prst="roundRect">
-            <a:avLst/>
-          </a:prstGeom>
-          <a:solidFill>
-            <a:srgbClr val="FFFFFF"/>
+            <a:srgbClr val="CCFBF1"/>
           </a:solidFill>
           <a:ln w="18000">
             <a:solidFill>
-              <a:srgbClr val="CBD5E1"/>
+              <a:srgbClr val="FFFFFF"/>
             </a:solidFill>
           </a:ln>
         </p:spPr>
         <p:txBody>
-          <a:bodyPr anchor="mid" wrap="square">
+          <a:bodyPr wrap="square" anchor="t">
             <a:spAutoFit/>
           </a:bodyPr>
           <a:lstStyle/>
           <a:p>
             <a:pPr algn="ctr"/>
-          </a:p>
-        </p:txBody>
-      </p:sp>
-      <p:sp>
-        <p:nvSpPr>
-          <p:cNvPr id="10" name="Shape 10"/>
+            <a:endParaRPr/>
+          </a:p>
+        </p:txBody>
+      </p:sp>
+      <p:sp>
+        <p:nvSpPr>
+          <p:cNvPr id="9" name="TextBox 9"/>
+          <p:cNvSpPr txBox="1"/>
+          <p:nvPr/>
+        </p:nvSpPr>
+        <p:spPr>
+          <a:xfrm>
+            <a:off x="6675120" y="1709928"/>
+            <a:ext cx="4572000" cy="292608"/>
+          </a:xfrm>
+          <a:prstGeom prst="rect">
+            <a:avLst/>
+          </a:prstGeom>
+          <a:noFill/>
+          <a:ln>
+            <a:noFill/>
+          </a:ln>
+        </p:spPr>
+        <p:txBody>
+          <a:bodyPr wrap="square" anchor="t">
+            <a:spAutoFit/>
+          </a:bodyPr>
+          <a:lstStyle/>
+          <a:p>
+            <a:pPr algn="l"/>
+            <a:r>
+              <a:rPr lang="en-US" sz="2100" dirty="0">
+                <a:solidFill>
+                  <a:srgbClr val="134E4A"/>
+                </a:solidFill>
+                <a:latin typeface="Aptos"/>
+              </a:rPr>
+              <a:t>Cloud Or Self Hosted</a:t>
+            </a:r>
+          </a:p>
+        </p:txBody>
+      </p:sp>
+      <p:sp>
+        <p:nvSpPr>
+          <p:cNvPr id="10" name="TextBox 10"/>
+          <p:cNvSpPr txBox="1"/>
+          <p:nvPr/>
+        </p:nvSpPr>
+        <p:spPr>
+          <a:xfrm>
+            <a:off x="6675120" y="2061727"/>
+            <a:ext cx="4572000" cy="713232"/>
+          </a:xfrm>
+          <a:prstGeom prst="rect">
+            <a:avLst/>
+          </a:prstGeom>
+          <a:noFill/>
+          <a:ln>
+            <a:noFill/>
+          </a:ln>
+        </p:spPr>
+        <p:txBody>
+          <a:bodyPr wrap="square" anchor="t">
+            <a:spAutoFit/>
+          </a:bodyPr>
+          <a:lstStyle/>
+          <a:p>
+            <a:pPr algn="l"/>
+            <a:r>
+              <a:rPr lang="en-US" sz="1700" dirty="0">
+                <a:solidFill>
+                  <a:srgbClr val="334155"/>
+                </a:solidFill>
+                <a:latin typeface="Aptos"/>
+              </a:rPr>
+              <a:t>Use managed Langfuse Cloud or operate your own deployment for governance and control.</a:t>
+            </a:r>
+          </a:p>
+        </p:txBody>
+      </p:sp>
+      <p:sp>
+        <p:nvSpPr>
+          <p:cNvPr id="11" name="Shape 11"/>
           <p:cNvSpPr/>
           <p:nvPr/>
         </p:nvSpPr>
         <p:spPr>
           <a:xfrm>
-            <a:off x="6263640" y="1508760"/>
-            <a:ext cx="73152" cy="4343400"/>
-          </a:xfrm>
-          <a:prstGeom prst="rect">
+            <a:off x="777240" y="3383279"/>
+            <a:ext cx="5074920" cy="1417320"/>
+          </a:xfrm>
+          <a:prstGeom prst="roundRect">
             <a:avLst/>
           </a:prstGeom>
           <a:solidFill>
-            <a:srgbClr val="0F766E"/>
+            <a:srgbClr val="DCFCE7"/>
           </a:solidFill>
-          <a:ln>
-            <a:noFill/>
-          </a:ln>
-        </p:spPr>
-        <p:txBody>
-          <a:bodyPr anchor="mid" wrap="square">
+          <a:ln w="18000">
+            <a:solidFill>
+              <a:srgbClr val="FFFFFF"/>
+            </a:solidFill>
+          </a:ln>
+        </p:spPr>
+        <p:txBody>
+          <a:bodyPr wrap="square" anchor="t">
             <a:spAutoFit/>
           </a:bodyPr>
           <a:lstStyle/>
           <a:p>
             <a:pPr algn="ctr"/>
-          </a:p>
-        </p:txBody>
-      </p:sp>
-      <p:sp>
-        <p:nvSpPr>
-          <p:cNvPr id="11" name="TextBox 11"/>
-          <p:cNvSpPr txBox="1"/>
-          <p:nvPr/>
-        </p:nvSpPr>
-        <p:spPr>
-          <a:xfrm>
-            <a:off x="6519672" y="1691639"/>
-            <a:ext cx="4480559" cy="320040"/>
-          </a:xfrm>
-          <a:prstGeom prst="rect">
-            <a:avLst/>
-          </a:prstGeom>
-          <a:noFill/>
-          <a:ln>
-            <a:noFill/>
-          </a:ln>
-        </p:spPr>
-        <p:txBody>
-          <a:bodyPr anchor="top" wrap="square">
-            <a:spAutoFit/>
-          </a:bodyPr>
-          <a:lstStyle/>
-          <a:p>
-            <a:pPr algn="l"/>
-            <a:r>
-              <a:rPr lang="en-US" sz="2000" dirty="0">
-                <a:b/>
-                <a:solidFill>
-                  <a:srgbClr val="111827"/>
-                </a:solidFill>
-                <a:latin typeface="Aptos"/>
-              </a:rPr>
-              <a:t>What stays in Langfuse</a:t>
-            </a:r>
+            <a:endParaRPr/>
           </a:p>
         </p:txBody>
       </p:sp>
@@ -2541,19 +2397,57 @@
         </p:nvSpPr>
         <p:spPr>
           <a:xfrm>
-            <a:off x="6556248" y="2103120"/>
-            <a:ext cx="4389120" cy="3611880"/>
-          </a:xfrm>
-          <a:prstGeom prst="rect">
-            <a:avLst/>
-          </a:prstGeom>
-          <a:noFill/>
-          <a:ln>
-            <a:noFill/>
-          </a:ln>
-        </p:spPr>
-        <p:txBody>
-          <a:bodyPr anchor="top" wrap="square">
+            <a:off x="1051560" y="3584448"/>
+            <a:ext cx="4572000" cy="292608"/>
+          </a:xfrm>
+          <a:prstGeom prst="rect">
+            <a:avLst/>
+          </a:prstGeom>
+          <a:noFill/>
+          <a:ln>
+            <a:noFill/>
+          </a:ln>
+        </p:spPr>
+        <p:txBody>
+          <a:bodyPr wrap="square" anchor="t">
+            <a:spAutoFit/>
+          </a:bodyPr>
+          <a:lstStyle/>
+          <a:p>
+            <a:pPr algn="l"/>
+            <a:r>
+              <a:rPr lang="en-US" sz="2100" dirty="0">
+                <a:solidFill>
+                  <a:srgbClr val="14532D"/>
+                </a:solidFill>
+                <a:latin typeface="Aptos"/>
+              </a:rPr>
+              <a:t>LLM Observability</a:t>
+            </a:r>
+          </a:p>
+        </p:txBody>
+      </p:sp>
+      <p:sp>
+        <p:nvSpPr>
+          <p:cNvPr id="13" name="TextBox 13"/>
+          <p:cNvSpPr txBox="1"/>
+          <p:nvPr/>
+        </p:nvSpPr>
+        <p:spPr>
+          <a:xfrm>
+            <a:off x="1051560" y="3906749"/>
+            <a:ext cx="4572000" cy="713232"/>
+          </a:xfrm>
+          <a:prstGeom prst="rect">
+            <a:avLst/>
+          </a:prstGeom>
+          <a:noFill/>
+          <a:ln>
+            <a:noFill/>
+          </a:ln>
+        </p:spPr>
+        <p:txBody>
+          <a:bodyPr wrap="square" anchor="t">
             <a:spAutoFit/>
           </a:bodyPr>
           <a:lstStyle/>
@@ -2566,9 +2460,107 @@
                 </a:solidFill>
                 <a:latin typeface="Aptos"/>
               </a:rPr>
-              <a:t>- Traces and observations for each evaluated item</a:t>
-            </a:r>
-          </a:p>
+              <a:t>Capture traces, generations, metadata, prompts, sessions, and user or evaluator feedback.</a:t>
+            </a:r>
+          </a:p>
+        </p:txBody>
+      </p:sp>
+      <p:sp>
+        <p:nvSpPr>
+          <p:cNvPr id="14" name="Shape 14"/>
+          <p:cNvSpPr/>
+          <p:nvPr/>
+        </p:nvSpPr>
+        <p:spPr>
+          <a:xfrm>
+            <a:off x="6400800" y="3383279"/>
+            <a:ext cx="5074920" cy="1417320"/>
+          </a:xfrm>
+          <a:prstGeom prst="roundRect">
+            <a:avLst/>
+          </a:prstGeom>
+          <a:solidFill>
+            <a:srgbClr val="FEF3C7"/>
+          </a:solidFill>
+          <a:ln w="18000">
+            <a:solidFill>
+              <a:srgbClr val="FFFFFF"/>
+            </a:solidFill>
+          </a:ln>
+        </p:spPr>
+        <p:txBody>
+          <a:bodyPr wrap="square" anchor="t">
+            <a:spAutoFit/>
+          </a:bodyPr>
+          <a:lstStyle/>
+          <a:p>
+            <a:pPr algn="ctr"/>
+            <a:endParaRPr/>
+          </a:p>
+        </p:txBody>
+      </p:sp>
+      <p:sp>
+        <p:nvSpPr>
+          <p:cNvPr id="15" name="TextBox 15"/>
+          <p:cNvSpPr txBox="1"/>
+          <p:nvPr/>
+        </p:nvSpPr>
+        <p:spPr>
+          <a:xfrm>
+            <a:off x="6675120" y="3584448"/>
+            <a:ext cx="4572000" cy="292608"/>
+          </a:xfrm>
+          <a:prstGeom prst="rect">
+            <a:avLst/>
+          </a:prstGeom>
+          <a:noFill/>
+          <a:ln>
+            <a:noFill/>
+          </a:ln>
+        </p:spPr>
+        <p:txBody>
+          <a:bodyPr wrap="square" anchor="t">
+            <a:spAutoFit/>
+          </a:bodyPr>
+          <a:lstStyle/>
+          <a:p>
+            <a:pPr algn="l"/>
+            <a:r>
+              <a:rPr lang="en-US" sz="2100" dirty="0">
+                <a:solidFill>
+                  <a:srgbClr val="78350F"/>
+                </a:solidFill>
+                <a:latin typeface="Aptos"/>
+              </a:rPr>
+              <a:t>Evaluation Workflows</a:t>
+            </a:r>
+          </a:p>
+        </p:txBody>
+      </p:sp>
+      <p:sp>
+        <p:nvSpPr>
+          <p:cNvPr id="16" name="TextBox 16"/>
+          <p:cNvSpPr txBox="1"/>
+          <p:nvPr/>
+        </p:nvSpPr>
+        <p:spPr>
+          <a:xfrm>
+            <a:off x="6675120" y="3906751"/>
+            <a:ext cx="4572000" cy="713232"/>
+          </a:xfrm>
+          <a:prstGeom prst="rect">
+            <a:avLst/>
+          </a:prstGeom>
+          <a:noFill/>
+          <a:ln>
+            <a:noFill/>
+          </a:ln>
+        </p:spPr>
+        <p:txBody>
+          <a:bodyPr wrap="square" anchor="t">
+            <a:spAutoFit/>
+          </a:bodyPr>
+          <a:lstStyle/>
           <a:p>
             <a:pPr algn="l"/>
             <a:r>
@@ -2578,69 +2570,42 @@
                 </a:solidFill>
                 <a:latin typeface="Aptos"/>
               </a:rPr>
-              <a:t>- Prompt visibility for task and evaluator prompts</a:t>
-            </a:r>
-          </a:p>
-          <a:p>
-            <a:pPr algn="l"/>
-            <a:r>
-              <a:rPr lang="en-US" sz="1700" dirty="0">
-                <a:solidFill>
-                  <a:srgbClr val="334155"/>
-                </a:solidFill>
-                <a:latin typeface="Aptos"/>
-              </a:rPr>
-              <a:t>- Evaluator definitions, score configs, scores, dashboards, and comparisons</a:t>
-            </a:r>
-          </a:p>
-          <a:p>
-            <a:pPr algn="l"/>
-            <a:r>
-              <a:rPr lang="en-US" sz="1700" dirty="0">
-                <a:solidFill>
-                  <a:srgbClr val="334155"/>
-                </a:solidFill>
-                <a:latin typeface="Aptos"/>
-              </a:rPr>
-              <a:t>- Human annotation queues for selected outputs</a:t>
-            </a:r>
-          </a:p>
-        </p:txBody>
-      </p:sp>
-      <p:sp>
-        <p:nvSpPr>
-          <p:cNvPr id="13" name="TextBox 13"/>
-          <p:cNvSpPr txBox="1"/>
-          <p:nvPr/>
-        </p:nvSpPr>
-        <p:spPr>
-          <a:xfrm>
-            <a:off x="502920" y="6446520"/>
-            <a:ext cx="7772400" cy="228600"/>
-          </a:xfrm>
-          <a:prstGeom prst="rect">
-            <a:avLst/>
-          </a:prstGeom>
-          <a:noFill/>
-          <a:ln>
-            <a:noFill/>
-          </a:ln>
-        </p:spPr>
-        <p:txBody>
-          <a:bodyPr anchor="top" wrap="square">
-            <a:spAutoFit/>
-          </a:bodyPr>
-          <a:lstStyle/>
-          <a:p>
-            <a:pPr algn="l"/>
-            <a:r>
-              <a:rPr lang="en-US" sz="1600" dirty="0">
-                <a:solidFill>
-                  <a:srgbClr val="64748B"/>
-                </a:solidFill>
-                <a:latin typeface="Aptos"/>
-              </a:rPr>
-              <a:t>Evaluator Harness | Langfuse-first offline evaluation workflow</a:t>
+              <a:t>Manage datasets, scores, evaluators, experiments, and human annotation workflows.</a:t>
+            </a:r>
+          </a:p>
+        </p:txBody>
+      </p:sp>
+      <p:sp>
+        <p:nvSpPr>
+          <p:cNvPr id="18" name="TextBox 17">
+            <a:extLst>
+              <a:ext uri="{FF2B5EF4-FFF2-40B4-BE49-F238E27FC236}">
+                <a16:creationId xmlns:a16="http://schemas.microsoft.com/office/drawing/2014/main" id="{1564F83E-80DD-7F91-801A-FB05CAE44974}"/>
+              </a:ext>
+            </a:extLst>
+          </p:cNvPr>
+          <p:cNvSpPr txBox="1"/>
+          <p:nvPr/>
+        </p:nvSpPr>
+        <p:spPr>
+          <a:xfrm>
+            <a:off x="502920" y="5869858"/>
+            <a:ext cx="10892667" cy="369332"/>
+          </a:xfrm>
+          <a:prstGeom prst="rect">
+            <a:avLst/>
+          </a:prstGeom>
+          <a:noFill/>
+        </p:spPr>
+        <p:txBody>
+          <a:bodyPr wrap="square" rtlCol="0">
+            <a:spAutoFit/>
+          </a:bodyPr>
+          <a:lstStyle/>
+          <a:p>
+            <a:r>
+              <a:rPr lang="en-US" dirty="0"/>
+              <a:t>https://langfuse.com/</a:t>
             </a:r>
           </a:p>
         </p:txBody>
@@ -2679,18 +2644,18 @@
         <p:spPr>
           <a:xfrm>
             <a:off x="502920" y="320040"/>
-            <a:ext cx="9966960" cy="502920"/>
-          </a:xfrm>
-          <a:prstGeom prst="rect">
-            <a:avLst/>
-          </a:prstGeom>
-          <a:noFill/>
-          <a:ln>
-            <a:noFill/>
-          </a:ln>
-        </p:spPr>
-        <p:txBody>
-          <a:bodyPr anchor="top" wrap="square">
+            <a:ext cx="9966960" cy="553998"/>
+          </a:xfrm>
+          <a:prstGeom prst="rect">
+            <a:avLst/>
+          </a:prstGeom>
+          <a:noFill/>
+          <a:ln>
+            <a:noFill/>
+          </a:ln>
+        </p:spPr>
+        <p:txBody>
+          <a:bodyPr wrap="square" anchor="t">
             <a:spAutoFit/>
           </a:bodyPr>
           <a:lstStyle/>
@@ -2698,13 +2663,12 @@
             <a:pPr algn="l"/>
             <a:r>
               <a:rPr lang="en-US" sz="3000" dirty="0">
-                <a:b/>
                 <a:solidFill>
                   <a:srgbClr val="111827"/>
                 </a:solidFill>
                 <a:latin typeface="Aptos"/>
               </a:rPr>
-              <a:t>What The Harness Does</a:t>
+              <a:t>Evaluation Harness Objectives</a:t>
             </a:r>
           </a:p>
         </p:txBody>
@@ -2729,7 +2693,7 @@
           </a:ln>
         </p:spPr>
         <p:txBody>
-          <a:bodyPr anchor="top" wrap="square">
+          <a:bodyPr wrap="square" anchor="t">
             <a:spAutoFit/>
           </a:bodyPr>
           <a:lstStyle/>
@@ -2742,7 +2706,7 @@
                 </a:solidFill>
                 <a:latin typeface="Aptos"/>
               </a:rPr>
-              <a:t>A thin local runner around project artifacts and Langfuse</a:t>
+              <a:t>What the app is for</a:t>
             </a:r>
           </a:p>
         </p:txBody>
@@ -2768,6 +2732,13 @@
             <a:noFill/>
           </a:ln>
         </p:spPr>
+        <p:txBody>
+          <a:bodyPr/>
+          <a:lstStyle/>
+          <a:p>
+            <a:endParaRPr lang="en-US"/>
+          </a:p>
+        </p:txBody>
       </p:sp>
       <p:sp>
         <p:nvSpPr>
@@ -2777,311 +2748,8 @@
         </p:nvSpPr>
         <p:spPr>
           <a:xfrm>
-            <a:off x="731520" y="1600200"/>
-            <a:ext cx="2331720" cy="960120"/>
-          </a:xfrm>
-          <a:prstGeom prst="roundRect">
-            <a:avLst/>
-          </a:prstGeom>
-          <a:solidFill>
-            <a:srgbClr val="EFF6FF"/>
-          </a:solidFill>
-          <a:ln w="18000">
-            <a:solidFill>
-              <a:srgbClr val="BFDBFE"/>
-            </a:solidFill>
-          </a:ln>
-        </p:spPr>
-        <p:txBody>
-          <a:bodyPr anchor="mid" wrap="square">
-            <a:spAutoFit/>
-          </a:bodyPr>
-          <a:lstStyle/>
-          <a:p>
-            <a:pPr algn="ctr"/>
-            <a:r>
-              <a:rPr lang="en-US" sz="1900" dirty="0">
-                <a:b/>
-                <a:solidFill>
-                  <a:srgbClr val="1E3A8A"/>
-                </a:solidFill>
-                <a:latin typeface="Aptos"/>
-              </a:rPr>
-              <a:t>Project YAML</a:t>
-            </a:r>
-          </a:p>
-          <a:p>
-            <a:pPr algn="ctr"/>
-            <a:r>
-              <a:rPr lang="en-US" sz="1900" dirty="0">
-                <a:b/>
-                <a:solidFill>
-                  <a:srgbClr val="1E3A8A"/>
-                </a:solidFill>
-                <a:latin typeface="Aptos"/>
-              </a:rPr>
-              <a:t>Dataset</a:t>
-            </a:r>
-          </a:p>
-          <a:p>
-            <a:pPr algn="ctr"/>
-            <a:r>
-              <a:rPr lang="en-US" sz="1900" dirty="0">
-                <a:b/>
-                <a:solidFill>
-                  <a:srgbClr val="1E3A8A"/>
-                </a:solidFill>
-                <a:latin typeface="Aptos"/>
-              </a:rPr>
-              <a:t>Prompts</a:t>
-            </a:r>
-          </a:p>
-        </p:txBody>
-      </p:sp>
-      <p:sp>
-        <p:nvSpPr>
-          <p:cNvPr id="6" name="Shape 6"/>
-          <p:cNvSpPr/>
-          <p:nvPr/>
-        </p:nvSpPr>
-        <p:spPr>
-          <a:xfrm>
-            <a:off x="3886200" y="1600200"/>
-            <a:ext cx="2331720" cy="960120"/>
-          </a:xfrm>
-          <a:prstGeom prst="roundRect">
-            <a:avLst/>
-          </a:prstGeom>
-          <a:solidFill>
-            <a:srgbClr val="F8FAFC"/>
-          </a:solidFill>
-          <a:ln w="18000">
-            <a:solidFill>
-              <a:srgbClr val="CBD5E1"/>
-            </a:solidFill>
-          </a:ln>
-        </p:spPr>
-        <p:txBody>
-          <a:bodyPr anchor="mid" wrap="square">
-            <a:spAutoFit/>
-          </a:bodyPr>
-          <a:lstStyle/>
-          <a:p>
-            <a:pPr algn="ctr"/>
-            <a:r>
-              <a:rPr lang="en-US" sz="1900" dirty="0">
-                <a:b/>
-                <a:solidFill>
-                  <a:srgbClr val="111827"/>
-                </a:solidFill>
-                <a:latin typeface="Aptos"/>
-              </a:rPr>
-              <a:t>Baseline Run</a:t>
-            </a:r>
-          </a:p>
-          <a:p>
-            <a:pPr algn="ctr"/>
-            <a:r>
-              <a:rPr lang="en-US" sz="1900" dirty="0">
-                <a:b/>
-                <a:solidFill>
-                  <a:srgbClr val="111827"/>
-                </a:solidFill>
-                <a:latin typeface="Aptos"/>
-              </a:rPr>
-              <a:t>Candidate Run</a:t>
-            </a:r>
-          </a:p>
-        </p:txBody>
-      </p:sp>
-      <p:sp>
-        <p:nvSpPr>
-          <p:cNvPr id="7" name="Shape 7"/>
-          <p:cNvSpPr/>
-          <p:nvPr/>
-        </p:nvSpPr>
-        <p:spPr>
-          <a:xfrm>
-            <a:off x="7040880" y="1600200"/>
-            <a:ext cx="2331720" cy="960120"/>
-          </a:xfrm>
-          <a:prstGeom prst="roundRect">
-            <a:avLst/>
-          </a:prstGeom>
-          <a:solidFill>
-            <a:srgbClr val="ECFDF5"/>
-          </a:solidFill>
-          <a:ln w="18000">
-            <a:solidFill>
-              <a:srgbClr val="A7F3D0"/>
-            </a:solidFill>
-          </a:ln>
-        </p:spPr>
-        <p:txBody>
-          <a:bodyPr anchor="mid" wrap="square">
-            <a:spAutoFit/>
-          </a:bodyPr>
-          <a:lstStyle/>
-          <a:p>
-            <a:pPr algn="ctr"/>
-            <a:r>
-              <a:rPr lang="en-US" sz="1900" dirty="0">
-                <a:b/>
-                <a:solidFill>
-                  <a:srgbClr val="064E3B"/>
-                </a:solidFill>
-                <a:latin typeface="Aptos"/>
-              </a:rPr>
-              <a:t>Langfuse</a:t>
-            </a:r>
-          </a:p>
-          <a:p>
-            <a:pPr algn="ctr"/>
-            <a:r>
-              <a:rPr lang="en-US" sz="1900" dirty="0">
-                <a:b/>
-                <a:solidFill>
-                  <a:srgbClr val="064E3B"/>
-                </a:solidFill>
-                <a:latin typeface="Aptos"/>
-              </a:rPr>
-              <a:t>Trace Store</a:t>
-            </a:r>
-          </a:p>
-        </p:txBody>
-      </p:sp>
-      <p:sp>
-        <p:nvSpPr>
-          <p:cNvPr id="8" name="Shape 8"/>
-          <p:cNvSpPr/>
-          <p:nvPr/>
-        </p:nvSpPr>
-        <p:spPr>
-          <a:xfrm>
-            <a:off x="9601200" y="1600200"/>
-            <a:ext cx="2057400" cy="960120"/>
-          </a:xfrm>
-          <a:prstGeom prst="roundRect">
-            <a:avLst/>
-          </a:prstGeom>
-          <a:solidFill>
-            <a:srgbClr val="FFF7ED"/>
-          </a:solidFill>
-          <a:ln w="18000">
-            <a:solidFill>
-              <a:srgbClr val="FDBA74"/>
-            </a:solidFill>
-          </a:ln>
-        </p:spPr>
-        <p:txBody>
-          <a:bodyPr anchor="mid" wrap="square">
-            <a:spAutoFit/>
-          </a:bodyPr>
-          <a:lstStyle/>
-          <a:p>
-            <a:pPr algn="ctr"/>
-            <a:r>
-              <a:rPr lang="en-US" sz="1900" dirty="0">
-                <a:b/>
-                <a:solidFill>
-                  <a:srgbClr val="7C2D12"/>
-                </a:solidFill>
-                <a:latin typeface="Aptos"/>
-              </a:rPr>
-              <a:t>Scores</a:t>
-            </a:r>
-          </a:p>
-          <a:p>
-            <a:pPr algn="ctr"/>
-            <a:r>
-              <a:rPr lang="en-US" sz="1900" dirty="0">
-                <a:b/>
-                <a:solidFill>
-                  <a:srgbClr val="7C2D12"/>
-                </a:solidFill>
-                <a:latin typeface="Aptos"/>
-              </a:rPr>
-              <a:t>Review</a:t>
-            </a:r>
-          </a:p>
-        </p:txBody>
-      </p:sp>
-      <p:cxnSp>
-        <p:nvCxnSpPr>
-          <p:cNvPr id="9" name="Arrow 9"/>
-          <p:cNvCxnSpPr/>
-          <p:nvPr/>
-        </p:nvCxnSpPr>
-        <p:spPr>
-          <a:xfrm>
-            <a:off x="3090672" y="2057400"/>
-            <a:ext cx="768095" cy="0"/>
-          </a:xfrm>
-          <a:prstGeom prst="line">
-            <a:avLst/>
-          </a:prstGeom>
-          <a:ln w="22000">
-            <a:solidFill>
-              <a:srgbClr val="64748B"/>
-            </a:solidFill>
-            <a:headEnd type="triangle"/>
-          </a:ln>
-        </p:spPr>
-      </p:cxnSp>
-      <p:cxnSp>
-        <p:nvCxnSpPr>
-          <p:cNvPr id="10" name="Arrow 10"/>
-          <p:cNvCxnSpPr/>
-          <p:nvPr/>
-        </p:nvCxnSpPr>
-        <p:spPr>
-          <a:xfrm>
-            <a:off x="6245352" y="2057400"/>
-            <a:ext cx="768095" cy="0"/>
-          </a:xfrm>
-          <a:prstGeom prst="line">
-            <a:avLst/>
-          </a:prstGeom>
-          <a:ln w="22000">
-            <a:solidFill>
-              <a:srgbClr val="64748B"/>
-            </a:solidFill>
-            <a:headEnd type="triangle"/>
-          </a:ln>
-        </p:spPr>
-      </p:cxnSp>
-      <p:cxnSp>
-        <p:nvCxnSpPr>
-          <p:cNvPr id="11" name="Arrow 11"/>
-          <p:cNvCxnSpPr/>
-          <p:nvPr/>
-        </p:nvCxnSpPr>
-        <p:spPr>
-          <a:xfrm>
-            <a:off x="9400032" y="2057400"/>
-            <a:ext cx="173736" cy="0"/>
-          </a:xfrm>
-          <a:prstGeom prst="line">
-            <a:avLst/>
-          </a:prstGeom>
-          <a:ln w="22000">
-            <a:solidFill>
-              <a:srgbClr val="64748B"/>
-            </a:solidFill>
-            <a:headEnd type="triangle"/>
-          </a:ln>
-        </p:spPr>
-      </p:cxnSp>
-      <p:sp>
-        <p:nvSpPr>
-          <p:cNvPr id="12" name="Shape 12"/>
-          <p:cNvSpPr/>
-          <p:nvPr/>
-        </p:nvSpPr>
-        <p:spPr>
-          <a:xfrm>
-            <a:off x="914400" y="3108960"/>
-            <a:ext cx="10241280" cy="2148840"/>
+            <a:off x="685800" y="1508760"/>
+            <a:ext cx="5257800" cy="4343400"/>
           </a:xfrm>
           <a:prstGeom prst="roundRect">
             <a:avLst/>
@@ -3096,67 +2764,69 @@
           </a:ln>
         </p:spPr>
         <p:txBody>
-          <a:bodyPr anchor="mid" wrap="square">
+          <a:bodyPr wrap="square" anchor="t">
             <a:spAutoFit/>
           </a:bodyPr>
           <a:lstStyle/>
           <a:p>
             <a:pPr algn="ctr"/>
-          </a:p>
-        </p:txBody>
-      </p:sp>
-      <p:sp>
-        <p:nvSpPr>
-          <p:cNvPr id="13" name="Shape 13"/>
+            <a:endParaRPr/>
+          </a:p>
+        </p:txBody>
+      </p:sp>
+      <p:sp>
+        <p:nvSpPr>
+          <p:cNvPr id="6" name="Shape 6"/>
           <p:cNvSpPr/>
           <p:nvPr/>
         </p:nvSpPr>
         <p:spPr>
           <a:xfrm>
-            <a:off x="914400" y="3108960"/>
-            <a:ext cx="73152" cy="2148840"/>
+            <a:off x="685800" y="1508760"/>
+            <a:ext cx="73152" cy="4343400"/>
           </a:xfrm>
           <a:prstGeom prst="rect">
             <a:avLst/>
           </a:prstGeom>
           <a:solidFill>
-            <a:srgbClr val="7C3AED"/>
+            <a:srgbClr val="2563EB"/>
           </a:solidFill>
           <a:ln>
             <a:noFill/>
           </a:ln>
         </p:spPr>
         <p:txBody>
-          <a:bodyPr anchor="mid" wrap="square">
+          <a:bodyPr wrap="square" anchor="t">
             <a:spAutoFit/>
           </a:bodyPr>
           <a:lstStyle/>
           <a:p>
             <a:pPr algn="ctr"/>
-          </a:p>
-        </p:txBody>
-      </p:sp>
-      <p:sp>
-        <p:nvSpPr>
-          <p:cNvPr id="14" name="TextBox 14"/>
-          <p:cNvSpPr txBox="1"/>
-          <p:nvPr/>
-        </p:nvSpPr>
-        <p:spPr>
-          <a:xfrm>
-            <a:off x="1170432" y="3291840"/>
-            <a:ext cx="9829800" cy="320040"/>
-          </a:xfrm>
-          <a:prstGeom prst="rect">
-            <a:avLst/>
-          </a:prstGeom>
-          <a:noFill/>
-          <a:ln>
-            <a:noFill/>
-          </a:ln>
-        </p:spPr>
-        <p:txBody>
-          <a:bodyPr anchor="top" wrap="square">
+            <a:endParaRPr/>
+          </a:p>
+        </p:txBody>
+      </p:sp>
+      <p:sp>
+        <p:nvSpPr>
+          <p:cNvPr id="7" name="TextBox 7"/>
+          <p:cNvSpPr txBox="1"/>
+          <p:nvPr/>
+        </p:nvSpPr>
+        <p:spPr>
+          <a:xfrm>
+            <a:off x="941832" y="1691639"/>
+            <a:ext cx="4846320" cy="320040"/>
+          </a:xfrm>
+          <a:prstGeom prst="rect">
+            <a:avLst/>
+          </a:prstGeom>
+          <a:noFill/>
+          <a:ln>
+            <a:noFill/>
+          </a:ln>
+        </p:spPr>
+        <p:txBody>
+          <a:bodyPr wrap="square" anchor="t">
             <a:spAutoFit/>
           </a:bodyPr>
           <a:lstStyle/>
@@ -3164,38 +2834,37 @@
             <a:pPr algn="l"/>
             <a:r>
               <a:rPr lang="en-US" sz="2000" dirty="0">
-                <a:b/>
                 <a:solidFill>
                   <a:srgbClr val="111827"/>
                 </a:solidFill>
                 <a:latin typeface="Aptos"/>
               </a:rPr>
-              <a:t>Boundaries</a:t>
-            </a:r>
-          </a:p>
-        </p:txBody>
-      </p:sp>
-      <p:sp>
-        <p:nvSpPr>
-          <p:cNvPr id="15" name="TextBox 15"/>
-          <p:cNvSpPr txBox="1"/>
-          <p:nvPr/>
-        </p:nvSpPr>
-        <p:spPr>
-          <a:xfrm>
-            <a:off x="1207008" y="3703320"/>
-            <a:ext cx="9738359" cy="1417320"/>
-          </a:xfrm>
-          <a:prstGeom prst="rect">
-            <a:avLst/>
-          </a:prstGeom>
-          <a:noFill/>
-          <a:ln>
-            <a:noFill/>
-          </a:ln>
-        </p:spPr>
-        <p:txBody>
-          <a:bodyPr anchor="top" wrap="square">
+              <a:t>Primary purpose</a:t>
+            </a:r>
+          </a:p>
+        </p:txBody>
+      </p:sp>
+      <p:sp>
+        <p:nvSpPr>
+          <p:cNvPr id="8" name="TextBox 8"/>
+          <p:cNvSpPr txBox="1"/>
+          <p:nvPr/>
+        </p:nvSpPr>
+        <p:spPr>
+          <a:xfrm>
+            <a:off x="978408" y="2103120"/>
+            <a:ext cx="4754880" cy="2970044"/>
+          </a:xfrm>
+          <a:prstGeom prst="rect">
+            <a:avLst/>
+          </a:prstGeom>
+          <a:noFill/>
+          <a:ln>
+            <a:noFill/>
+          </a:ln>
+        </p:spPr>
+        <p:txBody>
+          <a:bodyPr wrap="square" anchor="t">
             <a:spAutoFit/>
           </a:bodyPr>
           <a:lstStyle/>
@@ -3208,8 +2877,17 @@
                 </a:solidFill>
                 <a:latin typeface="Aptos"/>
               </a:rPr>
-              <a:t>- The harness does not try to become a dashboard, annotation UI, evaluator workbench, or prompt registry.</a:t>
-            </a:r>
+              <a:t>- Run project datasets against baseline and candidate LLM configurations</a:t>
+            </a:r>
+          </a:p>
+          <a:p>
+            <a:pPr algn="l"/>
+            <a:endParaRPr lang="en-US" sz="1700" dirty="0">
+              <a:solidFill>
+                <a:srgbClr val="334155"/>
+              </a:solidFill>
+              <a:latin typeface="Aptos"/>
+            </a:endParaRPr>
           </a:p>
           <a:p>
             <a:pPr algn="l"/>
@@ -3220,26 +2898,286 @@
                 </a:solidFill>
                 <a:latin typeface="Aptos"/>
               </a:rPr>
-              <a:t>- It prepares and runs repeatable experiments, then sends the operational artifacts to Langfuse.</a:t>
-            </a:r>
-          </a:p>
-          <a:p>
-            <a:pPr algn="l"/>
-            <a:r>
+              <a:t>- Compare variants across model, prompt, and generation parameters</a:t>
+            </a:r>
+            <a:br>
               <a:rPr lang="en-US" sz="1700" dirty="0">
                 <a:solidFill>
                   <a:srgbClr val="334155"/>
                 </a:solidFill>
                 <a:latin typeface="Aptos"/>
               </a:rPr>
-              <a:t>- Setup commands support dry-run first, then apply, so changes can be previewed before mutation.</a:t>
-            </a:r>
-          </a:p>
-        </p:txBody>
-      </p:sp>
-      <p:sp>
-        <p:nvSpPr>
-          <p:cNvPr id="16" name="TextBox 16"/>
+            </a:br>
+            <a:endParaRPr lang="en-US" sz="1700" dirty="0">
+              <a:solidFill>
+                <a:srgbClr val="334155"/>
+              </a:solidFill>
+              <a:latin typeface="Aptos"/>
+            </a:endParaRPr>
+          </a:p>
+          <a:p>
+            <a:pPr algn="l"/>
+            <a:r>
+              <a:rPr lang="en-US" sz="1700" dirty="0">
+                <a:solidFill>
+                  <a:srgbClr val="334155"/>
+                </a:solidFill>
+                <a:latin typeface="Aptos"/>
+              </a:rPr>
+              <a:t>- Record reproducibility metadata so runs can be inspected later</a:t>
+            </a:r>
+            <a:br>
+              <a:rPr lang="en-US" sz="1700" dirty="0">
+                <a:solidFill>
+                  <a:srgbClr val="334155"/>
+                </a:solidFill>
+                <a:latin typeface="Aptos"/>
+              </a:rPr>
+            </a:br>
+            <a:endParaRPr lang="en-US" sz="1700" dirty="0">
+              <a:solidFill>
+                <a:srgbClr val="334155"/>
+              </a:solidFill>
+              <a:latin typeface="Aptos"/>
+            </a:endParaRPr>
+          </a:p>
+          <a:p>
+            <a:pPr algn="l"/>
+            <a:r>
+              <a:rPr lang="en-US" sz="1700" dirty="0">
+                <a:solidFill>
+                  <a:srgbClr val="334155"/>
+                </a:solidFill>
+                <a:latin typeface="Aptos"/>
+              </a:rPr>
+              <a:t>- Keep local project files as the source of truth for validation and execution</a:t>
+            </a:r>
+          </a:p>
+        </p:txBody>
+      </p:sp>
+      <p:sp>
+        <p:nvSpPr>
+          <p:cNvPr id="9" name="Shape 9"/>
+          <p:cNvSpPr/>
+          <p:nvPr/>
+        </p:nvSpPr>
+        <p:spPr>
+          <a:xfrm>
+            <a:off x="6263640" y="1508760"/>
+            <a:ext cx="4892040" cy="4343400"/>
+          </a:xfrm>
+          <a:prstGeom prst="roundRect">
+            <a:avLst/>
+          </a:prstGeom>
+          <a:solidFill>
+            <a:srgbClr val="FFFFFF"/>
+          </a:solidFill>
+          <a:ln w="18000">
+            <a:solidFill>
+              <a:srgbClr val="CBD5E1"/>
+            </a:solidFill>
+          </a:ln>
+        </p:spPr>
+        <p:txBody>
+          <a:bodyPr wrap="square" anchor="t">
+            <a:spAutoFit/>
+          </a:bodyPr>
+          <a:lstStyle/>
+          <a:p>
+            <a:pPr algn="ctr"/>
+            <a:endParaRPr/>
+          </a:p>
+        </p:txBody>
+      </p:sp>
+      <p:sp>
+        <p:nvSpPr>
+          <p:cNvPr id="10" name="Shape 10"/>
+          <p:cNvSpPr/>
+          <p:nvPr/>
+        </p:nvSpPr>
+        <p:spPr>
+          <a:xfrm>
+            <a:off x="6263640" y="1508760"/>
+            <a:ext cx="73152" cy="4343400"/>
+          </a:xfrm>
+          <a:prstGeom prst="rect">
+            <a:avLst/>
+          </a:prstGeom>
+          <a:solidFill>
+            <a:srgbClr val="0F766E"/>
+          </a:solidFill>
+          <a:ln>
+            <a:noFill/>
+          </a:ln>
+        </p:spPr>
+        <p:txBody>
+          <a:bodyPr wrap="square" anchor="t">
+            <a:spAutoFit/>
+          </a:bodyPr>
+          <a:lstStyle/>
+          <a:p>
+            <a:pPr algn="ctr"/>
+            <a:endParaRPr/>
+          </a:p>
+        </p:txBody>
+      </p:sp>
+      <p:sp>
+        <p:nvSpPr>
+          <p:cNvPr id="11" name="TextBox 11"/>
+          <p:cNvSpPr txBox="1"/>
+          <p:nvPr/>
+        </p:nvSpPr>
+        <p:spPr>
+          <a:xfrm>
+            <a:off x="6519672" y="1691639"/>
+            <a:ext cx="4480559" cy="320040"/>
+          </a:xfrm>
+          <a:prstGeom prst="rect">
+            <a:avLst/>
+          </a:prstGeom>
+          <a:noFill/>
+          <a:ln>
+            <a:noFill/>
+          </a:ln>
+        </p:spPr>
+        <p:txBody>
+          <a:bodyPr wrap="square" anchor="t">
+            <a:spAutoFit/>
+          </a:bodyPr>
+          <a:lstStyle/>
+          <a:p>
+            <a:pPr algn="l"/>
+            <a:r>
+              <a:rPr lang="en-US" sz="2000" dirty="0">
+                <a:solidFill>
+                  <a:srgbClr val="111827"/>
+                </a:solidFill>
+                <a:latin typeface="Aptos"/>
+              </a:rPr>
+              <a:t>What stays in Langfuse</a:t>
+            </a:r>
+          </a:p>
+        </p:txBody>
+      </p:sp>
+      <p:sp>
+        <p:nvSpPr>
+          <p:cNvPr id="12" name="TextBox 12"/>
+          <p:cNvSpPr txBox="1"/>
+          <p:nvPr/>
+        </p:nvSpPr>
+        <p:spPr>
+          <a:xfrm>
+            <a:off x="6556248" y="2103120"/>
+            <a:ext cx="4389120" cy="2970044"/>
+          </a:xfrm>
+          <a:prstGeom prst="rect">
+            <a:avLst/>
+          </a:prstGeom>
+          <a:noFill/>
+          <a:ln>
+            <a:noFill/>
+          </a:ln>
+        </p:spPr>
+        <p:txBody>
+          <a:bodyPr wrap="square" anchor="t">
+            <a:spAutoFit/>
+          </a:bodyPr>
+          <a:lstStyle/>
+          <a:p>
+            <a:pPr algn="l"/>
+            <a:r>
+              <a:rPr lang="en-US" sz="1700" dirty="0">
+                <a:solidFill>
+                  <a:srgbClr val="334155"/>
+                </a:solidFill>
+                <a:latin typeface="Aptos"/>
+              </a:rPr>
+              <a:t>- Traces and observations for each evaluated item</a:t>
+            </a:r>
+            <a:br>
+              <a:rPr lang="en-US" sz="1700" dirty="0">
+                <a:solidFill>
+                  <a:srgbClr val="334155"/>
+                </a:solidFill>
+                <a:latin typeface="Aptos"/>
+              </a:rPr>
+            </a:br>
+            <a:endParaRPr lang="en-US" sz="1700" dirty="0">
+              <a:solidFill>
+                <a:srgbClr val="334155"/>
+              </a:solidFill>
+              <a:latin typeface="Aptos"/>
+            </a:endParaRPr>
+          </a:p>
+          <a:p>
+            <a:pPr algn="l"/>
+            <a:r>
+              <a:rPr lang="en-US" sz="1700" dirty="0">
+                <a:solidFill>
+                  <a:srgbClr val="334155"/>
+                </a:solidFill>
+                <a:latin typeface="Aptos"/>
+              </a:rPr>
+              <a:t>- Prompt visibility for task and evaluator prompts</a:t>
+            </a:r>
+            <a:br>
+              <a:rPr lang="en-US" sz="1700" dirty="0">
+                <a:solidFill>
+                  <a:srgbClr val="334155"/>
+                </a:solidFill>
+                <a:latin typeface="Aptos"/>
+              </a:rPr>
+            </a:br>
+            <a:endParaRPr lang="en-US" sz="1700" dirty="0">
+              <a:solidFill>
+                <a:srgbClr val="334155"/>
+              </a:solidFill>
+              <a:latin typeface="Aptos"/>
+            </a:endParaRPr>
+          </a:p>
+          <a:p>
+            <a:pPr algn="l"/>
+            <a:r>
+              <a:rPr lang="en-US" sz="1700" dirty="0">
+                <a:solidFill>
+                  <a:srgbClr val="334155"/>
+                </a:solidFill>
+                <a:latin typeface="Aptos"/>
+              </a:rPr>
+              <a:t>- Evaluator definitions, score configs, scores, dashboards, and comparisons</a:t>
+            </a:r>
+            <a:br>
+              <a:rPr lang="en-US" sz="1700" dirty="0">
+                <a:solidFill>
+                  <a:srgbClr val="334155"/>
+                </a:solidFill>
+                <a:latin typeface="Aptos"/>
+              </a:rPr>
+            </a:br>
+            <a:endParaRPr lang="en-US" sz="1700" dirty="0">
+              <a:solidFill>
+                <a:srgbClr val="334155"/>
+              </a:solidFill>
+              <a:latin typeface="Aptos"/>
+            </a:endParaRPr>
+          </a:p>
+          <a:p>
+            <a:pPr algn="l"/>
+            <a:r>
+              <a:rPr lang="en-US" sz="1700" dirty="0">
+                <a:solidFill>
+                  <a:srgbClr val="334155"/>
+                </a:solidFill>
+                <a:latin typeface="Aptos"/>
+              </a:rPr>
+              <a:t>- Human annotation queues for selected outputs</a:t>
+            </a:r>
+          </a:p>
+        </p:txBody>
+      </p:sp>
+      <p:sp>
+        <p:nvSpPr>
+          <p:cNvPr id="13" name="TextBox 13"/>
           <p:cNvSpPr txBox="1"/>
           <p:nvPr/>
         </p:nvSpPr>
@@ -3257,7 +3195,7 @@
           </a:ln>
         </p:spPr>
         <p:txBody>
-          <a:bodyPr anchor="top" wrap="square">
+          <a:bodyPr wrap="square" anchor="t">
             <a:spAutoFit/>
           </a:bodyPr>
           <a:lstStyle/>
@@ -3320,7 +3258,7 @@
           </a:ln>
         </p:spPr>
         <p:txBody>
-          <a:bodyPr anchor="top" wrap="square">
+          <a:bodyPr wrap="square" anchor="t">
             <a:spAutoFit/>
           </a:bodyPr>
           <a:lstStyle/>
@@ -3328,13 +3266,12 @@
             <a:pPr algn="l"/>
             <a:r>
               <a:rPr lang="en-US" sz="3000" dirty="0">
-                <a:b/>
                 <a:solidFill>
                   <a:srgbClr val="111827"/>
                 </a:solidFill>
                 <a:latin typeface="Aptos"/>
               </a:rPr>
-              <a:t>What Langfuse Is</a:t>
+              <a:t>What The Harness Does</a:t>
             </a:r>
           </a:p>
         </p:txBody>
@@ -3359,7 +3296,7 @@
           </a:ln>
         </p:spPr>
         <p:txBody>
-          <a:bodyPr anchor="top" wrap="square">
+          <a:bodyPr wrap="square" anchor="t">
             <a:spAutoFit/>
           </a:bodyPr>
           <a:lstStyle/>
@@ -3372,7 +3309,7 @@
                 </a:solidFill>
                 <a:latin typeface="Aptos"/>
               </a:rPr>
-              <a:t>The shared system of record for LLM observability and evaluation</a:t>
+              <a:t>A thin local runner around project artifacts and Langfuse</a:t>
             </a:r>
           </a:p>
         </p:txBody>
@@ -3398,6 +3335,13 @@
             <a:noFill/>
           </a:ln>
         </p:spPr>
+        <p:txBody>
+          <a:bodyPr/>
+          <a:lstStyle/>
+          <a:p>
+            <a:endParaRPr lang="en-US"/>
+          </a:p>
+        </p:txBody>
       </p:sp>
       <p:sp>
         <p:nvSpPr>
@@ -3407,358 +3351,399 @@
         </p:nvSpPr>
         <p:spPr>
           <a:xfrm>
-            <a:off x="777240" y="1508760"/>
-            <a:ext cx="5074920" cy="1417320"/>
+            <a:off x="731520" y="1600200"/>
+            <a:ext cx="2331720" cy="960120"/>
           </a:xfrm>
           <a:prstGeom prst="roundRect">
             <a:avLst/>
           </a:prstGeom>
           <a:solidFill>
-            <a:srgbClr val="DBEAFE"/>
+            <a:srgbClr val="EFF6FF"/>
           </a:solidFill>
           <a:ln w="18000">
             <a:solidFill>
-              <a:srgbClr val="FFFFFF"/>
+              <a:srgbClr val="BFDBFE"/>
             </a:solidFill>
           </a:ln>
         </p:spPr>
         <p:txBody>
-          <a:bodyPr anchor="mid" wrap="square">
+          <a:bodyPr wrap="square" anchor="t">
             <a:spAutoFit/>
           </a:bodyPr>
           <a:lstStyle/>
           <a:p>
             <a:pPr algn="ctr"/>
-          </a:p>
-        </p:txBody>
-      </p:sp>
-      <p:sp>
-        <p:nvSpPr>
-          <p:cNvPr id="6" name="TextBox 6"/>
-          <p:cNvSpPr txBox="1"/>
-          <p:nvPr/>
-        </p:nvSpPr>
-        <p:spPr>
-          <a:xfrm>
-            <a:off x="1051560" y="1709928"/>
-            <a:ext cx="4572000" cy="292608"/>
-          </a:xfrm>
-          <a:prstGeom prst="rect">
-            <a:avLst/>
-          </a:prstGeom>
-          <a:noFill/>
-          <a:ln>
-            <a:noFill/>
-          </a:ln>
-        </p:spPr>
-        <p:txBody>
-          <a:bodyPr anchor="top" wrap="square">
-            <a:spAutoFit/>
-          </a:bodyPr>
-          <a:lstStyle/>
-          <a:p>
-            <a:pPr algn="l"/>
-            <a:r>
-              <a:rPr lang="en-US" sz="2100" dirty="0">
-                <a:b/>
+            <a:r>
+              <a:rPr lang="en-US" sz="1900" dirty="0">
                 <a:solidFill>
                   <a:srgbClr val="1E3A8A"/>
                 </a:solidFill>
                 <a:latin typeface="Aptos"/>
               </a:rPr>
-              <a:t>Open Source</a:t>
-            </a:r>
-          </a:p>
-        </p:txBody>
-      </p:sp>
-      <p:sp>
-        <p:nvSpPr>
-          <p:cNvPr id="7" name="TextBox 7"/>
-          <p:cNvSpPr txBox="1"/>
-          <p:nvPr/>
-        </p:nvSpPr>
-        <p:spPr>
-          <a:xfrm>
-            <a:off x="1051560" y="2130552"/>
-            <a:ext cx="4572000" cy="713232"/>
-          </a:xfrm>
-          <a:prstGeom prst="rect">
-            <a:avLst/>
-          </a:prstGeom>
-          <a:noFill/>
-          <a:ln>
-            <a:noFill/>
-          </a:ln>
-        </p:spPr>
-        <p:txBody>
-          <a:bodyPr anchor="top" wrap="square">
-            <a:spAutoFit/>
-          </a:bodyPr>
-          <a:lstStyle/>
-          <a:p>
-            <a:pPr algn="l"/>
-            <a:r>
-              <a:rPr lang="en-US" sz="1700" dirty="0">
-                <a:solidFill>
-                  <a:srgbClr val="334155"/>
-                </a:solidFill>
-                <a:latin typeface="Aptos"/>
-              </a:rPr>
-              <a:t>Core platform is open source, so teams can inspect, extend, and self-host when needed.</a:t>
-            </a:r>
-          </a:p>
-        </p:txBody>
-      </p:sp>
-      <p:sp>
-        <p:nvSpPr>
-          <p:cNvPr id="8" name="Shape 8"/>
+              <a:t>Project YAML</a:t>
+            </a:r>
+          </a:p>
+          <a:p>
+            <a:pPr algn="ctr"/>
+            <a:r>
+              <a:rPr lang="en-US" sz="1900" dirty="0">
+                <a:solidFill>
+                  <a:srgbClr val="1E3A8A"/>
+                </a:solidFill>
+                <a:latin typeface="Aptos"/>
+              </a:rPr>
+              <a:t>Dataset</a:t>
+            </a:r>
+          </a:p>
+          <a:p>
+            <a:pPr algn="ctr"/>
+            <a:r>
+              <a:rPr lang="en-US" sz="1900" dirty="0">
+                <a:solidFill>
+                  <a:srgbClr val="1E3A8A"/>
+                </a:solidFill>
+                <a:latin typeface="Aptos"/>
+              </a:rPr>
+              <a:t>Prompts</a:t>
+            </a:r>
+          </a:p>
+        </p:txBody>
+      </p:sp>
+      <p:sp>
+        <p:nvSpPr>
+          <p:cNvPr id="6" name="Shape 6"/>
           <p:cNvSpPr/>
           <p:nvPr/>
         </p:nvSpPr>
         <p:spPr>
           <a:xfrm>
-            <a:off x="6400800" y="1508760"/>
-            <a:ext cx="5074920" cy="1417320"/>
+            <a:off x="3886200" y="1600200"/>
+            <a:ext cx="2331720" cy="960120"/>
           </a:xfrm>
           <a:prstGeom prst="roundRect">
             <a:avLst/>
           </a:prstGeom>
           <a:solidFill>
-            <a:srgbClr val="CCFBF1"/>
+            <a:srgbClr val="F8FAFC"/>
           </a:solidFill>
           <a:ln w="18000">
             <a:solidFill>
-              <a:srgbClr val="FFFFFF"/>
+              <a:srgbClr val="CBD5E1"/>
             </a:solidFill>
           </a:ln>
         </p:spPr>
         <p:txBody>
-          <a:bodyPr anchor="mid" wrap="square">
+          <a:bodyPr wrap="square" anchor="t">
             <a:spAutoFit/>
           </a:bodyPr>
           <a:lstStyle/>
           <a:p>
             <a:pPr algn="ctr"/>
-          </a:p>
-        </p:txBody>
-      </p:sp>
-      <p:sp>
-        <p:nvSpPr>
-          <p:cNvPr id="9" name="TextBox 9"/>
-          <p:cNvSpPr txBox="1"/>
-          <p:nvPr/>
-        </p:nvSpPr>
-        <p:spPr>
-          <a:xfrm>
-            <a:off x="6675120" y="1709928"/>
-            <a:ext cx="4572000" cy="292608"/>
-          </a:xfrm>
-          <a:prstGeom prst="rect">
-            <a:avLst/>
-          </a:prstGeom>
-          <a:noFill/>
-          <a:ln>
-            <a:noFill/>
-          </a:ln>
-        </p:spPr>
-        <p:txBody>
-          <a:bodyPr anchor="top" wrap="square">
-            <a:spAutoFit/>
-          </a:bodyPr>
-          <a:lstStyle/>
-          <a:p>
-            <a:pPr algn="l"/>
-            <a:r>
-              <a:rPr lang="en-US" sz="2100" dirty="0">
-                <a:b/>
-                <a:solidFill>
-                  <a:srgbClr val="134E4A"/>
-                </a:solidFill>
-                <a:latin typeface="Aptos"/>
-              </a:rPr>
-              <a:t>Cloud Or Self Hosted</a:t>
-            </a:r>
-          </a:p>
-        </p:txBody>
-      </p:sp>
-      <p:sp>
-        <p:nvSpPr>
-          <p:cNvPr id="10" name="TextBox 10"/>
-          <p:cNvSpPr txBox="1"/>
-          <p:nvPr/>
-        </p:nvSpPr>
-        <p:spPr>
-          <a:xfrm>
-            <a:off x="6675120" y="2130552"/>
-            <a:ext cx="4572000" cy="713232"/>
-          </a:xfrm>
-          <a:prstGeom prst="rect">
-            <a:avLst/>
-          </a:prstGeom>
-          <a:noFill/>
-          <a:ln>
-            <a:noFill/>
-          </a:ln>
-        </p:spPr>
-        <p:txBody>
-          <a:bodyPr anchor="top" wrap="square">
-            <a:spAutoFit/>
-          </a:bodyPr>
-          <a:lstStyle/>
-          <a:p>
-            <a:pPr algn="l"/>
-            <a:r>
-              <a:rPr lang="en-US" sz="1700" dirty="0">
-                <a:solidFill>
-                  <a:srgbClr val="334155"/>
-                </a:solidFill>
-                <a:latin typeface="Aptos"/>
-              </a:rPr>
-              <a:t>Use managed Langfuse Cloud or operate your own deployment for governance and control.</a:t>
-            </a:r>
-          </a:p>
-        </p:txBody>
-      </p:sp>
-      <p:sp>
-        <p:nvSpPr>
-          <p:cNvPr id="11" name="Shape 11"/>
+            <a:r>
+              <a:rPr lang="en-US" sz="1900" dirty="0">
+                <a:solidFill>
+                  <a:srgbClr val="111827"/>
+                </a:solidFill>
+                <a:latin typeface="Aptos"/>
+              </a:rPr>
+              <a:t>Baseline Run</a:t>
+            </a:r>
+          </a:p>
+          <a:p>
+            <a:pPr algn="ctr"/>
+            <a:r>
+              <a:rPr lang="en-US" sz="1900" dirty="0">
+                <a:solidFill>
+                  <a:srgbClr val="111827"/>
+                </a:solidFill>
+                <a:latin typeface="Aptos"/>
+              </a:rPr>
+              <a:t>Candidate Run</a:t>
+            </a:r>
+          </a:p>
+        </p:txBody>
+      </p:sp>
+      <p:sp>
+        <p:nvSpPr>
+          <p:cNvPr id="7" name="Shape 7"/>
           <p:cNvSpPr/>
           <p:nvPr/>
         </p:nvSpPr>
         <p:spPr>
           <a:xfrm>
-            <a:off x="777240" y="3383279"/>
-            <a:ext cx="5074920" cy="1417320"/>
+            <a:off x="6940296" y="1578077"/>
+            <a:ext cx="2331720" cy="960120"/>
           </a:xfrm>
           <a:prstGeom prst="roundRect">
             <a:avLst/>
           </a:prstGeom>
           <a:solidFill>
-            <a:srgbClr val="DCFCE7"/>
+            <a:srgbClr val="ECFDF5"/>
           </a:solidFill>
           <a:ln w="18000">
             <a:solidFill>
-              <a:srgbClr val="FFFFFF"/>
+              <a:srgbClr val="A7F3D0"/>
             </a:solidFill>
           </a:ln>
         </p:spPr>
         <p:txBody>
-          <a:bodyPr anchor="mid" wrap="square">
+          <a:bodyPr wrap="square" anchor="t">
             <a:spAutoFit/>
           </a:bodyPr>
           <a:lstStyle/>
           <a:p>
             <a:pPr algn="ctr"/>
-          </a:p>
-        </p:txBody>
-      </p:sp>
-      <p:sp>
-        <p:nvSpPr>
-          <p:cNvPr id="12" name="TextBox 12"/>
-          <p:cNvSpPr txBox="1"/>
-          <p:nvPr/>
-        </p:nvSpPr>
-        <p:spPr>
-          <a:xfrm>
-            <a:off x="1051560" y="3584448"/>
-            <a:ext cx="4572000" cy="292608"/>
-          </a:xfrm>
-          <a:prstGeom prst="rect">
-            <a:avLst/>
-          </a:prstGeom>
-          <a:noFill/>
-          <a:ln>
-            <a:noFill/>
-          </a:ln>
-        </p:spPr>
-        <p:txBody>
-          <a:bodyPr anchor="top" wrap="square">
-            <a:spAutoFit/>
-          </a:bodyPr>
-          <a:lstStyle/>
-          <a:p>
-            <a:pPr algn="l"/>
-            <a:r>
-              <a:rPr lang="en-US" sz="2100" dirty="0">
-                <a:b/>
-                <a:solidFill>
-                  <a:srgbClr val="14532D"/>
-                </a:solidFill>
-                <a:latin typeface="Aptos"/>
-              </a:rPr>
-              <a:t>LLM Observability</a:t>
-            </a:r>
-          </a:p>
-        </p:txBody>
-      </p:sp>
-      <p:sp>
-        <p:nvSpPr>
-          <p:cNvPr id="13" name="TextBox 13"/>
-          <p:cNvSpPr txBox="1"/>
-          <p:nvPr/>
-        </p:nvSpPr>
-        <p:spPr>
-          <a:xfrm>
-            <a:off x="1051560" y="4005072"/>
-            <a:ext cx="4572000" cy="713232"/>
-          </a:xfrm>
-          <a:prstGeom prst="rect">
-            <a:avLst/>
-          </a:prstGeom>
-          <a:noFill/>
-          <a:ln>
-            <a:noFill/>
-          </a:ln>
-        </p:spPr>
-        <p:txBody>
-          <a:bodyPr anchor="top" wrap="square">
-            <a:spAutoFit/>
-          </a:bodyPr>
-          <a:lstStyle/>
-          <a:p>
-            <a:pPr algn="l"/>
-            <a:r>
-              <a:rPr lang="en-US" sz="1700" dirty="0">
-                <a:solidFill>
-                  <a:srgbClr val="334155"/>
-                </a:solidFill>
-                <a:latin typeface="Aptos"/>
-              </a:rPr>
-              <a:t>Capture traces, generations, metadata, prompts, sessions, and user or evaluator feedback.</a:t>
-            </a:r>
-          </a:p>
-        </p:txBody>
-      </p:sp>
-      <p:sp>
-        <p:nvSpPr>
-          <p:cNvPr id="14" name="Shape 14"/>
+            <a:r>
+              <a:rPr lang="en-US" sz="1900" dirty="0">
+                <a:solidFill>
+                  <a:srgbClr val="064E3B"/>
+                </a:solidFill>
+                <a:latin typeface="Aptos"/>
+              </a:rPr>
+              <a:t>Langfuse</a:t>
+            </a:r>
+          </a:p>
+          <a:p>
+            <a:pPr algn="ctr"/>
+            <a:r>
+              <a:rPr lang="en-US" sz="1900" dirty="0">
+                <a:solidFill>
+                  <a:srgbClr val="064E3B"/>
+                </a:solidFill>
+                <a:latin typeface="Aptos"/>
+              </a:rPr>
+              <a:t>Trace Store</a:t>
+            </a:r>
+          </a:p>
+        </p:txBody>
+      </p:sp>
+      <p:sp>
+        <p:nvSpPr>
+          <p:cNvPr id="8" name="Shape 8"/>
           <p:cNvSpPr/>
           <p:nvPr/>
         </p:nvSpPr>
         <p:spPr>
           <a:xfrm>
-            <a:off x="6400800" y="3383279"/>
-            <a:ext cx="5074920" cy="1417320"/>
+            <a:off x="9601200" y="1600200"/>
+            <a:ext cx="2057400" cy="960120"/>
           </a:xfrm>
           <a:prstGeom prst="roundRect">
             <a:avLst/>
           </a:prstGeom>
           <a:solidFill>
-            <a:srgbClr val="FEF3C7"/>
+            <a:srgbClr val="FFF7ED"/>
           </a:solidFill>
           <a:ln w="18000">
             <a:solidFill>
-              <a:srgbClr val="FFFFFF"/>
+              <a:srgbClr val="FDBA74"/>
             </a:solidFill>
           </a:ln>
         </p:spPr>
         <p:txBody>
-          <a:bodyPr anchor="mid" wrap="square">
+          <a:bodyPr wrap="square" anchor="t">
             <a:spAutoFit/>
           </a:bodyPr>
           <a:lstStyle/>
           <a:p>
             <a:pPr algn="ctr"/>
+            <a:r>
+              <a:rPr lang="en-US" sz="1900" dirty="0">
+                <a:solidFill>
+                  <a:srgbClr val="7C2D12"/>
+                </a:solidFill>
+                <a:latin typeface="Aptos"/>
+              </a:rPr>
+              <a:t>Scores</a:t>
+            </a:r>
+          </a:p>
+          <a:p>
+            <a:pPr algn="ctr"/>
+            <a:r>
+              <a:rPr lang="en-US" sz="1900" dirty="0">
+                <a:solidFill>
+                  <a:srgbClr val="7C2D12"/>
+                </a:solidFill>
+                <a:latin typeface="Aptos"/>
+              </a:rPr>
+              <a:t>Review</a:t>
+            </a:r>
+          </a:p>
+        </p:txBody>
+      </p:sp>
+      <p:cxnSp>
+        <p:nvCxnSpPr>
+          <p:cNvPr id="9" name="Arrow 9"/>
+          <p:cNvCxnSpPr/>
+          <p:nvPr/>
+        </p:nvCxnSpPr>
+        <p:spPr>
+          <a:xfrm>
+            <a:off x="3090672" y="2057400"/>
+            <a:ext cx="768095" cy="0"/>
+          </a:xfrm>
+          <a:prstGeom prst="line">
+            <a:avLst/>
+          </a:prstGeom>
+          <a:ln w="22000">
+            <a:solidFill>
+              <a:srgbClr val="64748B"/>
+            </a:solidFill>
+            <a:headEnd type="triangle"/>
+          </a:ln>
+        </p:spPr>
+      </p:cxnSp>
+      <p:cxnSp>
+        <p:nvCxnSpPr>
+          <p:cNvPr id="10" name="Arrow 10"/>
+          <p:cNvCxnSpPr>
+            <a:cxnSpLocks/>
+            <a:endCxn id="7" idx="1"/>
+          </p:cNvCxnSpPr>
+          <p:nvPr/>
+        </p:nvCxnSpPr>
+        <p:spPr>
+          <a:xfrm>
+            <a:off x="6245352" y="2057400"/>
+            <a:ext cx="694944" cy="737"/>
+          </a:xfrm>
+          <a:prstGeom prst="line">
+            <a:avLst/>
+          </a:prstGeom>
+          <a:ln w="22000">
+            <a:solidFill>
+              <a:srgbClr val="64748B"/>
+            </a:solidFill>
+            <a:headEnd type="triangle"/>
+          </a:ln>
+        </p:spPr>
+      </p:cxnSp>
+      <p:cxnSp>
+        <p:nvCxnSpPr>
+          <p:cNvPr id="11" name="Arrow 11"/>
+          <p:cNvCxnSpPr>
+            <a:cxnSpLocks/>
+            <a:stCxn id="7" idx="3"/>
+          </p:cNvCxnSpPr>
+          <p:nvPr/>
+        </p:nvCxnSpPr>
+        <p:spPr>
+          <a:xfrm flipV="1">
+            <a:off x="9272016" y="2057400"/>
+            <a:ext cx="301752" cy="737"/>
+          </a:xfrm>
+          <a:prstGeom prst="line">
+            <a:avLst/>
+          </a:prstGeom>
+          <a:ln w="22000">
+            <a:solidFill>
+              <a:srgbClr val="64748B"/>
+            </a:solidFill>
+            <a:headEnd type="triangle"/>
+          </a:ln>
+        </p:spPr>
+      </p:cxnSp>
+      <p:sp>
+        <p:nvSpPr>
+          <p:cNvPr id="12" name="Shape 12"/>
+          <p:cNvSpPr/>
+          <p:nvPr/>
+        </p:nvSpPr>
+        <p:spPr>
+          <a:xfrm>
+            <a:off x="914400" y="3108960"/>
+            <a:ext cx="10241280" cy="2148840"/>
+          </a:xfrm>
+          <a:prstGeom prst="roundRect">
+            <a:avLst/>
+          </a:prstGeom>
+          <a:solidFill>
+            <a:srgbClr val="FFFFFF"/>
+          </a:solidFill>
+          <a:ln w="18000">
+            <a:solidFill>
+              <a:srgbClr val="CBD5E1"/>
+            </a:solidFill>
+          </a:ln>
+        </p:spPr>
+        <p:txBody>
+          <a:bodyPr wrap="square" anchor="t">
+            <a:spAutoFit/>
+          </a:bodyPr>
+          <a:lstStyle/>
+          <a:p>
+            <a:pPr algn="ctr"/>
+            <a:endParaRPr/>
+          </a:p>
+        </p:txBody>
+      </p:sp>
+      <p:sp>
+        <p:nvSpPr>
+          <p:cNvPr id="13" name="Shape 13"/>
+          <p:cNvSpPr/>
+          <p:nvPr/>
+        </p:nvSpPr>
+        <p:spPr>
+          <a:xfrm>
+            <a:off x="914400" y="3108960"/>
+            <a:ext cx="73152" cy="2148840"/>
+          </a:xfrm>
+          <a:prstGeom prst="rect">
+            <a:avLst/>
+          </a:prstGeom>
+          <a:solidFill>
+            <a:srgbClr val="7C3AED"/>
+          </a:solidFill>
+          <a:ln>
+            <a:noFill/>
+          </a:ln>
+        </p:spPr>
+        <p:txBody>
+          <a:bodyPr wrap="square" anchor="t">
+            <a:spAutoFit/>
+          </a:bodyPr>
+          <a:lstStyle/>
+          <a:p>
+            <a:pPr algn="ctr"/>
+            <a:endParaRPr/>
+          </a:p>
+        </p:txBody>
+      </p:sp>
+      <p:sp>
+        <p:nvSpPr>
+          <p:cNvPr id="14" name="TextBox 14"/>
+          <p:cNvSpPr txBox="1"/>
+          <p:nvPr/>
+        </p:nvSpPr>
+        <p:spPr>
+          <a:xfrm>
+            <a:off x="1170432" y="3291840"/>
+            <a:ext cx="9829800" cy="320040"/>
+          </a:xfrm>
+          <a:prstGeom prst="rect">
+            <a:avLst/>
+          </a:prstGeom>
+          <a:noFill/>
+          <a:ln>
+            <a:noFill/>
+          </a:ln>
+        </p:spPr>
+        <p:txBody>
+          <a:bodyPr wrap="square" anchor="t">
+            <a:spAutoFit/>
+          </a:bodyPr>
+          <a:lstStyle/>
+          <a:p>
+            <a:pPr algn="l"/>
+            <a:r>
+              <a:rPr lang="en-US" sz="2000" dirty="0">
+                <a:solidFill>
+                  <a:srgbClr val="111827"/>
+                </a:solidFill>
+                <a:latin typeface="Aptos"/>
+              </a:rPr>
+              <a:t>Boundaries</a:t>
+            </a:r>
           </a:p>
         </p:txBody>
       </p:sp>
@@ -3770,33 +3755,65 @@
         </p:nvSpPr>
         <p:spPr>
           <a:xfrm>
-            <a:off x="6675120" y="3584448"/>
-            <a:ext cx="4572000" cy="292608"/>
-          </a:xfrm>
-          <a:prstGeom prst="rect">
-            <a:avLst/>
-          </a:prstGeom>
-          <a:noFill/>
-          <a:ln>
-            <a:noFill/>
-          </a:ln>
-        </p:spPr>
-        <p:txBody>
-          <a:bodyPr anchor="top" wrap="square">
-            <a:spAutoFit/>
-          </a:bodyPr>
-          <a:lstStyle/>
-          <a:p>
-            <a:pPr algn="l"/>
-            <a:r>
-              <a:rPr lang="en-US" sz="2100" dirty="0">
-                <a:b/>
-                <a:solidFill>
-                  <a:srgbClr val="78350F"/>
-                </a:solidFill>
-                <a:latin typeface="Aptos"/>
-              </a:rPr>
-              <a:t>Evaluation Workflows</a:t>
+            <a:off x="1207008" y="3703320"/>
+            <a:ext cx="9738359" cy="1138773"/>
+          </a:xfrm>
+          <a:prstGeom prst="rect">
+            <a:avLst/>
+          </a:prstGeom>
+          <a:noFill/>
+          <a:ln>
+            <a:noFill/>
+          </a:ln>
+        </p:spPr>
+        <p:txBody>
+          <a:bodyPr wrap="square" anchor="t">
+            <a:spAutoFit/>
+          </a:bodyPr>
+          <a:lstStyle/>
+          <a:p>
+            <a:pPr algn="l"/>
+            <a:r>
+              <a:rPr lang="en-US" sz="1700" dirty="0">
+                <a:solidFill>
+                  <a:srgbClr val="334155"/>
+                </a:solidFill>
+                <a:latin typeface="Aptos"/>
+              </a:rPr>
+              <a:t>- The harness does not try to become a dashboard, annotation UI, evaluator workbench, or prompt registry.</a:t>
+            </a:r>
+          </a:p>
+          <a:p>
+            <a:pPr algn="l"/>
+            <a:r>
+              <a:rPr lang="en-US" sz="1700" b="1" dirty="0">
+                <a:solidFill>
+                  <a:srgbClr val="334155"/>
+                </a:solidFill>
+                <a:latin typeface="Aptos"/>
+              </a:rPr>
+              <a:t>- It prepares and runs repeatable experiments, then sends the operational artifacts to Langfuse</a:t>
+            </a:r>
+            <a:r>
+              <a:rPr lang="en-US" sz="1700" dirty="0">
+                <a:solidFill>
+                  <a:srgbClr val="334155"/>
+                </a:solidFill>
+                <a:latin typeface="Aptos"/>
+              </a:rPr>
+              <a:t>.</a:t>
+            </a:r>
+          </a:p>
+          <a:p>
+            <a:pPr algn="l"/>
+            <a:r>
+              <a:rPr lang="en-US" sz="1700" dirty="0">
+                <a:solidFill>
+                  <a:srgbClr val="334155"/>
+                </a:solidFill>
+                <a:latin typeface="Aptos"/>
+              </a:rPr>
+              <a:t>- Setup commands support dry-run first, then apply, so changes can be previewed before mutation.</a:t>
             </a:r>
           </a:p>
         </p:txBody>
@@ -3804,44 +3821,6 @@
       <p:sp>
         <p:nvSpPr>
           <p:cNvPr id="16" name="TextBox 16"/>
-          <p:cNvSpPr txBox="1"/>
-          <p:nvPr/>
-        </p:nvSpPr>
-        <p:spPr>
-          <a:xfrm>
-            <a:off x="6675120" y="4005072"/>
-            <a:ext cx="4572000" cy="713232"/>
-          </a:xfrm>
-          <a:prstGeom prst="rect">
-            <a:avLst/>
-          </a:prstGeom>
-          <a:noFill/>
-          <a:ln>
-            <a:noFill/>
-          </a:ln>
-        </p:spPr>
-        <p:txBody>
-          <a:bodyPr anchor="top" wrap="square">
-            <a:spAutoFit/>
-          </a:bodyPr>
-          <a:lstStyle/>
-          <a:p>
-            <a:pPr algn="l"/>
-            <a:r>
-              <a:rPr lang="en-US" sz="1700" dirty="0">
-                <a:solidFill>
-                  <a:srgbClr val="334155"/>
-                </a:solidFill>
-                <a:latin typeface="Aptos"/>
-              </a:rPr>
-              <a:t>Manage datasets, scores, evaluators, experiments, and human annotation workflows.</a:t>
-            </a:r>
-          </a:p>
-        </p:txBody>
-      </p:sp>
-      <p:sp>
-        <p:nvSpPr>
-          <p:cNvPr id="17" name="TextBox 17"/>
           <p:cNvSpPr txBox="1"/>
           <p:nvPr/>
         </p:nvSpPr>
@@ -3859,7 +3838,7 @@
           </a:ln>
         </p:spPr>
         <p:txBody>
-          <a:bodyPr anchor="top" wrap="square">
+          <a:bodyPr wrap="square" anchor="t">
             <a:spAutoFit/>
           </a:bodyPr>
           <a:lstStyle/>
@@ -3872,7 +3851,7 @@
                 </a:solidFill>
                 <a:latin typeface="Aptos"/>
               </a:rPr>
-              <a:t>Sources: Langfuse documentation and Langfuse GitHub project overview</a:t>
+              <a:t>Evaluator Harness | Langfuse-first offline evaluation workflow</a:t>
             </a:r>
           </a:p>
         </p:txBody>
@@ -3922,7 +3901,7 @@
           </a:ln>
         </p:spPr>
         <p:txBody>
-          <a:bodyPr anchor="top" wrap="square">
+          <a:bodyPr wrap="square" anchor="t">
             <a:spAutoFit/>
           </a:bodyPr>
           <a:lstStyle/>
@@ -3930,7 +3909,6 @@
             <a:pPr algn="l"/>
             <a:r>
               <a:rPr lang="en-US" sz="3000" dirty="0">
-                <a:b/>
                 <a:solidFill>
                   <a:srgbClr val="111827"/>
                 </a:solidFill>
@@ -3961,7 +3939,7 @@
           </a:ln>
         </p:spPr>
         <p:txBody>
-          <a:bodyPr anchor="top" wrap="square">
+          <a:bodyPr wrap="square" anchor="t">
             <a:spAutoFit/>
           </a:bodyPr>
           <a:lstStyle/>
@@ -4000,6 +3978,13 @@
             <a:noFill/>
           </a:ln>
         </p:spPr>
+        <p:txBody>
+          <a:bodyPr/>
+          <a:lstStyle/>
+          <a:p>
+            <a:endParaRPr lang="en-US"/>
+          </a:p>
+        </p:txBody>
       </p:sp>
       <p:sp>
         <p:nvSpPr>
@@ -4025,12 +4010,13 @@
           </a:ln>
         </p:spPr>
         <p:txBody>
-          <a:bodyPr anchor="mid" wrap="square">
+          <a:bodyPr wrap="square" anchor="t">
             <a:spAutoFit/>
           </a:bodyPr>
           <a:lstStyle/>
           <a:p>
             <a:pPr algn="ctr"/>
+            <a:endParaRPr/>
           </a:p>
         </p:txBody>
       </p:sp>
@@ -4056,12 +4042,13 @@
           </a:ln>
         </p:spPr>
         <p:txBody>
-          <a:bodyPr anchor="mid" wrap="square">
+          <a:bodyPr wrap="square" anchor="t">
             <a:spAutoFit/>
           </a:bodyPr>
           <a:lstStyle/>
           <a:p>
             <a:pPr algn="ctr"/>
+            <a:endParaRPr/>
           </a:p>
         </p:txBody>
       </p:sp>
@@ -4085,7 +4072,7 @@
           </a:ln>
         </p:spPr>
         <p:txBody>
-          <a:bodyPr anchor="top" wrap="square">
+          <a:bodyPr wrap="square" anchor="t">
             <a:spAutoFit/>
           </a:bodyPr>
           <a:lstStyle/>
@@ -4093,7 +4080,6 @@
             <a:pPr algn="l"/>
             <a:r>
               <a:rPr lang="en-US" sz="2000" dirty="0">
-                <a:b/>
                 <a:solidFill>
                   <a:srgbClr val="111827"/>
                 </a:solidFill>
@@ -4113,18 +4099,18 @@
         <p:spPr>
           <a:xfrm>
             <a:off x="1024128" y="2057400"/>
-            <a:ext cx="4892040" cy="3749040"/>
-          </a:xfrm>
-          <a:prstGeom prst="rect">
-            <a:avLst/>
-          </a:prstGeom>
-          <a:noFill/>
-          <a:ln>
-            <a:noFill/>
-          </a:ln>
-        </p:spPr>
-        <p:txBody>
-          <a:bodyPr anchor="top" wrap="square">
+            <a:ext cx="4892040" cy="2970044"/>
+          </a:xfrm>
+          <a:prstGeom prst="rect">
+            <a:avLst/>
+          </a:prstGeom>
+          <a:noFill/>
+          <a:ln>
+            <a:noFill/>
+          </a:ln>
+        </p:spPr>
+        <p:txBody>
+          <a:bodyPr wrap="square" anchor="t">
             <a:spAutoFit/>
           </a:bodyPr>
           <a:lstStyle/>
@@ -4139,30 +4125,72 @@
               </a:rPr>
               <a:t>- Central place to inspect each item-level trace and model observation</a:t>
             </a:r>
-          </a:p>
-          <a:p>
-            <a:pPr algn="l"/>
-            <a:r>
+            <a:br>
               <a:rPr lang="en-US" sz="1700" dirty="0">
                 <a:solidFill>
                   <a:srgbClr val="334155"/>
                 </a:solidFill>
                 <a:latin typeface="Aptos"/>
               </a:rPr>
+            </a:br>
+            <a:endParaRPr lang="en-US" sz="1700" dirty="0">
+              <a:solidFill>
+                <a:srgbClr val="334155"/>
+              </a:solidFill>
+              <a:latin typeface="Aptos"/>
+            </a:endParaRPr>
+          </a:p>
+          <a:p>
+            <a:pPr algn="l"/>
+            <a:r>
+              <a:rPr lang="en-US" sz="1700" dirty="0">
+                <a:solidFill>
+                  <a:srgbClr val="334155"/>
+                </a:solidFill>
+                <a:latin typeface="Aptos"/>
+              </a:rPr>
               <a:t>- Prompt and evaluator context available beside the outputs being judged</a:t>
             </a:r>
-          </a:p>
-          <a:p>
-            <a:pPr algn="l"/>
-            <a:r>
+            <a:br>
               <a:rPr lang="en-US" sz="1700" dirty="0">
                 <a:solidFill>
                   <a:srgbClr val="334155"/>
                 </a:solidFill>
                 <a:latin typeface="Aptos"/>
               </a:rPr>
+            </a:br>
+            <a:endParaRPr lang="en-US" sz="1700" dirty="0">
+              <a:solidFill>
+                <a:srgbClr val="334155"/>
+              </a:solidFill>
+              <a:latin typeface="Aptos"/>
+            </a:endParaRPr>
+          </a:p>
+          <a:p>
+            <a:pPr algn="l"/>
+            <a:r>
+              <a:rPr lang="en-US" sz="1700" dirty="0">
+                <a:solidFill>
+                  <a:srgbClr val="334155"/>
+                </a:solidFill>
+                <a:latin typeface="Aptos"/>
+              </a:rPr>
               <a:t>- Score configs and score sources make automated and human signals comparable</a:t>
             </a:r>
+            <a:br>
+              <a:rPr lang="en-US" sz="1700" dirty="0">
+                <a:solidFill>
+                  <a:srgbClr val="334155"/>
+                </a:solidFill>
+                <a:latin typeface="Aptos"/>
+              </a:rPr>
+            </a:br>
+            <a:endParaRPr lang="en-US" sz="1700" dirty="0">
+              <a:solidFill>
+                <a:srgbClr val="334155"/>
+              </a:solidFill>
+              <a:latin typeface="Aptos"/>
+            </a:endParaRPr>
           </a:p>
           <a:p>
             <a:pPr algn="l"/>
@@ -4202,12 +4230,13 @@
           </a:ln>
         </p:spPr>
         <p:txBody>
-          <a:bodyPr anchor="mid" wrap="square">
+          <a:bodyPr wrap="square" anchor="t">
             <a:spAutoFit/>
           </a:bodyPr>
           <a:lstStyle/>
           <a:p>
             <a:pPr algn="ctr"/>
+            <a:endParaRPr/>
           </a:p>
         </p:txBody>
       </p:sp>
@@ -4233,12 +4262,13 @@
           </a:ln>
         </p:spPr>
         <p:txBody>
-          <a:bodyPr anchor="mid" wrap="square">
+          <a:bodyPr wrap="square" anchor="t">
             <a:spAutoFit/>
           </a:bodyPr>
           <a:lstStyle/>
           <a:p>
             <a:pPr algn="ctr"/>
+            <a:endParaRPr/>
           </a:p>
         </p:txBody>
       </p:sp>
@@ -4262,7 +4292,7 @@
           </a:ln>
         </p:spPr>
         <p:txBody>
-          <a:bodyPr anchor="top" wrap="square">
+          <a:bodyPr wrap="square" anchor="t">
             <a:spAutoFit/>
           </a:bodyPr>
           <a:lstStyle/>
@@ -4270,7 +4300,6 @@
             <a:pPr algn="l"/>
             <a:r>
               <a:rPr lang="en-US" sz="2000" dirty="0">
-                <a:b/>
                 <a:solidFill>
                   <a:srgbClr val="111827"/>
                 </a:solidFill>
@@ -4290,18 +4319,18 @@
         <p:spPr>
           <a:xfrm>
             <a:off x="6693408" y="2057400"/>
-            <a:ext cx="4526280" cy="3749040"/>
-          </a:xfrm>
-          <a:prstGeom prst="rect">
-            <a:avLst/>
-          </a:prstGeom>
-          <a:noFill/>
-          <a:ln>
-            <a:noFill/>
-          </a:ln>
-        </p:spPr>
-        <p:txBody>
-          <a:bodyPr anchor="top" wrap="square">
+            <a:ext cx="4526280" cy="2708434"/>
+          </a:xfrm>
+          <a:prstGeom prst="rect">
+            <a:avLst/>
+          </a:prstGeom>
+          <a:noFill/>
+          <a:ln>
+            <a:noFill/>
+          </a:ln>
+        </p:spPr>
+        <p:txBody>
+          <a:bodyPr wrap="square" anchor="t">
             <a:spAutoFit/>
           </a:bodyPr>
           <a:lstStyle/>
@@ -4316,30 +4345,72 @@
               </a:rPr>
               <a:t>- Cloud option for speed; self-hosted option for control</a:t>
             </a:r>
-          </a:p>
-          <a:p>
-            <a:pPr algn="l"/>
-            <a:r>
+            <a:br>
               <a:rPr lang="en-US" sz="1700" dirty="0">
                 <a:solidFill>
                   <a:srgbClr val="334155"/>
                 </a:solidFill>
                 <a:latin typeface="Aptos"/>
               </a:rPr>
+            </a:br>
+            <a:endParaRPr lang="en-US" sz="1700" dirty="0">
+              <a:solidFill>
+                <a:srgbClr val="334155"/>
+              </a:solidFill>
+              <a:latin typeface="Aptos"/>
+            </a:endParaRPr>
+          </a:p>
+          <a:p>
+            <a:pPr algn="l"/>
+            <a:r>
+              <a:rPr lang="en-US" sz="1700" dirty="0">
+                <a:solidFill>
+                  <a:srgbClr val="334155"/>
+                </a:solidFill>
+                <a:latin typeface="Aptos"/>
+              </a:rPr>
               <a:t>- Open-source foundation reduces vendor lock-in risk</a:t>
             </a:r>
-          </a:p>
-          <a:p>
-            <a:pPr algn="l"/>
-            <a:r>
+            <a:br>
               <a:rPr lang="en-US" sz="1700" dirty="0">
                 <a:solidFill>
                   <a:srgbClr val="334155"/>
                 </a:solidFill>
                 <a:latin typeface="Aptos"/>
               </a:rPr>
+            </a:br>
+            <a:endParaRPr lang="en-US" sz="1700" dirty="0">
+              <a:solidFill>
+                <a:srgbClr val="334155"/>
+              </a:solidFill>
+              <a:latin typeface="Aptos"/>
+            </a:endParaRPr>
+          </a:p>
+          <a:p>
+            <a:pPr algn="l"/>
+            <a:r>
+              <a:rPr lang="en-US" sz="1700" dirty="0">
+                <a:solidFill>
+                  <a:srgbClr val="334155"/>
+                </a:solidFill>
+                <a:latin typeface="Aptos"/>
+              </a:rPr>
               <a:t>- Harness can stay local-first and thin</a:t>
             </a:r>
+            <a:br>
+              <a:rPr lang="en-US" sz="1700" dirty="0">
+                <a:solidFill>
+                  <a:srgbClr val="334155"/>
+                </a:solidFill>
+                <a:latin typeface="Aptos"/>
+              </a:rPr>
+            </a:br>
+            <a:endParaRPr lang="en-US" sz="1700" dirty="0">
+              <a:solidFill>
+                <a:srgbClr val="334155"/>
+              </a:solidFill>
+              <a:latin typeface="Aptos"/>
+            </a:endParaRPr>
           </a:p>
           <a:p>
             <a:pPr algn="l"/>
@@ -4375,7 +4446,7 @@
           </a:ln>
         </p:spPr>
         <p:txBody>
-          <a:bodyPr anchor="top" wrap="square">
+          <a:bodyPr wrap="square" anchor="t">
             <a:spAutoFit/>
           </a:bodyPr>
           <a:lstStyle/>
@@ -4438,7 +4509,7 @@
           </a:ln>
         </p:spPr>
         <p:txBody>
-          <a:bodyPr anchor="top" wrap="square">
+          <a:bodyPr wrap="square" anchor="t">
             <a:spAutoFit/>
           </a:bodyPr>
           <a:lstStyle/>
@@ -4446,7 +4517,6 @@
             <a:pPr algn="l"/>
             <a:r>
               <a:rPr lang="en-US" sz="3000" dirty="0">
-                <a:b/>
                 <a:solidFill>
                   <a:srgbClr val="111827"/>
                 </a:solidFill>
@@ -4477,7 +4547,7 @@
           </a:ln>
         </p:spPr>
         <p:txBody>
-          <a:bodyPr anchor="top" wrap="square">
+          <a:bodyPr wrap="square" anchor="t">
             <a:spAutoFit/>
           </a:bodyPr>
           <a:lstStyle/>
@@ -4516,6 +4586,13 @@
             <a:noFill/>
           </a:ln>
         </p:spPr>
+        <p:txBody>
+          <a:bodyPr/>
+          <a:lstStyle/>
+          <a:p>
+            <a:endParaRPr lang="en-US"/>
+          </a:p>
+        </p:txBody>
       </p:sp>
       <p:sp>
         <p:nvSpPr>
@@ -4541,12 +4618,13 @@
           </a:ln>
         </p:spPr>
         <p:txBody>
-          <a:bodyPr anchor="mid" wrap="square">
+          <a:bodyPr wrap="square" anchor="t">
             <a:spAutoFit/>
           </a:bodyPr>
           <a:lstStyle/>
           <a:p>
             <a:pPr algn="ctr"/>
+            <a:endParaRPr/>
           </a:p>
         </p:txBody>
       </p:sp>
@@ -4572,12 +4650,13 @@
           </a:ln>
         </p:spPr>
         <p:txBody>
-          <a:bodyPr anchor="mid" wrap="square">
+          <a:bodyPr wrap="square" anchor="t">
             <a:spAutoFit/>
           </a:bodyPr>
           <a:lstStyle/>
           <a:p>
             <a:pPr algn="ctr"/>
+            <a:endParaRPr/>
           </a:p>
         </p:txBody>
       </p:sp>
@@ -4601,7 +4680,7 @@
           </a:ln>
         </p:spPr>
         <p:txBody>
-          <a:bodyPr anchor="top" wrap="square">
+          <a:bodyPr wrap="square" anchor="t">
             <a:spAutoFit/>
           </a:bodyPr>
           <a:lstStyle/>
@@ -4609,7 +4688,6 @@
             <a:pPr algn="l"/>
             <a:r>
               <a:rPr lang="en-US" sz="2100" dirty="0">
-                <a:b/>
                 <a:solidFill>
                   <a:srgbClr val="111827"/>
                 </a:solidFill>
@@ -4640,7 +4718,7 @@
           </a:ln>
         </p:spPr>
         <p:txBody>
-          <a:bodyPr anchor="top" wrap="square">
+          <a:bodyPr wrap="square" anchor="t">
             <a:spAutoFit/>
           </a:bodyPr>
           <a:lstStyle/>
@@ -4682,12 +4760,13 @@
           </a:ln>
         </p:spPr>
         <p:txBody>
-          <a:bodyPr anchor="mid" wrap="square">
+          <a:bodyPr wrap="square" anchor="t">
             <a:spAutoFit/>
           </a:bodyPr>
           <a:lstStyle/>
           <a:p>
             <a:pPr algn="ctr"/>
+            <a:endParaRPr/>
           </a:p>
         </p:txBody>
       </p:sp>
@@ -4713,12 +4792,13 @@
           </a:ln>
         </p:spPr>
         <p:txBody>
-          <a:bodyPr anchor="mid" wrap="square">
+          <a:bodyPr wrap="square" anchor="t">
             <a:spAutoFit/>
           </a:bodyPr>
           <a:lstStyle/>
           <a:p>
             <a:pPr algn="ctr"/>
+            <a:endParaRPr/>
           </a:p>
         </p:txBody>
       </p:sp>
@@ -4742,7 +4822,7 @@
           </a:ln>
         </p:spPr>
         <p:txBody>
-          <a:bodyPr anchor="top" wrap="square">
+          <a:bodyPr wrap="square" anchor="t">
             <a:spAutoFit/>
           </a:bodyPr>
           <a:lstStyle/>
@@ -4750,7 +4830,6 @@
             <a:pPr algn="l"/>
             <a:r>
               <a:rPr lang="en-US" sz="2100" dirty="0">
-                <a:b/>
                 <a:solidFill>
                   <a:srgbClr val="111827"/>
                 </a:solidFill>
@@ -4781,7 +4860,7 @@
           </a:ln>
         </p:spPr>
         <p:txBody>
-          <a:bodyPr anchor="top" wrap="square">
+          <a:bodyPr wrap="square" anchor="t">
             <a:spAutoFit/>
           </a:bodyPr>
           <a:lstStyle/>
@@ -4823,12 +4902,13 @@
           </a:ln>
         </p:spPr>
         <p:txBody>
-          <a:bodyPr anchor="mid" wrap="square">
+          <a:bodyPr wrap="square" anchor="t">
             <a:spAutoFit/>
           </a:bodyPr>
           <a:lstStyle/>
           <a:p>
             <a:pPr algn="ctr"/>
+            <a:endParaRPr/>
           </a:p>
         </p:txBody>
       </p:sp>
@@ -4854,12 +4934,13 @@
           </a:ln>
         </p:spPr>
         <p:txBody>
-          <a:bodyPr anchor="mid" wrap="square">
+          <a:bodyPr wrap="square" anchor="t">
             <a:spAutoFit/>
           </a:bodyPr>
           <a:lstStyle/>
           <a:p>
             <a:pPr algn="ctr"/>
+            <a:endParaRPr/>
           </a:p>
         </p:txBody>
       </p:sp>
@@ -4883,7 +4964,7 @@
           </a:ln>
         </p:spPr>
         <p:txBody>
-          <a:bodyPr anchor="top" wrap="square">
+          <a:bodyPr wrap="square" anchor="t">
             <a:spAutoFit/>
           </a:bodyPr>
           <a:lstStyle/>
@@ -4891,7 +4972,6 @@
             <a:pPr algn="l"/>
             <a:r>
               <a:rPr lang="en-US" sz="2100" dirty="0">
-                <a:b/>
                 <a:solidFill>
                   <a:srgbClr val="111827"/>
                 </a:solidFill>
@@ -4922,7 +5002,7 @@
           </a:ln>
         </p:spPr>
         <p:txBody>
-          <a:bodyPr anchor="top" wrap="square">
+          <a:bodyPr wrap="square" anchor="t">
             <a:spAutoFit/>
           </a:bodyPr>
           <a:lstStyle/>
@@ -4964,12 +5044,13 @@
           </a:ln>
         </p:spPr>
         <p:txBody>
-          <a:bodyPr anchor="mid" wrap="square">
+          <a:bodyPr wrap="square" anchor="t">
             <a:spAutoFit/>
           </a:bodyPr>
           <a:lstStyle/>
           <a:p>
             <a:pPr algn="ctr"/>
+            <a:endParaRPr/>
           </a:p>
         </p:txBody>
       </p:sp>
@@ -4995,12 +5076,13 @@
           </a:ln>
         </p:spPr>
         <p:txBody>
-          <a:bodyPr anchor="mid" wrap="square">
+          <a:bodyPr wrap="square" anchor="t">
             <a:spAutoFit/>
           </a:bodyPr>
           <a:lstStyle/>
           <a:p>
             <a:pPr algn="ctr"/>
+            <a:endParaRPr/>
           </a:p>
         </p:txBody>
       </p:sp>
@@ -5024,7 +5106,7 @@
           </a:ln>
         </p:spPr>
         <p:txBody>
-          <a:bodyPr anchor="top" wrap="square">
+          <a:bodyPr wrap="square" anchor="t">
             <a:spAutoFit/>
           </a:bodyPr>
           <a:lstStyle/>
@@ -5032,7 +5114,6 @@
             <a:pPr algn="l"/>
             <a:r>
               <a:rPr lang="en-US" sz="2100" dirty="0">
-                <a:b/>
                 <a:solidFill>
                   <a:srgbClr val="111827"/>
                 </a:solidFill>
@@ -5063,7 +5144,7 @@
           </a:ln>
         </p:spPr>
         <p:txBody>
-          <a:bodyPr anchor="top" wrap="square">
+          <a:bodyPr wrap="square" anchor="t">
             <a:spAutoFit/>
           </a:bodyPr>
           <a:lstStyle/>
@@ -5105,12 +5186,13 @@
           </a:ln>
         </p:spPr>
         <p:txBody>
-          <a:bodyPr anchor="mid" wrap="square">
+          <a:bodyPr wrap="square" anchor="t">
             <a:spAutoFit/>
           </a:bodyPr>
           <a:lstStyle/>
           <a:p>
             <a:pPr algn="ctr"/>
+            <a:endParaRPr/>
           </a:p>
         </p:txBody>
       </p:sp>
@@ -5136,12 +5218,13 @@
           </a:ln>
         </p:spPr>
         <p:txBody>
-          <a:bodyPr anchor="mid" wrap="square">
+          <a:bodyPr wrap="square" anchor="t">
             <a:spAutoFit/>
           </a:bodyPr>
           <a:lstStyle/>
           <a:p>
             <a:pPr algn="ctr"/>
+            <a:endParaRPr/>
           </a:p>
         </p:txBody>
       </p:sp>
@@ -5165,7 +5248,7 @@
           </a:ln>
         </p:spPr>
         <p:txBody>
-          <a:bodyPr anchor="top" wrap="square">
+          <a:bodyPr wrap="square" anchor="t">
             <a:spAutoFit/>
           </a:bodyPr>
           <a:lstStyle/>
@@ -5173,7 +5256,6 @@
             <a:pPr algn="l"/>
             <a:r>
               <a:rPr lang="en-US" sz="2100" dirty="0">
-                <a:b/>
                 <a:solidFill>
                   <a:srgbClr val="111827"/>
                 </a:solidFill>
@@ -5204,7 +5286,7 @@
           </a:ln>
         </p:spPr>
         <p:txBody>
-          <a:bodyPr anchor="top" wrap="square">
+          <a:bodyPr wrap="square" anchor="t">
             <a:spAutoFit/>
           </a:bodyPr>
           <a:lstStyle/>
@@ -5246,12 +5328,13 @@
           </a:ln>
         </p:spPr>
         <p:txBody>
-          <a:bodyPr anchor="mid" wrap="square">
+          <a:bodyPr wrap="square" anchor="t">
             <a:spAutoFit/>
           </a:bodyPr>
           <a:lstStyle/>
           <a:p>
             <a:pPr algn="ctr"/>
+            <a:endParaRPr/>
           </a:p>
         </p:txBody>
       </p:sp>
@@ -5277,12 +5360,13 @@
           </a:ln>
         </p:spPr>
         <p:txBody>
-          <a:bodyPr anchor="mid" wrap="square">
+          <a:bodyPr wrap="square" anchor="t">
             <a:spAutoFit/>
           </a:bodyPr>
           <a:lstStyle/>
           <a:p>
             <a:pPr algn="ctr"/>
+            <a:endParaRPr/>
           </a:p>
         </p:txBody>
       </p:sp>
@@ -5306,7 +5390,7 @@
           </a:ln>
         </p:spPr>
         <p:txBody>
-          <a:bodyPr anchor="top" wrap="square">
+          <a:bodyPr wrap="square" anchor="t">
             <a:spAutoFit/>
           </a:bodyPr>
           <a:lstStyle/>
@@ -5314,7 +5398,6 @@
             <a:pPr algn="l"/>
             <a:r>
               <a:rPr lang="en-US" sz="2100" dirty="0">
-                <a:b/>
                 <a:solidFill>
                   <a:srgbClr val="111827"/>
                 </a:solidFill>
@@ -5345,7 +5428,7 @@
           </a:ln>
         </p:spPr>
         <p:txBody>
-          <a:bodyPr anchor="top" wrap="square">
+          <a:bodyPr wrap="square" anchor="t">
             <a:spAutoFit/>
           </a:bodyPr>
           <a:lstStyle/>
@@ -5383,7 +5466,7 @@
           </a:ln>
         </p:spPr>
         <p:txBody>
-          <a:bodyPr anchor="top" wrap="square">
+          <a:bodyPr wrap="square" anchor="t">
             <a:spAutoFit/>
           </a:bodyPr>
           <a:lstStyle/>
@@ -5446,7 +5529,7 @@
           </a:ln>
         </p:spPr>
         <p:txBody>
-          <a:bodyPr anchor="top" wrap="square">
+          <a:bodyPr wrap="square" anchor="t">
             <a:spAutoFit/>
           </a:bodyPr>
           <a:lstStyle/>
@@ -5454,7 +5537,6 @@
             <a:pPr algn="l"/>
             <a:r>
               <a:rPr lang="en-US" sz="3000" dirty="0">
-                <a:b/>
                 <a:solidFill>
                   <a:srgbClr val="111827"/>
                 </a:solidFill>
@@ -5485,7 +5567,7 @@
           </a:ln>
         </p:spPr>
         <p:txBody>
-          <a:bodyPr anchor="top" wrap="square">
+          <a:bodyPr wrap="square" anchor="t">
             <a:spAutoFit/>
           </a:bodyPr>
           <a:lstStyle/>
@@ -5524,6 +5606,13 @@
             <a:noFill/>
           </a:ln>
         </p:spPr>
+        <p:txBody>
+          <a:bodyPr/>
+          <a:lstStyle/>
+          <a:p>
+            <a:endParaRPr lang="en-US"/>
+          </a:p>
+        </p:txBody>
       </p:sp>
       <p:sp>
         <p:nvSpPr>
@@ -5533,8 +5622,8 @@
         </p:nvSpPr>
         <p:spPr>
           <a:xfrm>
-            <a:off x="594360" y="1600200"/>
-            <a:ext cx="2057400" cy="868680"/>
+            <a:off x="9188933" y="1803482"/>
+            <a:ext cx="2057400" cy="677108"/>
           </a:xfrm>
           <a:prstGeom prst="chevron">
             <a:avLst/>
@@ -5549,7 +5638,7 @@
           </a:ln>
         </p:spPr>
         <p:txBody>
-          <a:bodyPr anchor="mid" wrap="square">
+          <a:bodyPr wrap="square" anchor="t">
             <a:spAutoFit/>
           </a:bodyPr>
           <a:lstStyle/>
@@ -5557,7 +5646,6 @@
             <a:pPr algn="ctr"/>
             <a:r>
               <a:rPr lang="en-US" sz="1900" dirty="0">
-                <a:b/>
                 <a:solidFill>
                   <a:srgbClr val="FFFFFF"/>
                 </a:solidFill>
@@ -5576,8 +5664,8 @@
         </p:nvSpPr>
         <p:spPr>
           <a:xfrm>
-            <a:off x="2807208" y="1600200"/>
-            <a:ext cx="2057400" cy="868680"/>
+            <a:off x="432031" y="1803482"/>
+            <a:ext cx="2057400" cy="677108"/>
           </a:xfrm>
           <a:prstGeom prst="chevron">
             <a:avLst/>
@@ -5592,7 +5680,7 @@
           </a:ln>
         </p:spPr>
         <p:txBody>
-          <a:bodyPr anchor="mid" wrap="square">
+          <a:bodyPr wrap="square" anchor="t">
             <a:spAutoFit/>
           </a:bodyPr>
           <a:lstStyle/>
@@ -5600,7 +5688,6 @@
             <a:pPr algn="ctr"/>
             <a:r>
               <a:rPr lang="en-US" sz="1900" dirty="0">
-                <a:b/>
                 <a:solidFill>
                   <a:srgbClr val="FFFFFF"/>
                 </a:solidFill>
@@ -5619,8 +5706,8 @@
         </p:nvSpPr>
         <p:spPr>
           <a:xfrm>
-            <a:off x="5020056" y="1600200"/>
-            <a:ext cx="2057400" cy="868680"/>
+            <a:off x="2621256" y="1803482"/>
+            <a:ext cx="2057400" cy="677108"/>
           </a:xfrm>
           <a:prstGeom prst="chevron">
             <a:avLst/>
@@ -5635,7 +5722,7 @@
           </a:ln>
         </p:spPr>
         <p:txBody>
-          <a:bodyPr anchor="mid" wrap="square">
+          <a:bodyPr wrap="square" anchor="t">
             <a:spAutoFit/>
           </a:bodyPr>
           <a:lstStyle/>
@@ -5643,13 +5730,29 @@
             <a:pPr algn="ctr"/>
             <a:r>
               <a:rPr lang="en-US" sz="1900" dirty="0">
-                <a:b/>
                 <a:solidFill>
                   <a:srgbClr val="FFFFFF"/>
                 </a:solidFill>
                 <a:latin typeface="Aptos"/>
               </a:rPr>
-              <a:t>Task Prompt</a:t>
+              <a:t>Task</a:t>
+            </a:r>
+            <a:br>
+              <a:rPr lang="en-US" sz="1900" dirty="0">
+                <a:solidFill>
+                  <a:srgbClr val="FFFFFF"/>
+                </a:solidFill>
+                <a:latin typeface="Aptos"/>
+              </a:rPr>
+            </a:br>
+            <a:r>
+              <a:rPr lang="en-US" sz="1900" dirty="0">
+                <a:solidFill>
+                  <a:srgbClr val="FFFFFF"/>
+                </a:solidFill>
+                <a:latin typeface="Aptos"/>
+              </a:rPr>
+              <a:t>Prompts</a:t>
             </a:r>
           </a:p>
         </p:txBody>
@@ -5662,8 +5765,8 @@
         </p:nvSpPr>
         <p:spPr>
           <a:xfrm>
-            <a:off x="7232904" y="1600200"/>
-            <a:ext cx="2057400" cy="868680"/>
+            <a:off x="4810481" y="1787426"/>
+            <a:ext cx="2057400" cy="677108"/>
           </a:xfrm>
           <a:prstGeom prst="chevron">
             <a:avLst/>
@@ -5678,7 +5781,7 @@
           </a:ln>
         </p:spPr>
         <p:txBody>
-          <a:bodyPr anchor="mid" wrap="square">
+          <a:bodyPr wrap="square" anchor="t">
             <a:spAutoFit/>
           </a:bodyPr>
           <a:lstStyle/>
@@ -5686,7 +5789,6 @@
             <a:pPr algn="ctr"/>
             <a:r>
               <a:rPr lang="en-US" sz="1900" dirty="0">
-                <a:b/>
                 <a:solidFill>
                   <a:srgbClr val="FFFFFF"/>
                 </a:solidFill>
@@ -5705,8 +5807,8 @@
         </p:nvSpPr>
         <p:spPr>
           <a:xfrm>
-            <a:off x="9445752" y="1600200"/>
-            <a:ext cx="2057400" cy="868680"/>
+            <a:off x="6999706" y="1787426"/>
+            <a:ext cx="2057400" cy="677108"/>
           </a:xfrm>
           <a:prstGeom prst="chevron">
             <a:avLst/>
@@ -5721,7 +5823,7 @@
           </a:ln>
         </p:spPr>
         <p:txBody>
-          <a:bodyPr anchor="mid" wrap="square">
+          <a:bodyPr wrap="square" anchor="t">
             <a:spAutoFit/>
           </a:bodyPr>
           <a:lstStyle/>
@@ -5729,7 +5831,6 @@
             <a:pPr algn="ctr"/>
             <a:r>
               <a:rPr lang="en-US" sz="1900" dirty="0">
-                <a:b/>
                 <a:solidFill>
                   <a:srgbClr val="FFFFFF"/>
                 </a:solidFill>
@@ -5764,12 +5865,13 @@
           </a:ln>
         </p:spPr>
         <p:txBody>
-          <a:bodyPr anchor="mid" wrap="square">
+          <a:bodyPr wrap="square" anchor="t">
             <a:spAutoFit/>
           </a:bodyPr>
           <a:lstStyle/>
           <a:p>
             <a:pPr algn="ctr"/>
+            <a:endParaRPr/>
           </a:p>
         </p:txBody>
       </p:sp>
@@ -5795,12 +5897,13 @@
           </a:ln>
         </p:spPr>
         <p:txBody>
-          <a:bodyPr anchor="mid" wrap="square">
+          <a:bodyPr wrap="square" anchor="t">
             <a:spAutoFit/>
           </a:bodyPr>
           <a:lstStyle/>
           <a:p>
             <a:pPr algn="ctr"/>
+            <a:endParaRPr/>
           </a:p>
         </p:txBody>
       </p:sp>
@@ -5824,7 +5927,7 @@
           </a:ln>
         </p:spPr>
         <p:txBody>
-          <a:bodyPr anchor="top" wrap="square">
+          <a:bodyPr wrap="square" anchor="t">
             <a:spAutoFit/>
           </a:bodyPr>
           <a:lstStyle/>
@@ -5832,7 +5935,6 @@
             <a:pPr algn="l"/>
             <a:r>
               <a:rPr lang="en-US" sz="2000" dirty="0">
-                <a:b/>
                 <a:solidFill>
                   <a:srgbClr val="111827"/>
                 </a:solidFill>
@@ -5863,7 +5965,7 @@
           </a:ln>
         </p:spPr>
         <p:txBody>
-          <a:bodyPr anchor="top" wrap="square">
+          <a:bodyPr wrap="square" anchor="t">
             <a:spAutoFit/>
           </a:bodyPr>
           <a:lstStyle/>
@@ -5925,7 +6027,7 @@
           </a:ln>
         </p:spPr>
         <p:txBody>
-          <a:bodyPr anchor="top" wrap="square">
+          <a:bodyPr wrap="square" anchor="t">
             <a:spAutoFit/>
           </a:bodyPr>
           <a:lstStyle/>
@@ -5988,7 +6090,7 @@
           </a:ln>
         </p:spPr>
         <p:txBody>
-          <a:bodyPr anchor="top" wrap="square">
+          <a:bodyPr wrap="square" anchor="t">
             <a:spAutoFit/>
           </a:bodyPr>
           <a:lstStyle/>
@@ -5996,7 +6098,6 @@
             <a:pPr algn="l"/>
             <a:r>
               <a:rPr lang="en-US" sz="3000" dirty="0">
-                <a:b/>
                 <a:solidFill>
                   <a:srgbClr val="111827"/>
                 </a:solidFill>
@@ -6027,7 +6128,7 @@
           </a:ln>
         </p:spPr>
         <p:txBody>
-          <a:bodyPr anchor="top" wrap="square">
+          <a:bodyPr wrap="square" anchor="t">
             <a:spAutoFit/>
           </a:bodyPr>
           <a:lstStyle/>
@@ -6066,6 +6167,13 @@
             <a:noFill/>
           </a:ln>
         </p:spPr>
+        <p:txBody>
+          <a:bodyPr/>
+          <a:lstStyle/>
+          <a:p>
+            <a:endParaRPr lang="en-US"/>
+          </a:p>
+        </p:txBody>
       </p:sp>
       <p:sp>
         <p:nvSpPr>
@@ -6091,7 +6199,7 @@
           </a:ln>
         </p:spPr>
         <p:txBody>
-          <a:bodyPr anchor="mid" wrap="square">
+          <a:bodyPr wrap="square" anchor="t">
             <a:spAutoFit/>
           </a:bodyPr>
           <a:lstStyle/>
@@ -6099,7 +6207,6 @@
             <a:pPr algn="ctr"/>
             <a:r>
               <a:rPr lang="en-US" sz="2000" dirty="0">
-                <a:b/>
                 <a:solidFill>
                   <a:srgbClr val="111827"/>
                 </a:solidFill>
@@ -6134,7 +6241,7 @@
           </a:ln>
         </p:spPr>
         <p:txBody>
-          <a:bodyPr anchor="mid" wrap="square">
+          <a:bodyPr wrap="square" anchor="t">
             <a:spAutoFit/>
           </a:bodyPr>
           <a:lstStyle/>
@@ -6142,7 +6249,6 @@
             <a:pPr algn="ctr"/>
             <a:r>
               <a:rPr lang="en-US" sz="2000" dirty="0">
-                <a:b/>
                 <a:solidFill>
                   <a:srgbClr val="78350F"/>
                 </a:solidFill>
@@ -6177,7 +6283,7 @@
           </a:ln>
         </p:spPr>
         <p:txBody>
-          <a:bodyPr anchor="mid" wrap="square">
+          <a:bodyPr wrap="square" anchor="t">
             <a:spAutoFit/>
           </a:bodyPr>
           <a:lstStyle/>
@@ -6185,7 +6291,6 @@
             <a:pPr algn="ctr"/>
             <a:r>
               <a:rPr lang="en-US" sz="2000" dirty="0">
-                <a:b/>
                 <a:solidFill>
                   <a:srgbClr val="14532D"/>
                 </a:solidFill>
@@ -6264,7 +6369,7 @@
           </a:ln>
         </p:spPr>
         <p:txBody>
-          <a:bodyPr anchor="mid" wrap="square">
+          <a:bodyPr wrap="square" anchor="t">
             <a:spAutoFit/>
           </a:bodyPr>
           <a:lstStyle/>
@@ -6272,7 +6377,6 @@
             <a:pPr algn="ctr"/>
             <a:r>
               <a:rPr lang="en-US" sz="1700" dirty="0">
-                <a:b/>
                 <a:solidFill>
                   <a:srgbClr val="334155"/>
                 </a:solidFill>
@@ -6307,7 +6411,7 @@
           </a:ln>
         </p:spPr>
         <p:txBody>
-          <a:bodyPr anchor="mid" wrap="square">
+          <a:bodyPr wrap="square" anchor="t">
             <a:spAutoFit/>
           </a:bodyPr>
           <a:lstStyle/>
@@ -6315,7 +6419,6 @@
             <a:pPr algn="ctr"/>
             <a:r>
               <a:rPr lang="en-US" sz="1700" dirty="0">
-                <a:b/>
                 <a:solidFill>
                   <a:srgbClr val="334155"/>
                 </a:solidFill>
@@ -6350,7 +6453,7 @@
           </a:ln>
         </p:spPr>
         <p:txBody>
-          <a:bodyPr anchor="mid" wrap="square">
+          <a:bodyPr wrap="square" anchor="t">
             <a:spAutoFit/>
           </a:bodyPr>
           <a:lstStyle/>
@@ -6358,7 +6461,6 @@
             <a:pPr algn="ctr"/>
             <a:r>
               <a:rPr lang="en-US" sz="1700" dirty="0">
-                <a:b/>
                 <a:solidFill>
                   <a:srgbClr val="334155"/>
                 </a:solidFill>
@@ -6393,7 +6495,7 @@
           </a:ln>
         </p:spPr>
         <p:txBody>
-          <a:bodyPr anchor="mid" wrap="square">
+          <a:bodyPr wrap="square" anchor="t">
             <a:spAutoFit/>
           </a:bodyPr>
           <a:lstStyle/>
@@ -6401,7 +6503,6 @@
             <a:pPr algn="ctr"/>
             <a:r>
               <a:rPr lang="en-US" sz="1700" dirty="0">
-                <a:b/>
                 <a:solidFill>
                   <a:srgbClr val="334155"/>
                 </a:solidFill>
@@ -6436,7 +6537,7 @@
           </a:ln>
         </p:spPr>
         <p:txBody>
-          <a:bodyPr anchor="mid" wrap="square">
+          <a:bodyPr wrap="square" anchor="t">
             <a:spAutoFit/>
           </a:bodyPr>
           <a:lstStyle/>
@@ -6444,7 +6545,6 @@
             <a:pPr algn="ctr"/>
             <a:r>
               <a:rPr lang="en-US" sz="1700" dirty="0">
-                <a:b/>
                 <a:solidFill>
                   <a:srgbClr val="334155"/>
                 </a:solidFill>
@@ -6475,7 +6575,7 @@
           </a:ln>
         </p:spPr>
         <p:txBody>
-          <a:bodyPr anchor="top" wrap="square">
+          <a:bodyPr wrap="square" anchor="t">
             <a:spAutoFit/>
           </a:bodyPr>
           <a:lstStyle/>
@@ -6513,7 +6613,7 @@
           </a:ln>
         </p:spPr>
         <p:txBody>
-          <a:bodyPr anchor="top" wrap="square">
+          <a:bodyPr wrap="square" anchor="t">
             <a:spAutoFit/>
           </a:bodyPr>
           <a:lstStyle/>
@@ -6576,7 +6676,7 @@
           </a:ln>
         </p:spPr>
         <p:txBody>
-          <a:bodyPr anchor="top" wrap="square">
+          <a:bodyPr wrap="square" anchor="t">
             <a:spAutoFit/>
           </a:bodyPr>
           <a:lstStyle/>
@@ -6584,7 +6684,6 @@
             <a:pPr algn="l"/>
             <a:r>
               <a:rPr lang="en-US" sz="3000" dirty="0">
-                <a:b/>
                 <a:solidFill>
                   <a:srgbClr val="111827"/>
                 </a:solidFill>
@@ -6615,7 +6714,7 @@
           </a:ln>
         </p:spPr>
         <p:txBody>
-          <a:bodyPr anchor="top" wrap="square">
+          <a:bodyPr wrap="square" anchor="t">
             <a:spAutoFit/>
           </a:bodyPr>
           <a:lstStyle/>
@@ -6654,17 +6753,701 @@
             <a:noFill/>
           </a:ln>
         </p:spPr>
-      </p:sp>
-      <p:sp>
-        <p:nvSpPr>
-          <p:cNvPr id="5" name="Shape 5"/>
+        <p:txBody>
+          <a:bodyPr/>
+          <a:lstStyle/>
+          <a:p>
+            <a:endParaRPr lang="en-US"/>
+          </a:p>
+        </p:txBody>
+      </p:sp>
+      <p:grpSp>
+        <p:nvGrpSpPr>
+          <p:cNvPr id="51" name="Group 50">
+            <a:extLst>
+              <a:ext uri="{FF2B5EF4-FFF2-40B4-BE49-F238E27FC236}">
+                <a16:creationId xmlns:a16="http://schemas.microsoft.com/office/drawing/2014/main" id="{099B4059-F6F6-3248-3865-0D976EAA1FF7}"/>
+              </a:ext>
+            </a:extLst>
+          </p:cNvPr>
+          <p:cNvGrpSpPr/>
+          <p:nvPr/>
+        </p:nvGrpSpPr>
+        <p:grpSpPr>
+          <a:xfrm>
+            <a:off x="2679192" y="1328289"/>
+            <a:ext cx="2011680" cy="1463040"/>
+            <a:chOff x="2679192" y="1328289"/>
+            <a:chExt cx="2011680" cy="1463040"/>
+          </a:xfrm>
+        </p:grpSpPr>
+        <p:sp>
+          <p:nvSpPr>
+            <p:cNvPr id="5" name="Shape 5"/>
+            <p:cNvSpPr/>
+            <p:nvPr/>
+          </p:nvSpPr>
+          <p:spPr>
+            <a:xfrm>
+              <a:off x="2679192" y="1328289"/>
+              <a:ext cx="2011680" cy="1463040"/>
+            </a:xfrm>
+            <a:prstGeom prst="roundRect">
+              <a:avLst/>
+            </a:prstGeom>
+            <a:solidFill>
+              <a:srgbClr val="FFFFFF"/>
+            </a:solidFill>
+            <a:ln w="18000">
+              <a:solidFill>
+                <a:srgbClr val="CBD5E1"/>
+              </a:solidFill>
+            </a:ln>
+          </p:spPr>
+          <p:txBody>
+            <a:bodyPr wrap="square" anchor="t">
+              <a:spAutoFit/>
+            </a:bodyPr>
+            <a:lstStyle/>
+            <a:p>
+              <a:pPr algn="ctr"/>
+              <a:endParaRPr/>
+            </a:p>
+          </p:txBody>
+        </p:sp>
+        <p:sp>
+          <p:nvSpPr>
+            <p:cNvPr id="6" name="TextBox 6"/>
+            <p:cNvSpPr txBox="1"/>
+            <p:nvPr/>
+          </p:nvSpPr>
+          <p:spPr>
+            <a:xfrm>
+              <a:off x="2843784" y="1355721"/>
+              <a:ext cx="1691640" cy="274320"/>
+            </a:xfrm>
+            <a:prstGeom prst="rect">
+              <a:avLst/>
+            </a:prstGeom>
+            <a:noFill/>
+            <a:ln>
+              <a:noFill/>
+            </a:ln>
+          </p:spPr>
+          <p:txBody>
+            <a:bodyPr wrap="square" anchor="t">
+              <a:spAutoFit/>
+            </a:bodyPr>
+            <a:lstStyle/>
+            <a:p>
+              <a:pPr algn="ctr"/>
+              <a:r>
+                <a:rPr lang="en-US" sz="2000" dirty="0">
+                  <a:solidFill>
+                    <a:srgbClr val="2563EB"/>
+                  </a:solidFill>
+                  <a:latin typeface="Aptos"/>
+                </a:rPr>
+                <a:t>Baseline</a:t>
+              </a:r>
+            </a:p>
+          </p:txBody>
+        </p:sp>
+        <p:sp>
+          <p:nvSpPr>
+            <p:cNvPr id="7" name="TextBox 7"/>
+            <p:cNvSpPr txBox="1"/>
+            <p:nvPr/>
+          </p:nvSpPr>
+          <p:spPr>
+            <a:xfrm>
+              <a:off x="2843784" y="1630041"/>
+              <a:ext cx="1691640" cy="530352"/>
+            </a:xfrm>
+            <a:prstGeom prst="rect">
+              <a:avLst/>
+            </a:prstGeom>
+            <a:noFill/>
+            <a:ln>
+              <a:noFill/>
+            </a:ln>
+          </p:spPr>
+          <p:txBody>
+            <a:bodyPr wrap="square" anchor="t">
+              <a:spAutoFit/>
+            </a:bodyPr>
+            <a:lstStyle/>
+            <a:p>
+              <a:pPr algn="ctr"/>
+              <a:r>
+                <a:rPr lang="en-US" sz="1600" dirty="0">
+                  <a:solidFill>
+                    <a:srgbClr val="475569"/>
+                  </a:solidFill>
+                  <a:latin typeface="Aptos"/>
+                </a:rPr>
+                <a:t>Run reference model and prompt version</a:t>
+              </a:r>
+            </a:p>
+          </p:txBody>
+        </p:sp>
+      </p:grpSp>
+      <p:cxnSp>
+        <p:nvCxnSpPr>
+          <p:cNvPr id="8" name="Arrow 8"/>
+          <p:cNvCxnSpPr/>
+          <p:nvPr/>
+        </p:nvCxnSpPr>
+        <p:spPr>
+          <a:xfrm>
+            <a:off x="4709160" y="2059809"/>
+            <a:ext cx="274319" cy="0"/>
+          </a:xfrm>
+          <a:prstGeom prst="line">
+            <a:avLst/>
+          </a:prstGeom>
+          <a:ln w="22000">
+            <a:solidFill>
+              <a:srgbClr val="64748B"/>
+            </a:solidFill>
+            <a:headEnd type="triangle"/>
+          </a:ln>
+        </p:spPr>
+      </p:cxnSp>
+      <p:grpSp>
+        <p:nvGrpSpPr>
+          <p:cNvPr id="52" name="Group 51">
+            <a:extLst>
+              <a:ext uri="{FF2B5EF4-FFF2-40B4-BE49-F238E27FC236}">
+                <a16:creationId xmlns:a16="http://schemas.microsoft.com/office/drawing/2014/main" id="{F931EBD8-E912-5A75-6BBA-23320451A3A1}"/>
+              </a:ext>
+            </a:extLst>
+          </p:cNvPr>
+          <p:cNvGrpSpPr/>
+          <p:nvPr/>
+        </p:nvGrpSpPr>
+        <p:grpSpPr>
+          <a:xfrm>
+            <a:off x="5010911" y="1328289"/>
+            <a:ext cx="2011680" cy="1463040"/>
+            <a:chOff x="5010911" y="1328289"/>
+            <a:chExt cx="2011680" cy="1463040"/>
+          </a:xfrm>
+        </p:grpSpPr>
+        <p:sp>
+          <p:nvSpPr>
+            <p:cNvPr id="9" name="Shape 9"/>
+            <p:cNvSpPr/>
+            <p:nvPr/>
+          </p:nvSpPr>
+          <p:spPr>
+            <a:xfrm>
+              <a:off x="5010911" y="1328289"/>
+              <a:ext cx="2011680" cy="1463040"/>
+            </a:xfrm>
+            <a:prstGeom prst="roundRect">
+              <a:avLst/>
+            </a:prstGeom>
+            <a:solidFill>
+              <a:srgbClr val="FFFFFF"/>
+            </a:solidFill>
+            <a:ln w="18000">
+              <a:solidFill>
+                <a:srgbClr val="CBD5E1"/>
+              </a:solidFill>
+            </a:ln>
+          </p:spPr>
+          <p:txBody>
+            <a:bodyPr wrap="square" anchor="t">
+              <a:spAutoFit/>
+            </a:bodyPr>
+            <a:lstStyle/>
+            <a:p>
+              <a:pPr algn="ctr"/>
+              <a:endParaRPr/>
+            </a:p>
+          </p:txBody>
+        </p:sp>
+        <p:sp>
+          <p:nvSpPr>
+            <p:cNvPr id="10" name="TextBox 10"/>
+            <p:cNvSpPr txBox="1"/>
+            <p:nvPr/>
+          </p:nvSpPr>
+          <p:spPr>
+            <a:xfrm>
+              <a:off x="5175504" y="1355721"/>
+              <a:ext cx="1691640" cy="274320"/>
+            </a:xfrm>
+            <a:prstGeom prst="rect">
+              <a:avLst/>
+            </a:prstGeom>
+            <a:noFill/>
+            <a:ln>
+              <a:noFill/>
+            </a:ln>
+          </p:spPr>
+          <p:txBody>
+            <a:bodyPr wrap="square" anchor="t">
+              <a:spAutoFit/>
+            </a:bodyPr>
+            <a:lstStyle/>
+            <a:p>
+              <a:pPr algn="ctr"/>
+              <a:r>
+                <a:rPr lang="en-US" sz="2000" dirty="0">
+                  <a:solidFill>
+                    <a:srgbClr val="0F766E"/>
+                  </a:solidFill>
+                  <a:latin typeface="Aptos"/>
+                </a:rPr>
+                <a:t>Candidate</a:t>
+              </a:r>
+            </a:p>
+          </p:txBody>
+        </p:sp>
+        <p:sp>
+          <p:nvSpPr>
+            <p:cNvPr id="11" name="TextBox 11"/>
+            <p:cNvSpPr txBox="1"/>
+            <p:nvPr/>
+          </p:nvSpPr>
+          <p:spPr>
+            <a:xfrm>
+              <a:off x="5175504" y="1630041"/>
+              <a:ext cx="1691640" cy="530352"/>
+            </a:xfrm>
+            <a:prstGeom prst="rect">
+              <a:avLst/>
+            </a:prstGeom>
+            <a:noFill/>
+            <a:ln>
+              <a:noFill/>
+            </a:ln>
+          </p:spPr>
+          <p:txBody>
+            <a:bodyPr wrap="square" anchor="t">
+              <a:spAutoFit/>
+            </a:bodyPr>
+            <a:lstStyle/>
+            <a:p>
+              <a:pPr algn="ctr"/>
+              <a:r>
+                <a:rPr lang="en-US" sz="1600" dirty="0">
+                  <a:solidFill>
+                    <a:srgbClr val="475569"/>
+                  </a:solidFill>
+                  <a:latin typeface="Aptos"/>
+                </a:rPr>
+                <a:t>Run model, prompt, parameter, or mixed variant</a:t>
+              </a:r>
+            </a:p>
+          </p:txBody>
+        </p:sp>
+      </p:grpSp>
+      <p:grpSp>
+        <p:nvGrpSpPr>
+          <p:cNvPr id="50" name="Group 49">
+            <a:extLst>
+              <a:ext uri="{FF2B5EF4-FFF2-40B4-BE49-F238E27FC236}">
+                <a16:creationId xmlns:a16="http://schemas.microsoft.com/office/drawing/2014/main" id="{7A198CB9-0B8F-3132-31C4-7EF47DECD335}"/>
+              </a:ext>
+            </a:extLst>
+          </p:cNvPr>
+          <p:cNvGrpSpPr/>
+          <p:nvPr/>
+        </p:nvGrpSpPr>
+        <p:grpSpPr>
+          <a:xfrm>
+            <a:off x="2679192" y="3067812"/>
+            <a:ext cx="2011680" cy="1463040"/>
+            <a:chOff x="2679192" y="3067812"/>
+            <a:chExt cx="2011680" cy="1463040"/>
+          </a:xfrm>
+        </p:grpSpPr>
+        <p:sp>
+          <p:nvSpPr>
+            <p:cNvPr id="13" name="Shape 13"/>
+            <p:cNvSpPr/>
+            <p:nvPr/>
+          </p:nvSpPr>
+          <p:spPr>
+            <a:xfrm>
+              <a:off x="2679192" y="3067812"/>
+              <a:ext cx="2011680" cy="1463040"/>
+            </a:xfrm>
+            <a:prstGeom prst="roundRect">
+              <a:avLst/>
+            </a:prstGeom>
+            <a:solidFill>
+              <a:srgbClr val="FFFFFF"/>
+            </a:solidFill>
+            <a:ln w="18000">
+              <a:solidFill>
+                <a:srgbClr val="CBD5E1"/>
+              </a:solidFill>
+            </a:ln>
+          </p:spPr>
+          <p:txBody>
+            <a:bodyPr wrap="square" anchor="t">
+              <a:spAutoFit/>
+            </a:bodyPr>
+            <a:lstStyle/>
+            <a:p>
+              <a:pPr algn="ctr"/>
+              <a:endParaRPr/>
+            </a:p>
+          </p:txBody>
+        </p:sp>
+        <p:sp>
+          <p:nvSpPr>
+            <p:cNvPr id="14" name="TextBox 14"/>
+            <p:cNvSpPr txBox="1"/>
+            <p:nvPr/>
+          </p:nvSpPr>
+          <p:spPr>
+            <a:xfrm>
+              <a:off x="2843784" y="3095244"/>
+              <a:ext cx="1691640" cy="274320"/>
+            </a:xfrm>
+            <a:prstGeom prst="rect">
+              <a:avLst/>
+            </a:prstGeom>
+            <a:noFill/>
+            <a:ln>
+              <a:noFill/>
+            </a:ln>
+          </p:spPr>
+          <p:txBody>
+            <a:bodyPr wrap="square" anchor="t">
+              <a:spAutoFit/>
+            </a:bodyPr>
+            <a:lstStyle/>
+            <a:p>
+              <a:pPr algn="ctr"/>
+              <a:r>
+                <a:rPr lang="en-US" sz="2000" dirty="0">
+                  <a:solidFill>
+                    <a:srgbClr val="16A34A"/>
+                  </a:solidFill>
+                  <a:latin typeface="Aptos"/>
+                </a:rPr>
+                <a:t>Trace</a:t>
+              </a:r>
+            </a:p>
+          </p:txBody>
+        </p:sp>
+        <p:sp>
+          <p:nvSpPr>
+            <p:cNvPr id="15" name="TextBox 15"/>
+            <p:cNvSpPr txBox="1"/>
+            <p:nvPr/>
+          </p:nvSpPr>
+          <p:spPr>
+            <a:xfrm>
+              <a:off x="2843784" y="3369564"/>
+              <a:ext cx="1691640" cy="530352"/>
+            </a:xfrm>
+            <a:prstGeom prst="rect">
+              <a:avLst/>
+            </a:prstGeom>
+            <a:noFill/>
+            <a:ln>
+              <a:noFill/>
+            </a:ln>
+          </p:spPr>
+          <p:txBody>
+            <a:bodyPr wrap="square" anchor="t">
+              <a:spAutoFit/>
+            </a:bodyPr>
+            <a:lstStyle/>
+            <a:p>
+              <a:pPr algn="ctr"/>
+              <a:r>
+                <a:rPr lang="en-US" sz="1600" dirty="0">
+                  <a:solidFill>
+                    <a:srgbClr val="475569"/>
+                  </a:solidFill>
+                  <a:latin typeface="Aptos"/>
+                </a:rPr>
+                <a:t>Capture item input, output, metadata, and observation</a:t>
+              </a:r>
+            </a:p>
+          </p:txBody>
+        </p:sp>
+      </p:grpSp>
+      <p:grpSp>
+        <p:nvGrpSpPr>
+          <p:cNvPr id="48" name="Group 47">
+            <a:extLst>
+              <a:ext uri="{FF2B5EF4-FFF2-40B4-BE49-F238E27FC236}">
+                <a16:creationId xmlns:a16="http://schemas.microsoft.com/office/drawing/2014/main" id="{E962B924-794C-CF92-F62F-511FD9DE5360}"/>
+              </a:ext>
+            </a:extLst>
+          </p:cNvPr>
+          <p:cNvGrpSpPr/>
+          <p:nvPr/>
+        </p:nvGrpSpPr>
+        <p:grpSpPr>
+          <a:xfrm>
+            <a:off x="5010912" y="3035808"/>
+            <a:ext cx="2011680" cy="1463040"/>
+            <a:chOff x="5010912" y="3067812"/>
+            <a:chExt cx="2011680" cy="1463040"/>
+          </a:xfrm>
+        </p:grpSpPr>
+        <p:sp>
+          <p:nvSpPr>
+            <p:cNvPr id="17" name="Shape 17"/>
+            <p:cNvSpPr/>
+            <p:nvPr/>
+          </p:nvSpPr>
+          <p:spPr>
+            <a:xfrm>
+              <a:off x="5010912" y="3067812"/>
+              <a:ext cx="2011680" cy="1463040"/>
+            </a:xfrm>
+            <a:prstGeom prst="roundRect">
+              <a:avLst/>
+            </a:prstGeom>
+            <a:solidFill>
+              <a:srgbClr val="FFFFFF"/>
+            </a:solidFill>
+            <a:ln w="18000">
+              <a:solidFill>
+                <a:srgbClr val="CBD5E1"/>
+              </a:solidFill>
+            </a:ln>
+          </p:spPr>
+          <p:txBody>
+            <a:bodyPr wrap="square" anchor="t">
+              <a:spAutoFit/>
+            </a:bodyPr>
+            <a:lstStyle/>
+            <a:p>
+              <a:pPr algn="ctr"/>
+              <a:endParaRPr/>
+            </a:p>
+          </p:txBody>
+        </p:sp>
+        <p:sp>
+          <p:nvSpPr>
+            <p:cNvPr id="18" name="TextBox 18"/>
+            <p:cNvSpPr txBox="1"/>
+            <p:nvPr/>
+          </p:nvSpPr>
+          <p:spPr>
+            <a:xfrm>
+              <a:off x="5175504" y="3095244"/>
+              <a:ext cx="1691640" cy="274320"/>
+            </a:xfrm>
+            <a:prstGeom prst="rect">
+              <a:avLst/>
+            </a:prstGeom>
+            <a:noFill/>
+            <a:ln>
+              <a:noFill/>
+            </a:ln>
+          </p:spPr>
+          <p:txBody>
+            <a:bodyPr wrap="square" anchor="t">
+              <a:spAutoFit/>
+            </a:bodyPr>
+            <a:lstStyle/>
+            <a:p>
+              <a:pPr algn="ctr"/>
+              <a:r>
+                <a:rPr lang="en-US" sz="2000" dirty="0">
+                  <a:solidFill>
+                    <a:srgbClr val="7C3AED"/>
+                  </a:solidFill>
+                  <a:latin typeface="Aptos"/>
+                </a:rPr>
+                <a:t>Evaluate</a:t>
+              </a:r>
+            </a:p>
+          </p:txBody>
+        </p:sp>
+        <p:sp>
+          <p:nvSpPr>
+            <p:cNvPr id="19" name="TextBox 19"/>
+            <p:cNvSpPr txBox="1"/>
+            <p:nvPr/>
+          </p:nvSpPr>
+          <p:spPr>
+            <a:xfrm>
+              <a:off x="5175504" y="3369564"/>
+              <a:ext cx="1691640" cy="530352"/>
+            </a:xfrm>
+            <a:prstGeom prst="rect">
+              <a:avLst/>
+            </a:prstGeom>
+            <a:noFill/>
+            <a:ln>
+              <a:noFill/>
+            </a:ln>
+          </p:spPr>
+          <p:txBody>
+            <a:bodyPr wrap="square" anchor="t">
+              <a:spAutoFit/>
+            </a:bodyPr>
+            <a:lstStyle/>
+            <a:p>
+              <a:pPr algn="ctr"/>
+              <a:r>
+                <a:rPr lang="en-US" sz="1600" dirty="0">
+                  <a:solidFill>
+                    <a:srgbClr val="475569"/>
+                  </a:solidFill>
+                  <a:latin typeface="Aptos"/>
+                </a:rPr>
+                <a:t>LLM-as-judge emits scores in Langfuse</a:t>
+              </a:r>
+            </a:p>
+          </p:txBody>
+        </p:sp>
+      </p:grpSp>
+      <p:grpSp>
+        <p:nvGrpSpPr>
+          <p:cNvPr id="49" name="Group 48">
+            <a:extLst>
+              <a:ext uri="{FF2B5EF4-FFF2-40B4-BE49-F238E27FC236}">
+                <a16:creationId xmlns:a16="http://schemas.microsoft.com/office/drawing/2014/main" id="{F860B0B0-3187-DECF-2694-D4E2B97AA80B}"/>
+              </a:ext>
+            </a:extLst>
+          </p:cNvPr>
+          <p:cNvGrpSpPr/>
+          <p:nvPr/>
+        </p:nvGrpSpPr>
+        <p:grpSpPr>
+          <a:xfrm>
+            <a:off x="7713085" y="3035808"/>
+            <a:ext cx="2011680" cy="1463040"/>
+            <a:chOff x="7713085" y="3035808"/>
+            <a:chExt cx="2011680" cy="1463040"/>
+          </a:xfrm>
+        </p:grpSpPr>
+        <p:sp>
+          <p:nvSpPr>
+            <p:cNvPr id="21" name="Shape 21"/>
+            <p:cNvSpPr/>
+            <p:nvPr/>
+          </p:nvSpPr>
+          <p:spPr>
+            <a:xfrm>
+              <a:off x="7713085" y="3035808"/>
+              <a:ext cx="2011680" cy="1463040"/>
+            </a:xfrm>
+            <a:prstGeom prst="roundRect">
+              <a:avLst/>
+            </a:prstGeom>
+            <a:solidFill>
+              <a:srgbClr val="FFFFFF"/>
+            </a:solidFill>
+            <a:ln w="18000">
+              <a:solidFill>
+                <a:srgbClr val="CBD5E1"/>
+              </a:solidFill>
+            </a:ln>
+          </p:spPr>
+          <p:txBody>
+            <a:bodyPr wrap="square" anchor="t">
+              <a:spAutoFit/>
+            </a:bodyPr>
+            <a:lstStyle/>
+            <a:p>
+              <a:pPr algn="ctr"/>
+              <a:endParaRPr/>
+            </a:p>
+          </p:txBody>
+        </p:sp>
+        <p:sp>
+          <p:nvSpPr>
+            <p:cNvPr id="22" name="TextBox 22"/>
+            <p:cNvSpPr txBox="1"/>
+            <p:nvPr/>
+          </p:nvSpPr>
+          <p:spPr>
+            <a:xfrm>
+              <a:off x="7877677" y="3063240"/>
+              <a:ext cx="1691640" cy="274320"/>
+            </a:xfrm>
+            <a:prstGeom prst="rect">
+              <a:avLst/>
+            </a:prstGeom>
+            <a:noFill/>
+            <a:ln>
+              <a:noFill/>
+            </a:ln>
+          </p:spPr>
+          <p:txBody>
+            <a:bodyPr wrap="square" anchor="t">
+              <a:spAutoFit/>
+            </a:bodyPr>
+            <a:lstStyle/>
+            <a:p>
+              <a:pPr algn="ctr"/>
+              <a:r>
+                <a:rPr lang="en-US" sz="2000" dirty="0">
+                  <a:solidFill>
+                    <a:srgbClr val="EA580C"/>
+                  </a:solidFill>
+                  <a:latin typeface="Aptos"/>
+                </a:rPr>
+                <a:t>Review</a:t>
+              </a:r>
+            </a:p>
+          </p:txBody>
+        </p:sp>
+        <p:sp>
+          <p:nvSpPr>
+            <p:cNvPr id="23" name="TextBox 23"/>
+            <p:cNvSpPr txBox="1"/>
+            <p:nvPr/>
+          </p:nvSpPr>
+          <p:spPr>
+            <a:xfrm>
+              <a:off x="7877677" y="3337560"/>
+              <a:ext cx="1691640" cy="530352"/>
+            </a:xfrm>
+            <a:prstGeom prst="rect">
+              <a:avLst/>
+            </a:prstGeom>
+            <a:noFill/>
+            <a:ln>
+              <a:noFill/>
+            </a:ln>
+          </p:spPr>
+          <p:txBody>
+            <a:bodyPr wrap="square" anchor="t">
+              <a:spAutoFit/>
+            </a:bodyPr>
+            <a:lstStyle/>
+            <a:p>
+              <a:pPr algn="ctr"/>
+              <a:r>
+                <a:rPr lang="en-US" sz="1600" dirty="0">
+                  <a:solidFill>
+                    <a:srgbClr val="475569"/>
+                  </a:solidFill>
+                  <a:latin typeface="Aptos"/>
+                </a:rPr>
+                <a:t>Selected items route to human annotation queue</a:t>
+              </a:r>
+            </a:p>
+          </p:txBody>
+        </p:sp>
+      </p:grpSp>
+      <p:sp>
+        <p:nvSpPr>
+          <p:cNvPr id="24" name="Shape 24"/>
           <p:cNvSpPr/>
           <p:nvPr/>
         </p:nvSpPr>
         <p:spPr>
           <a:xfrm>
-            <a:off x="502920" y="1417320"/>
-            <a:ext cx="2011680" cy="1463040"/>
+            <a:off x="875071" y="4590288"/>
+            <a:ext cx="10058400" cy="1645920"/>
           </a:xfrm>
           <a:prstGeom prst="roundRect">
             <a:avLst/>
@@ -6679,102 +7462,192 @@
           </a:ln>
         </p:spPr>
         <p:txBody>
-          <a:bodyPr anchor="mid" wrap="square">
+          <a:bodyPr wrap="square" anchor="t">
             <a:spAutoFit/>
           </a:bodyPr>
           <a:lstStyle/>
           <a:p>
             <a:pPr algn="ctr"/>
-          </a:p>
-        </p:txBody>
-      </p:sp>
-      <p:sp>
-        <p:nvSpPr>
-          <p:cNvPr id="6" name="TextBox 6"/>
-          <p:cNvSpPr txBox="1"/>
-          <p:nvPr/>
-        </p:nvSpPr>
-        <p:spPr>
-          <a:xfrm>
-            <a:off x="667512" y="1627632"/>
-            <a:ext cx="1691640" cy="274320"/>
-          </a:xfrm>
-          <a:prstGeom prst="rect">
-            <a:avLst/>
-          </a:prstGeom>
-          <a:noFill/>
-          <a:ln>
-            <a:noFill/>
-          </a:ln>
-        </p:spPr>
-        <p:txBody>
-          <a:bodyPr anchor="top" wrap="square">
+            <a:endParaRPr/>
+          </a:p>
+        </p:txBody>
+      </p:sp>
+      <p:sp>
+        <p:nvSpPr>
+          <p:cNvPr id="25" name="Shape 25"/>
+          <p:cNvSpPr/>
+          <p:nvPr/>
+        </p:nvSpPr>
+        <p:spPr>
+          <a:xfrm>
+            <a:off x="875071" y="4590288"/>
+            <a:ext cx="73152" cy="1645920"/>
+          </a:xfrm>
+          <a:prstGeom prst="rect">
+            <a:avLst/>
+          </a:prstGeom>
+          <a:solidFill>
+            <a:srgbClr val="16A34A"/>
+          </a:solidFill>
+          <a:ln>
+            <a:noFill/>
+          </a:ln>
+        </p:spPr>
+        <p:txBody>
+          <a:bodyPr wrap="square" anchor="t">
             <a:spAutoFit/>
           </a:bodyPr>
           <a:lstStyle/>
           <a:p>
             <a:pPr algn="ctr"/>
+            <a:endParaRPr/>
+          </a:p>
+        </p:txBody>
+      </p:sp>
+      <p:sp>
+        <p:nvSpPr>
+          <p:cNvPr id="26" name="TextBox 26"/>
+          <p:cNvSpPr txBox="1"/>
+          <p:nvPr/>
+        </p:nvSpPr>
+        <p:spPr>
+          <a:xfrm>
+            <a:off x="1117387" y="4636008"/>
+            <a:ext cx="9646920" cy="320040"/>
+          </a:xfrm>
+          <a:prstGeom prst="rect">
+            <a:avLst/>
+          </a:prstGeom>
+          <a:noFill/>
+          <a:ln>
+            <a:noFill/>
+          </a:ln>
+        </p:spPr>
+        <p:txBody>
+          <a:bodyPr wrap="square" anchor="t">
+            <a:spAutoFit/>
+          </a:bodyPr>
+          <a:lstStyle/>
+          <a:p>
+            <a:pPr algn="l"/>
             <a:r>
               <a:rPr lang="en-US" sz="2000" dirty="0">
-                <a:b/>
-                <a:solidFill>
-                  <a:srgbClr val="2563EB"/>
-                </a:solidFill>
-                <a:latin typeface="Aptos"/>
-              </a:rPr>
-              <a:t>Baseline</a:t>
-            </a:r>
-          </a:p>
-        </p:txBody>
-      </p:sp>
-      <p:sp>
-        <p:nvSpPr>
-          <p:cNvPr id="7" name="TextBox 7"/>
-          <p:cNvSpPr txBox="1"/>
-          <p:nvPr/>
-        </p:nvSpPr>
-        <p:spPr>
-          <a:xfrm>
-            <a:off x="667512" y="2057400"/>
-            <a:ext cx="1691640" cy="530352"/>
-          </a:xfrm>
-          <a:prstGeom prst="rect">
-            <a:avLst/>
-          </a:prstGeom>
-          <a:noFill/>
-          <a:ln>
-            <a:noFill/>
-          </a:ln>
-        </p:spPr>
-        <p:txBody>
-          <a:bodyPr anchor="top" wrap="square">
-            <a:spAutoFit/>
-          </a:bodyPr>
-          <a:lstStyle/>
-          <a:p>
-            <a:pPr algn="ctr"/>
+                <a:solidFill>
+                  <a:srgbClr val="111827"/>
+                </a:solidFill>
+                <a:latin typeface="Aptos"/>
+              </a:rPr>
+              <a:t>Comparison signals</a:t>
+            </a:r>
+          </a:p>
+        </p:txBody>
+      </p:sp>
+      <p:sp>
+        <p:nvSpPr>
+          <p:cNvPr id="27" name="TextBox 27"/>
+          <p:cNvSpPr txBox="1"/>
+          <p:nvPr/>
+        </p:nvSpPr>
+        <p:spPr>
+          <a:xfrm>
+            <a:off x="1153963" y="5047488"/>
+            <a:ext cx="9555480" cy="914400"/>
+          </a:xfrm>
+          <a:prstGeom prst="rect">
+            <a:avLst/>
+          </a:prstGeom>
+          <a:noFill/>
+          <a:ln>
+            <a:noFill/>
+          </a:ln>
+        </p:spPr>
+        <p:txBody>
+          <a:bodyPr wrap="square" anchor="t">
+            <a:spAutoFit/>
+          </a:bodyPr>
+          <a:lstStyle/>
+          <a:p>
+            <a:pPr algn="l"/>
+            <a:r>
+              <a:rPr lang="en-US" sz="1700" dirty="0">
+                <a:solidFill>
+                  <a:srgbClr val="334155"/>
+                </a:solidFill>
+                <a:latin typeface="Aptos"/>
+              </a:rPr>
+              <a:t>- Trace metadata links score outcomes back to run IDs, item IDs, model configs, prompt identities, and parameter identities.</a:t>
+            </a:r>
+          </a:p>
+          <a:p>
+            <a:pPr algn="l"/>
+            <a:r>
+              <a:rPr lang="en-US" sz="1700" dirty="0">
+                <a:solidFill>
+                  <a:srgbClr val="334155"/>
+                </a:solidFill>
+                <a:latin typeface="Aptos"/>
+              </a:rPr>
+              <a:t>- Automated scores use source EVAL; human scores use source ANNOTATION for side-by-side analysis.</a:t>
+            </a:r>
+          </a:p>
+        </p:txBody>
+      </p:sp>
+      <p:sp>
+        <p:nvSpPr>
+          <p:cNvPr id="28" name="TextBox 28"/>
+          <p:cNvSpPr txBox="1"/>
+          <p:nvPr/>
+        </p:nvSpPr>
+        <p:spPr>
+          <a:xfrm>
+            <a:off x="502920" y="6446520"/>
+            <a:ext cx="7772400" cy="228600"/>
+          </a:xfrm>
+          <a:prstGeom prst="rect">
+            <a:avLst/>
+          </a:prstGeom>
+          <a:noFill/>
+          <a:ln>
+            <a:noFill/>
+          </a:ln>
+        </p:spPr>
+        <p:txBody>
+          <a:bodyPr wrap="square" anchor="t">
+            <a:spAutoFit/>
+          </a:bodyPr>
+          <a:lstStyle/>
+          <a:p>
+            <a:pPr algn="l"/>
             <a:r>
               <a:rPr lang="en-US" sz="1600" dirty="0">
                 <a:solidFill>
-                  <a:srgbClr val="475569"/>
-                </a:solidFill>
-                <a:latin typeface="Aptos"/>
-              </a:rPr>
-              <a:t>Run reference model and prompt version</a:t>
+                  <a:srgbClr val="64748B"/>
+                </a:solidFill>
+                <a:latin typeface="Aptos"/>
+              </a:rPr>
+              <a:t>Evaluator Harness | Langfuse-first offline evaluation workflow</a:t>
             </a:r>
           </a:p>
         </p:txBody>
       </p:sp>
       <p:cxnSp>
         <p:nvCxnSpPr>
-          <p:cNvPr id="8" name="Arrow 8"/>
-          <p:cNvCxnSpPr/>
+          <p:cNvPr id="29" name="Arrow 8">
+            <a:extLst>
+              <a:ext uri="{FF2B5EF4-FFF2-40B4-BE49-F238E27FC236}">
+                <a16:creationId xmlns:a16="http://schemas.microsoft.com/office/drawing/2014/main" id="{5719C679-4566-5847-8A98-DB632A8354C5}"/>
+              </a:ext>
+            </a:extLst>
+          </p:cNvPr>
+          <p:cNvCxnSpPr>
+            <a:cxnSpLocks/>
+          </p:cNvCxnSpPr>
           <p:nvPr/>
         </p:nvCxnSpPr>
         <p:spPr>
           <a:xfrm>
-            <a:off x="2532888" y="2148840"/>
-            <a:ext cx="274319" cy="0"/>
+            <a:off x="3805084" y="2804603"/>
+            <a:ext cx="0" cy="263209"/>
           </a:xfrm>
           <a:prstGeom prst="line">
             <a:avLst/>
@@ -6787,126 +7660,25 @@
           </a:ln>
         </p:spPr>
       </p:cxnSp>
-      <p:sp>
-        <p:nvSpPr>
-          <p:cNvPr id="9" name="Shape 9"/>
-          <p:cNvSpPr/>
-          <p:nvPr/>
-        </p:nvSpPr>
-        <p:spPr>
-          <a:xfrm>
-            <a:off x="2834639" y="1417320"/>
-            <a:ext cx="2011680" cy="1463040"/>
-          </a:xfrm>
-          <a:prstGeom prst="roundRect">
-            <a:avLst/>
-          </a:prstGeom>
-          <a:solidFill>
-            <a:srgbClr val="FFFFFF"/>
-          </a:solidFill>
-          <a:ln w="18000">
-            <a:solidFill>
-              <a:srgbClr val="CBD5E1"/>
-            </a:solidFill>
-          </a:ln>
-        </p:spPr>
-        <p:txBody>
-          <a:bodyPr anchor="mid" wrap="square">
-            <a:spAutoFit/>
-          </a:bodyPr>
-          <a:lstStyle/>
-          <a:p>
-            <a:pPr algn="ctr"/>
-          </a:p>
-        </p:txBody>
-      </p:sp>
-      <p:sp>
-        <p:nvSpPr>
-          <p:cNvPr id="10" name="TextBox 10"/>
-          <p:cNvSpPr txBox="1"/>
-          <p:nvPr/>
-        </p:nvSpPr>
-        <p:spPr>
-          <a:xfrm>
-            <a:off x="2999232" y="1627632"/>
-            <a:ext cx="1691640" cy="274320"/>
-          </a:xfrm>
-          <a:prstGeom prst="rect">
-            <a:avLst/>
-          </a:prstGeom>
-          <a:noFill/>
-          <a:ln>
-            <a:noFill/>
-          </a:ln>
-        </p:spPr>
-        <p:txBody>
-          <a:bodyPr anchor="top" wrap="square">
-            <a:spAutoFit/>
-          </a:bodyPr>
-          <a:lstStyle/>
-          <a:p>
-            <a:pPr algn="ctr"/>
-            <a:r>
-              <a:rPr lang="en-US" sz="2000" dirty="0">
-                <a:b/>
-                <a:solidFill>
-                  <a:srgbClr val="0F766E"/>
-                </a:solidFill>
-                <a:latin typeface="Aptos"/>
-              </a:rPr>
-              <a:t>Candidate</a:t>
-            </a:r>
-          </a:p>
-        </p:txBody>
-      </p:sp>
-      <p:sp>
-        <p:nvSpPr>
-          <p:cNvPr id="11" name="TextBox 11"/>
-          <p:cNvSpPr txBox="1"/>
-          <p:nvPr/>
-        </p:nvSpPr>
-        <p:spPr>
-          <a:xfrm>
-            <a:off x="2999232" y="2057400"/>
-            <a:ext cx="1691640" cy="530352"/>
-          </a:xfrm>
-          <a:prstGeom prst="rect">
-            <a:avLst/>
-          </a:prstGeom>
-          <a:noFill/>
-          <a:ln>
-            <a:noFill/>
-          </a:ln>
-        </p:spPr>
-        <p:txBody>
-          <a:bodyPr anchor="top" wrap="square">
-            <a:spAutoFit/>
-          </a:bodyPr>
-          <a:lstStyle/>
-          <a:p>
-            <a:pPr algn="ctr"/>
-            <a:r>
-              <a:rPr lang="en-US" sz="1600" dirty="0">
-                <a:solidFill>
-                  <a:srgbClr val="475569"/>
-                </a:solidFill>
-                <a:latin typeface="Aptos"/>
-              </a:rPr>
-              <a:t>Run model, prompt, parameter, or mixed variant</a:t>
-            </a:r>
-          </a:p>
-        </p:txBody>
-      </p:sp>
       <p:cxnSp>
         <p:nvCxnSpPr>
-          <p:cNvPr id="12" name="Arrow 12"/>
-          <p:cNvCxnSpPr/>
+          <p:cNvPr id="32" name="Arrow 8">
+            <a:extLst>
+              <a:ext uri="{FF2B5EF4-FFF2-40B4-BE49-F238E27FC236}">
+                <a16:creationId xmlns:a16="http://schemas.microsoft.com/office/drawing/2014/main" id="{9114B5FD-D192-14FC-EEAD-D5386C42D027}"/>
+              </a:ext>
+            </a:extLst>
+          </p:cNvPr>
+          <p:cNvCxnSpPr>
+            <a:cxnSpLocks/>
+            <a:endCxn id="17" idx="0"/>
+          </p:cNvCxnSpPr>
           <p:nvPr/>
         </p:nvCxnSpPr>
         <p:spPr>
           <a:xfrm>
-            <a:off x="4864608" y="2148840"/>
-            <a:ext cx="274319" cy="0"/>
+            <a:off x="3990213" y="2804603"/>
+            <a:ext cx="2026539" cy="231205"/>
           </a:xfrm>
           <a:prstGeom prst="line">
             <a:avLst/>
@@ -6919,126 +7691,26 @@
           </a:ln>
         </p:spPr>
       </p:cxnSp>
-      <p:sp>
-        <p:nvSpPr>
-          <p:cNvPr id="13" name="Shape 13"/>
-          <p:cNvSpPr/>
-          <p:nvPr/>
-        </p:nvSpPr>
-        <p:spPr>
-          <a:xfrm>
-            <a:off x="5166359" y="1417320"/>
-            <a:ext cx="2011680" cy="1463040"/>
-          </a:xfrm>
-          <a:prstGeom prst="roundRect">
-            <a:avLst/>
-          </a:prstGeom>
-          <a:solidFill>
-            <a:srgbClr val="FFFFFF"/>
-          </a:solidFill>
-          <a:ln w="18000">
-            <a:solidFill>
-              <a:srgbClr val="CBD5E1"/>
-            </a:solidFill>
-          </a:ln>
-        </p:spPr>
-        <p:txBody>
-          <a:bodyPr anchor="mid" wrap="square">
-            <a:spAutoFit/>
-          </a:bodyPr>
-          <a:lstStyle/>
-          <a:p>
-            <a:pPr algn="ctr"/>
-          </a:p>
-        </p:txBody>
-      </p:sp>
-      <p:sp>
-        <p:nvSpPr>
-          <p:cNvPr id="14" name="TextBox 14"/>
-          <p:cNvSpPr txBox="1"/>
-          <p:nvPr/>
-        </p:nvSpPr>
-        <p:spPr>
-          <a:xfrm>
-            <a:off x="5330951" y="1627632"/>
-            <a:ext cx="1691640" cy="274320"/>
-          </a:xfrm>
-          <a:prstGeom prst="rect">
-            <a:avLst/>
-          </a:prstGeom>
-          <a:noFill/>
-          <a:ln>
-            <a:noFill/>
-          </a:ln>
-        </p:spPr>
-        <p:txBody>
-          <a:bodyPr anchor="top" wrap="square">
-            <a:spAutoFit/>
-          </a:bodyPr>
-          <a:lstStyle/>
-          <a:p>
-            <a:pPr algn="ctr"/>
-            <a:r>
-              <a:rPr lang="en-US" sz="2000" dirty="0">
-                <a:b/>
-                <a:solidFill>
-                  <a:srgbClr val="16A34A"/>
-                </a:solidFill>
-                <a:latin typeface="Aptos"/>
-              </a:rPr>
-              <a:t>Trace</a:t>
-            </a:r>
-          </a:p>
-        </p:txBody>
-      </p:sp>
-      <p:sp>
-        <p:nvSpPr>
-          <p:cNvPr id="15" name="TextBox 15"/>
-          <p:cNvSpPr txBox="1"/>
-          <p:nvPr/>
-        </p:nvSpPr>
-        <p:spPr>
-          <a:xfrm>
-            <a:off x="5330951" y="2057400"/>
-            <a:ext cx="1691640" cy="530352"/>
-          </a:xfrm>
-          <a:prstGeom prst="rect">
-            <a:avLst/>
-          </a:prstGeom>
-          <a:noFill/>
-          <a:ln>
-            <a:noFill/>
-          </a:ln>
-        </p:spPr>
-        <p:txBody>
-          <a:bodyPr anchor="top" wrap="square">
-            <a:spAutoFit/>
-          </a:bodyPr>
-          <a:lstStyle/>
-          <a:p>
-            <a:pPr algn="ctr"/>
-            <a:r>
-              <a:rPr lang="en-US" sz="1600" dirty="0">
-                <a:solidFill>
-                  <a:srgbClr val="475569"/>
-                </a:solidFill>
-                <a:latin typeface="Aptos"/>
-              </a:rPr>
-              <a:t>Capture item input, output, metadata, and observation</a:t>
-            </a:r>
-          </a:p>
-        </p:txBody>
-      </p:sp>
       <p:cxnSp>
         <p:nvCxnSpPr>
-          <p:cNvPr id="16" name="Arrow 16"/>
-          <p:cNvCxnSpPr/>
+          <p:cNvPr id="35" name="Arrow 8">
+            <a:extLst>
+              <a:ext uri="{FF2B5EF4-FFF2-40B4-BE49-F238E27FC236}">
+                <a16:creationId xmlns:a16="http://schemas.microsoft.com/office/drawing/2014/main" id="{4F29251B-9EED-FD28-4008-D9D2812E3481}"/>
+              </a:ext>
+            </a:extLst>
+          </p:cNvPr>
+          <p:cNvCxnSpPr>
+            <a:cxnSpLocks/>
+            <a:stCxn id="9" idx="2"/>
+            <a:endCxn id="17" idx="0"/>
+          </p:cNvCxnSpPr>
           <p:nvPr/>
         </p:nvCxnSpPr>
         <p:spPr>
           <a:xfrm>
-            <a:off x="7196327" y="2148840"/>
-            <a:ext cx="274320" cy="0"/>
+            <a:off x="6016751" y="2791329"/>
+            <a:ext cx="1" cy="244479"/>
           </a:xfrm>
           <a:prstGeom prst="line">
             <a:avLst/>
@@ -7051,126 +7723,24 @@
           </a:ln>
         </p:spPr>
       </p:cxnSp>
-      <p:sp>
-        <p:nvSpPr>
-          <p:cNvPr id="17" name="Shape 17"/>
-          <p:cNvSpPr/>
-          <p:nvPr/>
-        </p:nvSpPr>
-        <p:spPr>
-          <a:xfrm>
-            <a:off x="7498079" y="1417320"/>
-            <a:ext cx="2011680" cy="1463040"/>
-          </a:xfrm>
-          <a:prstGeom prst="roundRect">
-            <a:avLst/>
-          </a:prstGeom>
-          <a:solidFill>
-            <a:srgbClr val="FFFFFF"/>
-          </a:solidFill>
-          <a:ln w="18000">
-            <a:solidFill>
-              <a:srgbClr val="CBD5E1"/>
-            </a:solidFill>
-          </a:ln>
-        </p:spPr>
-        <p:txBody>
-          <a:bodyPr anchor="mid" wrap="square">
-            <a:spAutoFit/>
-          </a:bodyPr>
-          <a:lstStyle/>
-          <a:p>
-            <a:pPr algn="ctr"/>
-          </a:p>
-        </p:txBody>
-      </p:sp>
-      <p:sp>
-        <p:nvSpPr>
-          <p:cNvPr id="18" name="TextBox 18"/>
-          <p:cNvSpPr txBox="1"/>
-          <p:nvPr/>
-        </p:nvSpPr>
-        <p:spPr>
-          <a:xfrm>
-            <a:off x="7662671" y="1627632"/>
-            <a:ext cx="1691640" cy="274320"/>
-          </a:xfrm>
-          <a:prstGeom prst="rect">
-            <a:avLst/>
-          </a:prstGeom>
-          <a:noFill/>
-          <a:ln>
-            <a:noFill/>
-          </a:ln>
-        </p:spPr>
-        <p:txBody>
-          <a:bodyPr anchor="top" wrap="square">
-            <a:spAutoFit/>
-          </a:bodyPr>
-          <a:lstStyle/>
-          <a:p>
-            <a:pPr algn="ctr"/>
-            <a:r>
-              <a:rPr lang="en-US" sz="2000" dirty="0">
-                <a:b/>
-                <a:solidFill>
-                  <a:srgbClr val="7C3AED"/>
-                </a:solidFill>
-                <a:latin typeface="Aptos"/>
-              </a:rPr>
-              <a:t>Evaluate</a:t>
-            </a:r>
-          </a:p>
-        </p:txBody>
-      </p:sp>
-      <p:sp>
-        <p:nvSpPr>
-          <p:cNvPr id="19" name="TextBox 19"/>
-          <p:cNvSpPr txBox="1"/>
-          <p:nvPr/>
-        </p:nvSpPr>
-        <p:spPr>
-          <a:xfrm>
-            <a:off x="7662671" y="2057400"/>
-            <a:ext cx="1691640" cy="530352"/>
-          </a:xfrm>
-          <a:prstGeom prst="rect">
-            <a:avLst/>
-          </a:prstGeom>
-          <a:noFill/>
-          <a:ln>
-            <a:noFill/>
-          </a:ln>
-        </p:spPr>
-        <p:txBody>
-          <a:bodyPr anchor="top" wrap="square">
-            <a:spAutoFit/>
-          </a:bodyPr>
-          <a:lstStyle/>
-          <a:p>
-            <a:pPr algn="ctr"/>
-            <a:r>
-              <a:rPr lang="en-US" sz="1600" dirty="0">
-                <a:solidFill>
-                  <a:srgbClr val="475569"/>
-                </a:solidFill>
-                <a:latin typeface="Aptos"/>
-              </a:rPr>
-              <a:t>LLM-as-judge emits scores in Langfuse</a:t>
-            </a:r>
-          </a:p>
-        </p:txBody>
-      </p:sp>
       <p:cxnSp>
         <p:nvCxnSpPr>
-          <p:cNvPr id="20" name="Arrow 20"/>
-          <p:cNvCxnSpPr/>
+          <p:cNvPr id="38" name="Arrow 8">
+            <a:extLst>
+              <a:ext uri="{FF2B5EF4-FFF2-40B4-BE49-F238E27FC236}">
+                <a16:creationId xmlns:a16="http://schemas.microsoft.com/office/drawing/2014/main" id="{7205FCAA-6349-46F0-8FC0-8218B8C28E57}"/>
+              </a:ext>
+            </a:extLst>
+          </p:cNvPr>
+          <p:cNvCxnSpPr>
+            <a:cxnSpLocks/>
+          </p:cNvCxnSpPr>
           <p:nvPr/>
         </p:nvCxnSpPr>
         <p:spPr>
-          <a:xfrm>
-            <a:off x="9528048" y="2148840"/>
-            <a:ext cx="274319" cy="0"/>
+          <a:xfrm flipH="1">
+            <a:off x="3805084" y="2818761"/>
+            <a:ext cx="1971638" cy="249051"/>
           </a:xfrm>
           <a:prstGeom prst="line">
             <a:avLst/>
@@ -7183,307 +7753,38 @@
           </a:ln>
         </p:spPr>
       </p:cxnSp>
-      <p:sp>
-        <p:nvSpPr>
-          <p:cNvPr id="21" name="Shape 21"/>
-          <p:cNvSpPr/>
-          <p:nvPr/>
-        </p:nvSpPr>
-        <p:spPr>
-          <a:xfrm>
-            <a:off x="9829800" y="1417320"/>
-            <a:ext cx="2011680" cy="1463040"/>
-          </a:xfrm>
-          <a:prstGeom prst="roundRect">
-            <a:avLst/>
-          </a:prstGeom>
-          <a:solidFill>
-            <a:srgbClr val="FFFFFF"/>
-          </a:solidFill>
-          <a:ln w="18000">
+      <p:cxnSp>
+        <p:nvCxnSpPr>
+          <p:cNvPr id="43" name="Arrow 8">
+            <a:extLst>
+              <a:ext uri="{FF2B5EF4-FFF2-40B4-BE49-F238E27FC236}">
+                <a16:creationId xmlns:a16="http://schemas.microsoft.com/office/drawing/2014/main" id="{13C86B88-94C0-D23D-7EFB-3DCD695DBD18}"/>
+              </a:ext>
+            </a:extLst>
+          </p:cNvPr>
+          <p:cNvCxnSpPr>
+            <a:cxnSpLocks/>
+            <a:stCxn id="21" idx="1"/>
+            <a:endCxn id="17" idx="3"/>
+          </p:cNvCxnSpPr>
+          <p:nvPr/>
+        </p:nvCxnSpPr>
+        <p:spPr>
+          <a:xfrm flipH="1">
+            <a:off x="7022592" y="3767328"/>
+            <a:ext cx="690493" cy="0"/>
+          </a:xfrm>
+          <a:prstGeom prst="line">
+            <a:avLst/>
+          </a:prstGeom>
+          <a:ln w="22000">
             <a:solidFill>
-              <a:srgbClr val="CBD5E1"/>
+              <a:srgbClr val="64748B"/>
             </a:solidFill>
-          </a:ln>
-        </p:spPr>
-        <p:txBody>
-          <a:bodyPr anchor="mid" wrap="square">
-            <a:spAutoFit/>
-          </a:bodyPr>
-          <a:lstStyle/>
-          <a:p>
-            <a:pPr algn="ctr"/>
-          </a:p>
-        </p:txBody>
-      </p:sp>
-      <p:sp>
-        <p:nvSpPr>
-          <p:cNvPr id="22" name="TextBox 22"/>
-          <p:cNvSpPr txBox="1"/>
-          <p:nvPr/>
-        </p:nvSpPr>
-        <p:spPr>
-          <a:xfrm>
-            <a:off x="9994392" y="1627632"/>
-            <a:ext cx="1691640" cy="274320"/>
-          </a:xfrm>
-          <a:prstGeom prst="rect">
-            <a:avLst/>
-          </a:prstGeom>
-          <a:noFill/>
-          <a:ln>
-            <a:noFill/>
-          </a:ln>
-        </p:spPr>
-        <p:txBody>
-          <a:bodyPr anchor="top" wrap="square">
-            <a:spAutoFit/>
-          </a:bodyPr>
-          <a:lstStyle/>
-          <a:p>
-            <a:pPr algn="ctr"/>
-            <a:r>
-              <a:rPr lang="en-US" sz="2000" dirty="0">
-                <a:b/>
-                <a:solidFill>
-                  <a:srgbClr val="EA580C"/>
-                </a:solidFill>
-                <a:latin typeface="Aptos"/>
-              </a:rPr>
-              <a:t>Review</a:t>
-            </a:r>
-          </a:p>
-        </p:txBody>
-      </p:sp>
-      <p:sp>
-        <p:nvSpPr>
-          <p:cNvPr id="23" name="TextBox 23"/>
-          <p:cNvSpPr txBox="1"/>
-          <p:nvPr/>
-        </p:nvSpPr>
-        <p:spPr>
-          <a:xfrm>
-            <a:off x="9994392" y="2057400"/>
-            <a:ext cx="1691640" cy="530352"/>
-          </a:xfrm>
-          <a:prstGeom prst="rect">
-            <a:avLst/>
-          </a:prstGeom>
-          <a:noFill/>
-          <a:ln>
-            <a:noFill/>
-          </a:ln>
-        </p:spPr>
-        <p:txBody>
-          <a:bodyPr anchor="top" wrap="square">
-            <a:spAutoFit/>
-          </a:bodyPr>
-          <a:lstStyle/>
-          <a:p>
-            <a:pPr algn="ctr"/>
-            <a:r>
-              <a:rPr lang="en-US" sz="1600" dirty="0">
-                <a:solidFill>
-                  <a:srgbClr val="475569"/>
-                </a:solidFill>
-                <a:latin typeface="Aptos"/>
-              </a:rPr>
-              <a:t>Selected items route to human annotation queue</a:t>
-            </a:r>
-          </a:p>
-        </p:txBody>
-      </p:sp>
-      <p:sp>
-        <p:nvSpPr>
-          <p:cNvPr id="24" name="Shape 24"/>
-          <p:cNvSpPr/>
-          <p:nvPr/>
-        </p:nvSpPr>
-        <p:spPr>
-          <a:xfrm>
-            <a:off x="914400" y="3657600"/>
-            <a:ext cx="10058400" cy="1645920"/>
-          </a:xfrm>
-          <a:prstGeom prst="roundRect">
-            <a:avLst/>
-          </a:prstGeom>
-          <a:solidFill>
-            <a:srgbClr val="FFFFFF"/>
-          </a:solidFill>
-          <a:ln w="18000">
-            <a:solidFill>
-              <a:srgbClr val="CBD5E1"/>
-            </a:solidFill>
-          </a:ln>
-        </p:spPr>
-        <p:txBody>
-          <a:bodyPr anchor="mid" wrap="square">
-            <a:spAutoFit/>
-          </a:bodyPr>
-          <a:lstStyle/>
-          <a:p>
-            <a:pPr algn="ctr"/>
-          </a:p>
-        </p:txBody>
-      </p:sp>
-      <p:sp>
-        <p:nvSpPr>
-          <p:cNvPr id="25" name="Shape 25"/>
-          <p:cNvSpPr/>
-          <p:nvPr/>
-        </p:nvSpPr>
-        <p:spPr>
-          <a:xfrm>
-            <a:off x="914400" y="3657600"/>
-            <a:ext cx="73152" cy="1645920"/>
-          </a:xfrm>
-          <a:prstGeom prst="rect">
-            <a:avLst/>
-          </a:prstGeom>
-          <a:solidFill>
-            <a:srgbClr val="16A34A"/>
-          </a:solidFill>
-          <a:ln>
-            <a:noFill/>
-          </a:ln>
-        </p:spPr>
-        <p:txBody>
-          <a:bodyPr anchor="mid" wrap="square">
-            <a:spAutoFit/>
-          </a:bodyPr>
-          <a:lstStyle/>
-          <a:p>
-            <a:pPr algn="ctr"/>
-          </a:p>
-        </p:txBody>
-      </p:sp>
-      <p:sp>
-        <p:nvSpPr>
-          <p:cNvPr id="26" name="TextBox 26"/>
-          <p:cNvSpPr txBox="1"/>
-          <p:nvPr/>
-        </p:nvSpPr>
-        <p:spPr>
-          <a:xfrm>
-            <a:off x="1170432" y="3840480"/>
-            <a:ext cx="9646920" cy="320040"/>
-          </a:xfrm>
-          <a:prstGeom prst="rect">
-            <a:avLst/>
-          </a:prstGeom>
-          <a:noFill/>
-          <a:ln>
-            <a:noFill/>
-          </a:ln>
-        </p:spPr>
-        <p:txBody>
-          <a:bodyPr anchor="top" wrap="square">
-            <a:spAutoFit/>
-          </a:bodyPr>
-          <a:lstStyle/>
-          <a:p>
-            <a:pPr algn="l"/>
-            <a:r>
-              <a:rPr lang="en-US" sz="2000" dirty="0">
-                <a:b/>
-                <a:solidFill>
-                  <a:srgbClr val="111827"/>
-                </a:solidFill>
-                <a:latin typeface="Aptos"/>
-              </a:rPr>
-              <a:t>Comparison signals</a:t>
-            </a:r>
-          </a:p>
-        </p:txBody>
-      </p:sp>
-      <p:sp>
-        <p:nvSpPr>
-          <p:cNvPr id="27" name="TextBox 27"/>
-          <p:cNvSpPr txBox="1"/>
-          <p:nvPr/>
-        </p:nvSpPr>
-        <p:spPr>
-          <a:xfrm>
-            <a:off x="1207008" y="4251960"/>
-            <a:ext cx="9555480" cy="914400"/>
-          </a:xfrm>
-          <a:prstGeom prst="rect">
-            <a:avLst/>
-          </a:prstGeom>
-          <a:noFill/>
-          <a:ln>
-            <a:noFill/>
-          </a:ln>
-        </p:spPr>
-        <p:txBody>
-          <a:bodyPr anchor="top" wrap="square">
-            <a:spAutoFit/>
-          </a:bodyPr>
-          <a:lstStyle/>
-          <a:p>
-            <a:pPr algn="l"/>
-            <a:r>
-              <a:rPr lang="en-US" sz="1700" dirty="0">
-                <a:solidFill>
-                  <a:srgbClr val="334155"/>
-                </a:solidFill>
-                <a:latin typeface="Aptos"/>
-              </a:rPr>
-              <a:t>- Trace metadata links score outcomes back to run IDs, item IDs, model configs, prompt identities, and parameter identities.</a:t>
-            </a:r>
-          </a:p>
-          <a:p>
-            <a:pPr algn="l"/>
-            <a:r>
-              <a:rPr lang="en-US" sz="1700" dirty="0">
-                <a:solidFill>
-                  <a:srgbClr val="334155"/>
-                </a:solidFill>
-                <a:latin typeface="Aptos"/>
-              </a:rPr>
-              <a:t>- Automated scores use source EVAL; human scores use source ANNOTATION for side-by-side analysis.</a:t>
-            </a:r>
-          </a:p>
-        </p:txBody>
-      </p:sp>
-      <p:sp>
-        <p:nvSpPr>
-          <p:cNvPr id="28" name="TextBox 28"/>
-          <p:cNvSpPr txBox="1"/>
-          <p:nvPr/>
-        </p:nvSpPr>
-        <p:spPr>
-          <a:xfrm>
-            <a:off x="502920" y="6446520"/>
-            <a:ext cx="7772400" cy="228600"/>
-          </a:xfrm>
-          <a:prstGeom prst="rect">
-            <a:avLst/>
-          </a:prstGeom>
-          <a:noFill/>
-          <a:ln>
-            <a:noFill/>
-          </a:ln>
-        </p:spPr>
-        <p:txBody>
-          <a:bodyPr anchor="top" wrap="square">
-            <a:spAutoFit/>
-          </a:bodyPr>
-          <a:lstStyle/>
-          <a:p>
-            <a:pPr algn="l"/>
-            <a:r>
-              <a:rPr lang="en-US" sz="1600" dirty="0">
-                <a:solidFill>
-                  <a:srgbClr val="64748B"/>
-                </a:solidFill>
-                <a:latin typeface="Aptos"/>
-              </a:rPr>
-              <a:t>Evaluator Harness | Langfuse-first offline evaluation workflow</a:t>
-            </a:r>
-          </a:p>
-        </p:txBody>
-      </p:sp>
+            <a:headEnd type="triangle"/>
+          </a:ln>
+        </p:spPr>
+      </p:cxnSp>
     </p:spTree>
   </p:cSld>
   <p:clrMapOvr>
@@ -7493,80 +7794,316 @@
 </file>
 
 <file path=ppt/theme/theme1.xml><?xml version="1.0" encoding="utf-8"?>
-<a:theme xmlns:a="http://schemas.openxmlformats.org/drawingml/2006/main" name="Evaluator Harness Theme">
+<a:theme xmlns:a="http://schemas.openxmlformats.org/drawingml/2006/main" name="Office Theme">
   <a:themeElements>
-    <a:clrScheme name="EH">
+    <a:clrScheme name="Office">
       <a:dk1>
-        <a:srgbClr val="111827"/>
+        <a:sysClr val="windowText" lastClr="000000"/>
       </a:dk1>
       <a:lt1>
-        <a:srgbClr val="FFFFFF"/>
+        <a:sysClr val="window" lastClr="FFFFFF"/>
       </a:lt1>
       <a:dk2>
-        <a:srgbClr val="1F2937"/>
+        <a:srgbClr val="0E2841"/>
       </a:dk2>
       <a:lt2>
-        <a:srgbClr val="F8FAFC"/>
+        <a:srgbClr val="E8E8E8"/>
       </a:lt2>
       <a:accent1>
-        <a:srgbClr val="2563EB"/>
+        <a:srgbClr val="156082"/>
       </a:accent1>
       <a:accent2>
-        <a:srgbClr val="0F766E"/>
+        <a:srgbClr val="E97132"/>
       </a:accent2>
       <a:accent3>
-        <a:srgbClr val="16A34A"/>
+        <a:srgbClr val="196B24"/>
       </a:accent3>
       <a:accent4>
-        <a:srgbClr val="EA580C"/>
+        <a:srgbClr val="0F9ED5"/>
       </a:accent4>
       <a:accent5>
-        <a:srgbClr val="7C3AED"/>
+        <a:srgbClr val="A02B93"/>
       </a:accent5>
       <a:accent6>
-        <a:srgbClr val="D97706"/>
+        <a:srgbClr val="4EA72E"/>
       </a:accent6>
       <a:hlink>
-        <a:srgbClr val="2563EB"/>
+        <a:srgbClr val="467886"/>
       </a:hlink>
       <a:folHlink>
-        <a:srgbClr val="7C3AED"/>
+        <a:srgbClr val="96607D"/>
       </a:folHlink>
     </a:clrScheme>
-    <a:fontScheme name="Aptos">
+    <a:fontScheme name="Office">
       <a:majorFont>
-        <a:latin typeface="Aptos Display"/>
+        <a:latin typeface="Aptos Display" panose="02110004020202020204"/>
+        <a:ea typeface=""/>
+        <a:cs typeface=""/>
+        <a:font script="Jpan" typeface="游ゴシック Light"/>
+        <a:font script="Hang" typeface="맑은 고딕"/>
+        <a:font script="Hans" typeface="等线 Light"/>
+        <a:font script="Hant" typeface="新細明體"/>
+        <a:font script="Arab" typeface="Times New Roman"/>
+        <a:font script="Hebr" typeface="Times New Roman"/>
+        <a:font script="Thai" typeface="Angsana New"/>
+        <a:font script="Ethi" typeface="Nyala"/>
+        <a:font script="Beng" typeface="Vrinda"/>
+        <a:font script="Gujr" typeface="Shruti"/>
+        <a:font script="Khmr" typeface="MoolBoran"/>
+        <a:font script="Knda" typeface="Tunga"/>
+        <a:font script="Guru" typeface="Raavi"/>
+        <a:font script="Cans" typeface="Euphemia"/>
+        <a:font script="Cher" typeface="Plantagenet Cherokee"/>
+        <a:font script="Yiii" typeface="Microsoft Yi Baiti"/>
+        <a:font script="Tibt" typeface="Microsoft Himalaya"/>
+        <a:font script="Thaa" typeface="MV Boli"/>
+        <a:font script="Deva" typeface="Mangal"/>
+        <a:font script="Telu" typeface="Gautami"/>
+        <a:font script="Taml" typeface="Latha"/>
+        <a:font script="Syrc" typeface="Estrangelo Edessa"/>
+        <a:font script="Orya" typeface="Kalinga"/>
+        <a:font script="Mlym" typeface="Kartika"/>
+        <a:font script="Laoo" typeface="DokChampa"/>
+        <a:font script="Sinh" typeface="Iskoola Pota"/>
+        <a:font script="Mong" typeface="Mongolian Baiti"/>
+        <a:font script="Viet" typeface="Times New Roman"/>
+        <a:font script="Uigh" typeface="Microsoft Uighur"/>
+        <a:font script="Geor" typeface="Sylfaen"/>
+        <a:font script="Armn" typeface="Arial"/>
+        <a:font script="Bugi" typeface="Leelawadee UI"/>
+        <a:font script="Bopo" typeface="Microsoft JhengHei"/>
+        <a:font script="Java" typeface="Javanese Text"/>
+        <a:font script="Lisu" typeface="Segoe UI"/>
+        <a:font script="Mymr" typeface="Myanmar Text"/>
+        <a:font script="Nkoo" typeface="Ebrima"/>
+        <a:font script="Olck" typeface="Nirmala UI"/>
+        <a:font script="Osma" typeface="Ebrima"/>
+        <a:font script="Phag" typeface="Phagspa"/>
+        <a:font script="Syrn" typeface="Estrangelo Edessa"/>
+        <a:font script="Syrj" typeface="Estrangelo Edessa"/>
+        <a:font script="Syre" typeface="Estrangelo Edessa"/>
+        <a:font script="Sora" typeface="Nirmala UI"/>
+        <a:font script="Tale" typeface="Microsoft Tai Le"/>
+        <a:font script="Talu" typeface="Microsoft New Tai Lue"/>
+        <a:font script="Tfng" typeface="Ebrima"/>
       </a:majorFont>
       <a:minorFont>
-        <a:latin typeface="Aptos"/>
+        <a:latin typeface="Aptos" panose="02110004020202020204"/>
+        <a:ea typeface=""/>
+        <a:cs typeface=""/>
+        <a:font script="Jpan" typeface="游ゴシック"/>
+        <a:font script="Hang" typeface="맑은 고딕"/>
+        <a:font script="Hans" typeface="等线"/>
+        <a:font script="Hant" typeface="新細明體"/>
+        <a:font script="Arab" typeface="Arial"/>
+        <a:font script="Hebr" typeface="Arial"/>
+        <a:font script="Thai" typeface="Cordia New"/>
+        <a:font script="Ethi" typeface="Nyala"/>
+        <a:font script="Beng" typeface="Vrinda"/>
+        <a:font script="Gujr" typeface="Shruti"/>
+        <a:font script="Khmr" typeface="DaunPenh"/>
+        <a:font script="Knda" typeface="Tunga"/>
+        <a:font script="Guru" typeface="Raavi"/>
+        <a:font script="Cans" typeface="Euphemia"/>
+        <a:font script="Cher" typeface="Plantagenet Cherokee"/>
+        <a:font script="Yiii" typeface="Microsoft Yi Baiti"/>
+        <a:font script="Tibt" typeface="Microsoft Himalaya"/>
+        <a:font script="Thaa" typeface="MV Boli"/>
+        <a:font script="Deva" typeface="Mangal"/>
+        <a:font script="Telu" typeface="Gautami"/>
+        <a:font script="Taml" typeface="Latha"/>
+        <a:font script="Syrc" typeface="Estrangelo Edessa"/>
+        <a:font script="Orya" typeface="Kalinga"/>
+        <a:font script="Mlym" typeface="Kartika"/>
+        <a:font script="Laoo" typeface="DokChampa"/>
+        <a:font script="Sinh" typeface="Iskoola Pota"/>
+        <a:font script="Mong" typeface="Mongolian Baiti"/>
+        <a:font script="Viet" typeface="Arial"/>
+        <a:font script="Uigh" typeface="Microsoft Uighur"/>
+        <a:font script="Geor" typeface="Sylfaen"/>
+        <a:font script="Armn" typeface="Arial"/>
+        <a:font script="Bugi" typeface="Leelawadee UI"/>
+        <a:font script="Bopo" typeface="Microsoft JhengHei"/>
+        <a:font script="Java" typeface="Javanese Text"/>
+        <a:font script="Lisu" typeface="Segoe UI"/>
+        <a:font script="Mymr" typeface="Myanmar Text"/>
+        <a:font script="Nkoo" typeface="Ebrima"/>
+        <a:font script="Olck" typeface="Nirmala UI"/>
+        <a:font script="Osma" typeface="Ebrima"/>
+        <a:font script="Phag" typeface="Phagspa"/>
+        <a:font script="Syrn" typeface="Estrangelo Edessa"/>
+        <a:font script="Syrj" typeface="Estrangelo Edessa"/>
+        <a:font script="Syre" typeface="Estrangelo Edessa"/>
+        <a:font script="Sora" typeface="Nirmala UI"/>
+        <a:font script="Tale" typeface="Microsoft Tai Le"/>
+        <a:font script="Talu" typeface="Microsoft New Tai Lue"/>
+        <a:font script="Tfng" typeface="Ebrima"/>
       </a:minorFont>
     </a:fontScheme>
-    <a:fmtScheme name="EH">
+    <a:fmtScheme name="Office">
       <a:fillStyleLst>
         <a:solidFill>
           <a:schemeClr val="phClr"/>
         </a:solidFill>
+        <a:gradFill rotWithShape="1">
+          <a:gsLst>
+            <a:gs pos="0">
+              <a:schemeClr val="phClr">
+                <a:lumMod val="110000"/>
+                <a:satMod val="105000"/>
+                <a:tint val="67000"/>
+              </a:schemeClr>
+            </a:gs>
+            <a:gs pos="50000">
+              <a:schemeClr val="phClr">
+                <a:lumMod val="105000"/>
+                <a:satMod val="103000"/>
+                <a:tint val="73000"/>
+              </a:schemeClr>
+            </a:gs>
+            <a:gs pos="100000">
+              <a:schemeClr val="phClr">
+                <a:lumMod val="105000"/>
+                <a:satMod val="109000"/>
+                <a:tint val="81000"/>
+              </a:schemeClr>
+            </a:gs>
+          </a:gsLst>
+          <a:lin ang="5400000" scaled="0"/>
+        </a:gradFill>
+        <a:gradFill rotWithShape="1">
+          <a:gsLst>
+            <a:gs pos="0">
+              <a:schemeClr val="phClr">
+                <a:satMod val="103000"/>
+                <a:lumMod val="102000"/>
+                <a:tint val="94000"/>
+              </a:schemeClr>
+            </a:gs>
+            <a:gs pos="50000">
+              <a:schemeClr val="phClr">
+                <a:satMod val="110000"/>
+                <a:lumMod val="100000"/>
+                <a:shade val="100000"/>
+              </a:schemeClr>
+            </a:gs>
+            <a:gs pos="100000">
+              <a:schemeClr val="phClr">
+                <a:lumMod val="99000"/>
+                <a:satMod val="120000"/>
+                <a:shade val="78000"/>
+              </a:schemeClr>
+            </a:gs>
+          </a:gsLst>
+          <a:lin ang="5400000" scaled="0"/>
+        </a:gradFill>
       </a:fillStyleLst>
       <a:lnStyleLst>
-        <a:ln w="9525">
+        <a:ln w="12700" cap="flat" cmpd="sng" algn="ctr">
           <a:solidFill>
             <a:schemeClr val="phClr"/>
           </a:solidFill>
+          <a:prstDash val="solid"/>
+          <a:miter lim="800000"/>
+        </a:ln>
+        <a:ln w="19050" cap="flat" cmpd="sng" algn="ctr">
+          <a:solidFill>
+            <a:schemeClr val="phClr"/>
+          </a:solidFill>
+          <a:prstDash val="solid"/>
+          <a:miter lim="800000"/>
+        </a:ln>
+        <a:ln w="25400" cap="flat" cmpd="sng" algn="ctr">
+          <a:solidFill>
+            <a:schemeClr val="phClr"/>
+          </a:solidFill>
+          <a:prstDash val="solid"/>
+          <a:miter lim="800000"/>
         </a:ln>
       </a:lnStyleLst>
       <a:effectStyleLst>
         <a:effectStyle>
           <a:effectLst/>
         </a:effectStyle>
+        <a:effectStyle>
+          <a:effectLst/>
+        </a:effectStyle>
+        <a:effectStyle>
+          <a:effectLst>
+            <a:outerShdw blurRad="57150" dist="19050" dir="5400000" algn="ctr" rotWithShape="0">
+              <a:srgbClr val="000000">
+                <a:alpha val="63000"/>
+              </a:srgbClr>
+            </a:outerShdw>
+          </a:effectLst>
+        </a:effectStyle>
       </a:effectStyleLst>
       <a:bgFillStyleLst>
         <a:solidFill>
           <a:schemeClr val="phClr"/>
         </a:solidFill>
+        <a:solidFill>
+          <a:schemeClr val="phClr">
+            <a:tint val="95000"/>
+            <a:satMod val="170000"/>
+          </a:schemeClr>
+        </a:solidFill>
+        <a:gradFill rotWithShape="1">
+          <a:gsLst>
+            <a:gs pos="0">
+              <a:schemeClr val="phClr">
+                <a:tint val="93000"/>
+                <a:satMod val="150000"/>
+                <a:shade val="98000"/>
+                <a:lumMod val="102000"/>
+              </a:schemeClr>
+            </a:gs>
+            <a:gs pos="50000">
+              <a:schemeClr val="phClr">
+                <a:tint val="98000"/>
+                <a:satMod val="130000"/>
+                <a:shade val="90000"/>
+                <a:lumMod val="103000"/>
+              </a:schemeClr>
+            </a:gs>
+            <a:gs pos="100000">
+              <a:schemeClr val="phClr">
+                <a:shade val="63000"/>
+                <a:satMod val="120000"/>
+              </a:schemeClr>
+            </a:gs>
+          </a:gsLst>
+          <a:lin ang="5400000" scaled="0"/>
+        </a:gradFill>
       </a:bgFillStyleLst>
     </a:fmtScheme>
   </a:themeElements>
-  <a:objectDefaults/>
+  <a:objectDefaults>
+    <a:lnDef>
+      <a:spPr/>
+      <a:bodyPr/>
+      <a:lstStyle/>
+      <a:style>
+        <a:lnRef idx="2">
+          <a:schemeClr val="accent1"/>
+        </a:lnRef>
+        <a:fillRef idx="0">
+          <a:schemeClr val="accent1"/>
+        </a:fillRef>
+        <a:effectRef idx="1">
+          <a:schemeClr val="accent1"/>
+        </a:effectRef>
+        <a:fontRef idx="minor">
+          <a:schemeClr val="tx1"/>
+        </a:fontRef>
+      </a:style>
+    </a:lnDef>
+  </a:objectDefaults>
   <a:extraClrSchemeLst/>
+  <a:extLst>
+    <a:ext uri="{05A4C25C-085E-4340-85A3-A5531E510DB2}">
+      <thm15:themeFamily xmlns:thm15="http://schemas.microsoft.com/office/thememl/2012/main" name="Office Theme" id="{2E142A2C-CD16-42D6-873A-C26D2A0506FA}" vid="{1BDDFF52-6CD6-40A5-AB3C-68EB2F1E4D0A}"/>
+    </a:ext>
+  </a:extLst>
 </a:theme>
 </file>